--- a/program/산출물양식/[발표] A-COP_진행경과_2026-09-04.pptx
+++ b/program/산출물양식/[발표] A-COP_진행경과_2026-09-04.pptx
@@ -15,9 +15,10 @@
     <p:sldId id="263" r:id="rId9"/>
     <p:sldId id="264" r:id="rId10"/>
     <p:sldId id="265" r:id="rId11"/>
+    <p:sldId id="266" r:id="rId12"/>
   </p:sldIdLst>
   <p:notesMasterIdLst>
-    <p:notesMasterId r:id="rId12"/>
+    <p:notesMasterId r:id="rId13"/>
   </p:notesMasterIdLst>
   <p:sldSz cx="12192000" cy="6858000"/>
   <p:notesSz cx="6858000" cy="12192000"/>
@@ -599,7 +600,7 @@
           <a:p>
             <a:r>
               <a:rPr lang="en-US" dirty="0"/>
-              <a:t>측정 없이 좋아졌다고 말하지 않는 것이 이 프로젝트 원칙입니다.</a:t>
+              <a:t>1번과 2번이 묶여 있습니다. 세그먼트가 정해져야 어느 데이터를 모을지가 정해집니다.</a:t>
             </a:r>
             <a:endParaRPr lang="en-US" dirty="0"/>
           </a:p>
@@ -623,6 +624,94 @@
             <a:fld id="{F7021451-1387-4CA6-816F-3879F97B5CBC}" type="slidenum">
               <a:rPr lang="en-US"/>
               <a:t>10</a:t>
+            </a:fld>
+            <a:endParaRPr lang="en-US"/>
+          </a:p>
+        </p:txBody>
+      </p:sp>
+    </p:spTree>
+    <p:extLst>
+      <p:ext uri="{BB962C8B-B14F-4D97-AF65-F5344CB8AC3E}">
+        <p14:creationId xmlns:p14="http://schemas.microsoft.com/office/powerpoint/2010/main" val="1024086991"/>
+      </p:ext>
+    </p:extLst>
+  </p:cSld>
+  <p:clrMapOvr>
+    <a:masterClrMapping/>
+  </p:clrMapOvr>
+</p:notes>
+</file>
+
+<file path=ppt/notesSlides/notesSlide11.xml><?xml version="1.0" encoding="utf-8"?>
+<p:notes xmlns:a="http://schemas.openxmlformats.org/drawingml/2006/main" xmlns:r="http://schemas.openxmlformats.org/officeDocument/2006/relationships" xmlns:p="http://schemas.openxmlformats.org/presentationml/2006/main">
+  <p:cSld>
+    <p:spTree>
+      <p:nvGrpSpPr>
+        <p:cNvPr id="1" name=""/>
+        <p:cNvGrpSpPr/>
+        <p:nvPr/>
+      </p:nvGrpSpPr>
+      <p:grpSpPr>
+        <a:xfrm>
+          <a:off x="0" y="0"/>
+          <a:ext cx="0" cy="0"/>
+          <a:chOff x="0" y="0"/>
+          <a:chExt cx="0" cy="0"/>
+        </a:xfrm>
+      </p:grpSpPr>
+      <p:sp>
+        <p:nvSpPr>
+          <p:cNvPr id="2" name="Slide Image Placeholder 1"/>
+          <p:cNvSpPr>
+            <a:spLocks noGrp="1" noRot="1" noChangeAspect="1"/>
+          </p:cNvSpPr>
+          <p:nvPr>
+            <p:ph type="sldImg"/>
+          </p:nvPr>
+        </p:nvSpPr>
+        <p:spPr/>
+      </p:sp>
+      <p:sp>
+        <p:nvSpPr>
+          <p:cNvPr id="3" name="Notes Placeholder 2"/>
+          <p:cNvSpPr>
+            <a:spLocks noGrp="1"/>
+          </p:cNvSpPr>
+          <p:nvPr>
+            <p:ph type="body" idx="1"/>
+          </p:nvPr>
+        </p:nvSpPr>
+        <p:spPr/>
+        <p:txBody>
+          <a:bodyPr/>
+          <a:lstStyle/>
+          <a:p>
+            <a:r>
+              <a:rPr lang="en-US" dirty="0"/>
+              <a:t>측정 없이 좋아졌다고 말하지 않는 것이 이 프로젝트 원칙입니다.</a:t>
+            </a:r>
+            <a:endParaRPr lang="en-US" dirty="0"/>
+          </a:p>
+        </p:txBody>
+      </p:sp>
+      <p:sp>
+        <p:nvSpPr>
+          <p:cNvPr id="4" name="Slide Number Placeholder 3"/>
+          <p:cNvSpPr>
+            <a:spLocks noGrp="1"/>
+          </p:cNvSpPr>
+          <p:nvPr>
+            <p:ph type="sldNum" sz="quarter" idx="10"/>
+          </p:nvPr>
+        </p:nvSpPr>
+        <p:spPr/>
+        <p:txBody>
+          <a:bodyPr/>
+          <a:lstStyle/>
+          <a:p>
+            <a:fld id="{F7021451-1387-4CA6-816F-3879F97B5CBC}" type="slidenum">
+              <a:rPr lang="en-US"/>
+              <a:t>11</a:t>
             </a:fld>
             <a:endParaRPr lang="en-US"/>
           </a:p>
@@ -951,7 +1040,7 @@
           <a:p>
             <a:r>
               <a:rPr lang="en-US" dirty="0"/>
-              <a:t>초록은 잘 되는 것, 황토는 아직 나쁜 것입니다. 과잉 기권 35%는 근거가 충분한데도 사람한테 넘긴 비율입니다.</a:t>
+              <a:t>성능 수치는 오늘 안 넣었습니다. 지금은 무엇이 서 있는지를 보고드리는 자리입니다.</a:t>
             </a:r>
             <a:endParaRPr lang="en-US" dirty="0"/>
           </a:p>
@@ -1039,7 +1128,7 @@
           <a:p>
             <a:r>
               <a:rPr lang="en-US" dirty="0"/>
-              <a:t>여기가 방향을 다시 본 계기입니다. 우리가 스스로 의심한 게 아니라 밖에서 두 번 같은 말을 들었습니다.</a:t>
+              <a:t>구매자 관점 기록이 5,773행인데 판매자 관점 실데이터는 아직 없습니다. 그게 멘토가 지적한 부분입니다.</a:t>
             </a:r>
             <a:endParaRPr lang="en-US" dirty="0"/>
           </a:p>
@@ -1127,7 +1216,7 @@
           <a:p>
             <a:r>
               <a:rPr lang="en-US" dirty="0"/>
-              <a:t>정세환 님은 아예 다른 주제 방향도 두 개 냈습니다. 복합 문제 해결형과 맞춤형 응대 전략형입니다.</a:t>
+              <a:t>셋 다 문서로 남겼습니다. 문서 드리프트는 재발 방지로 검사기까지 만들었습니다.</a:t>
             </a:r>
             <a:endParaRPr lang="en-US" dirty="0"/>
           </a:p>
@@ -1215,7 +1304,7 @@
           <a:p>
             <a:r>
               <a:rPr lang="en-US" dirty="0"/>
-              <a:t>셋 다 문서로 남겼습니다. 문서 드리프트는 재발 방지로 검사기까지 만들었습니다.</a:t>
+              <a:t>여기가 방향을 다시 본 계기입니다. 우리가 스스로 의심한 게 아니라 밖에서 두 번 같은 말을 들었습니다.</a:t>
             </a:r>
             <a:endParaRPr lang="en-US" dirty="0"/>
           </a:p>
@@ -1303,7 +1392,7 @@
           <a:p>
             <a:r>
               <a:rPr lang="en-US" dirty="0"/>
-              <a:t>1번과 2번이 묶여 있습니다. 세그먼트가 정해져야 어느 데이터를 모을지가 정해집니다.</a:t>
+              <a:t>정세환 님은 아예 다른 주제 방향도 두 개 냈습니다. 복합 문제 해결형과 맞춤형 응대 전략형입니다.</a:t>
             </a:r>
             <a:endParaRPr lang="en-US" dirty="0"/>
           </a:p>
@@ -1843,6 +1932,638 @@
 <file path=ppt/slides/slide10.xml><?xml version="1.0" encoding="utf-8"?>
 <p:sld xmlns:a="http://schemas.openxmlformats.org/drawingml/2006/main" xmlns:r="http://schemas.openxmlformats.org/officeDocument/2006/relationships" xmlns:p="http://schemas.openxmlformats.org/presentationml/2006/main">
   <p:cSld name="Slide 10">
+    <p:spTree>
+      <p:nvGrpSpPr>
+        <p:cNvPr id="1" name=""/>
+        <p:cNvGrpSpPr/>
+        <p:nvPr/>
+      </p:nvGrpSpPr>
+      <p:grpSpPr>
+        <a:xfrm>
+          <a:off x="0" y="0"/>
+          <a:ext cx="0" cy="0"/>
+          <a:chOff x="0" y="0"/>
+          <a:chExt cx="0" cy="0"/>
+        </a:xfrm>
+      </p:grpSpPr>
+      <p:sp>
+        <p:nvSpPr>
+          <p:cNvPr id="2" name="Text 0"/>
+          <p:cNvSpPr txBox="1"/>
+          <p:nvPr/>
+        </p:nvSpPr>
+        <p:spPr>
+          <a:xfrm>
+            <a:off x="685800" y="566928"/>
+            <a:ext cx="10789920" cy="914400"/>
+          </a:xfrm>
+          <a:prstGeom prst="rect">
+            <a:avLst/>
+          </a:prstGeom>
+          <a:noFill/>
+          <a:ln/>
+        </p:spPr>
+        <p:txBody>
+          <a:bodyPr wrap="square" lIns="0" tIns="0" rIns="0" bIns="0" rtlCol="0" anchor="ctr"/>
+          <a:lstStyle/>
+          <a:p>
+            <a:pPr indent="0" marL="0">
+              <a:buNone/>
+            </a:pPr>
+            <a:r>
+              <a:rPr lang="en-US" sz="3000" b="1" dirty="0">
+                <a:solidFill>
+                  <a:srgbClr val="161C28"/>
+                </a:solidFill>
+                <a:latin typeface="맑은 고딕" pitchFamily="34" charset="0"/>
+                <a:ea typeface="맑은 고딕" pitchFamily="34" charset="-122"/>
+                <a:cs typeface="맑은 고딕" pitchFamily="34" charset="-120"/>
+              </a:rPr>
+              <a:t>중간발표까지 11일</a:t>
+            </a:r>
+            <a:endParaRPr lang="en-US" sz="3000" dirty="0"/>
+          </a:p>
+        </p:txBody>
+      </p:sp>
+      <p:sp>
+        <p:nvSpPr>
+          <p:cNvPr id="3" name="Shape 1"/>
+          <p:cNvSpPr/>
+          <p:nvPr/>
+        </p:nvSpPr>
+        <p:spPr>
+          <a:xfrm>
+            <a:off x="685800" y="1965960"/>
+            <a:ext cx="384048" cy="384048"/>
+          </a:xfrm>
+          <a:prstGeom prst="ellipse">
+            <a:avLst/>
+          </a:prstGeom>
+          <a:solidFill>
+            <a:srgbClr val="B8442F"/>
+          </a:solidFill>
+          <a:ln w="12700">
+            <a:solidFill>
+              <a:srgbClr val="B8442F"/>
+            </a:solidFill>
+            <a:prstDash val="solid"/>
+          </a:ln>
+        </p:spPr>
+      </p:sp>
+      <p:sp>
+        <p:nvSpPr>
+          <p:cNvPr id="4" name="Text 2"/>
+          <p:cNvSpPr txBox="1"/>
+          <p:nvPr/>
+        </p:nvSpPr>
+        <p:spPr>
+          <a:xfrm>
+            <a:off x="685800" y="1965960"/>
+            <a:ext cx="384048" cy="384048"/>
+          </a:xfrm>
+          <a:prstGeom prst="rect">
+            <a:avLst/>
+          </a:prstGeom>
+          <a:noFill/>
+          <a:ln/>
+        </p:spPr>
+        <p:txBody>
+          <a:bodyPr wrap="square" lIns="0" tIns="0" rIns="0" bIns="0" rtlCol="0" anchor="ctr"/>
+          <a:lstStyle/>
+          <a:p>
+            <a:pPr algn="ctr" indent="0" marL="0">
+              <a:buNone/>
+            </a:pPr>
+            <a:r>
+              <a:rPr lang="en-US" sz="1300" b="1" dirty="0">
+                <a:solidFill>
+                  <a:srgbClr val="FFFFFF"/>
+                </a:solidFill>
+                <a:latin typeface="맑은 고딕" pitchFamily="34" charset="0"/>
+                <a:ea typeface="맑은 고딕" pitchFamily="34" charset="-122"/>
+                <a:cs typeface="맑은 고딕" pitchFamily="34" charset="-120"/>
+              </a:rPr>
+              <a:t>1</a:t>
+            </a:r>
+            <a:endParaRPr lang="en-US" sz="1300" dirty="0"/>
+          </a:p>
+        </p:txBody>
+      </p:sp>
+      <p:sp>
+        <p:nvSpPr>
+          <p:cNvPr id="5" name="Text 3"/>
+          <p:cNvSpPr txBox="1"/>
+          <p:nvPr/>
+        </p:nvSpPr>
+        <p:spPr>
+          <a:xfrm>
+            <a:off x="1280160" y="1856232"/>
+            <a:ext cx="6858000" cy="365760"/>
+          </a:xfrm>
+          <a:prstGeom prst="rect">
+            <a:avLst/>
+          </a:prstGeom>
+          <a:noFill/>
+          <a:ln/>
+        </p:spPr>
+        <p:txBody>
+          <a:bodyPr wrap="square" lIns="0" tIns="0" rIns="0" bIns="0" rtlCol="0" anchor="ctr"/>
+          <a:lstStyle/>
+          <a:p>
+            <a:pPr indent="0" marL="0">
+              <a:buNone/>
+            </a:pPr>
+            <a:r>
+              <a:rPr lang="en-US" sz="1700" b="1" dirty="0">
+                <a:solidFill>
+                  <a:srgbClr val="161C28"/>
+                </a:solidFill>
+                <a:latin typeface="맑은 고딕" pitchFamily="34" charset="0"/>
+                <a:ea typeface="맑은 고딕" pitchFamily="34" charset="-122"/>
+                <a:cs typeface="맑은 고딕" pitchFamily="34" charset="-120"/>
+              </a:rPr>
+              <a:t>세그먼트를 확정한다</a:t>
+            </a:r>
+            <a:endParaRPr lang="en-US" sz="1700" dirty="0"/>
+          </a:p>
+        </p:txBody>
+      </p:sp>
+      <p:sp>
+        <p:nvSpPr>
+          <p:cNvPr id="6" name="Text 4"/>
+          <p:cNvSpPr txBox="1"/>
+          <p:nvPr/>
+        </p:nvSpPr>
+        <p:spPr>
+          <a:xfrm>
+            <a:off x="1280160" y="2240280"/>
+            <a:ext cx="9144000" cy="365760"/>
+          </a:xfrm>
+          <a:prstGeom prst="rect">
+            <a:avLst/>
+          </a:prstGeom>
+          <a:noFill/>
+          <a:ln/>
+        </p:spPr>
+        <p:txBody>
+          <a:bodyPr wrap="square" lIns="0" tIns="0" rIns="0" bIns="0" rtlCol="0" anchor="ctr"/>
+          <a:lstStyle/>
+          <a:p>
+            <a:pPr indent="0" marL="0">
+              <a:buNone/>
+            </a:pPr>
+            <a:r>
+              <a:rPr lang="en-US" sz="1250" dirty="0">
+                <a:solidFill>
+                  <a:srgbClr val="6B7488"/>
+                </a:solidFill>
+                <a:latin typeface="맑은 고딕" pitchFamily="34" charset="0"/>
+                <a:ea typeface="맑은 고딕" pitchFamily="34" charset="-122"/>
+                <a:cs typeface="맑은 고딕" pitchFamily="34" charset="-120"/>
+              </a:rPr>
+              <a:t>여행·숙박이냐 해외구매대행이냐, 아니면 다른 방향이냐</a:t>
+            </a:r>
+            <a:endParaRPr lang="en-US" sz="1250" dirty="0"/>
+          </a:p>
+        </p:txBody>
+      </p:sp>
+      <p:sp>
+        <p:nvSpPr>
+          <p:cNvPr id="7" name="Shape 5"/>
+          <p:cNvSpPr/>
+          <p:nvPr/>
+        </p:nvSpPr>
+        <p:spPr>
+          <a:xfrm>
+            <a:off x="685800" y="3063240"/>
+            <a:ext cx="384048" cy="384048"/>
+          </a:xfrm>
+          <a:prstGeom prst="ellipse">
+            <a:avLst/>
+          </a:prstGeom>
+          <a:solidFill>
+            <a:srgbClr val="B8442F"/>
+          </a:solidFill>
+          <a:ln w="12700">
+            <a:solidFill>
+              <a:srgbClr val="B8442F"/>
+            </a:solidFill>
+            <a:prstDash val="solid"/>
+          </a:ln>
+        </p:spPr>
+      </p:sp>
+      <p:sp>
+        <p:nvSpPr>
+          <p:cNvPr id="8" name="Text 6"/>
+          <p:cNvSpPr txBox="1"/>
+          <p:nvPr/>
+        </p:nvSpPr>
+        <p:spPr>
+          <a:xfrm>
+            <a:off x="685800" y="3063240"/>
+            <a:ext cx="384048" cy="384048"/>
+          </a:xfrm>
+          <a:prstGeom prst="rect">
+            <a:avLst/>
+          </a:prstGeom>
+          <a:noFill/>
+          <a:ln/>
+        </p:spPr>
+        <p:txBody>
+          <a:bodyPr wrap="square" lIns="0" tIns="0" rIns="0" bIns="0" rtlCol="0" anchor="ctr"/>
+          <a:lstStyle/>
+          <a:p>
+            <a:pPr algn="ctr" indent="0" marL="0">
+              <a:buNone/>
+            </a:pPr>
+            <a:r>
+              <a:rPr lang="en-US" sz="1300" b="1" dirty="0">
+                <a:solidFill>
+                  <a:srgbClr val="FFFFFF"/>
+                </a:solidFill>
+                <a:latin typeface="맑은 고딕" pitchFamily="34" charset="0"/>
+                <a:ea typeface="맑은 고딕" pitchFamily="34" charset="-122"/>
+                <a:cs typeface="맑은 고딕" pitchFamily="34" charset="-120"/>
+              </a:rPr>
+              <a:t>2</a:t>
+            </a:r>
+            <a:endParaRPr lang="en-US" sz="1300" dirty="0"/>
+          </a:p>
+        </p:txBody>
+      </p:sp>
+      <p:sp>
+        <p:nvSpPr>
+          <p:cNvPr id="9" name="Text 7"/>
+          <p:cNvSpPr txBox="1"/>
+          <p:nvPr/>
+        </p:nvSpPr>
+        <p:spPr>
+          <a:xfrm>
+            <a:off x="1280160" y="2953512"/>
+            <a:ext cx="6858000" cy="365760"/>
+          </a:xfrm>
+          <a:prstGeom prst="rect">
+            <a:avLst/>
+          </a:prstGeom>
+          <a:noFill/>
+          <a:ln/>
+        </p:spPr>
+        <p:txBody>
+          <a:bodyPr wrap="square" lIns="0" tIns="0" rIns="0" bIns="0" rtlCol="0" anchor="ctr"/>
+          <a:lstStyle/>
+          <a:p>
+            <a:pPr indent="0" marL="0">
+              <a:buNone/>
+            </a:pPr>
+            <a:r>
+              <a:rPr lang="en-US" sz="1700" b="1" dirty="0">
+                <a:solidFill>
+                  <a:srgbClr val="161C28"/>
+                </a:solidFill>
+                <a:latin typeface="맑은 고딕" pitchFamily="34" charset="0"/>
+                <a:ea typeface="맑은 고딕" pitchFamily="34" charset="-122"/>
+                <a:cs typeface="맑은 고딕" pitchFamily="34" charset="-120"/>
+              </a:rPr>
+              <a:t>실사용자 데이터를 확보한다</a:t>
+            </a:r>
+            <a:endParaRPr lang="en-US" sz="1700" dirty="0"/>
+          </a:p>
+        </p:txBody>
+      </p:sp>
+      <p:sp>
+        <p:nvSpPr>
+          <p:cNvPr id="10" name="Text 8"/>
+          <p:cNvSpPr txBox="1"/>
+          <p:nvPr/>
+        </p:nvSpPr>
+        <p:spPr>
+          <a:xfrm>
+            <a:off x="1280160" y="3337560"/>
+            <a:ext cx="9144000" cy="365760"/>
+          </a:xfrm>
+          <a:prstGeom prst="rect">
+            <a:avLst/>
+          </a:prstGeom>
+          <a:noFill/>
+          <a:ln/>
+        </p:spPr>
+        <p:txBody>
+          <a:bodyPr wrap="square" lIns="0" tIns="0" rIns="0" bIns="0" rtlCol="0" anchor="ctr"/>
+          <a:lstStyle/>
+          <a:p>
+            <a:pPr indent="0" marL="0">
+              <a:buNone/>
+            </a:pPr>
+            <a:r>
+              <a:rPr lang="en-US" sz="1250" dirty="0">
+                <a:solidFill>
+                  <a:srgbClr val="6B7488"/>
+                </a:solidFill>
+                <a:latin typeface="맑은 고딕" pitchFamily="34" charset="0"/>
+                <a:ea typeface="맑은 고딕" pitchFamily="34" charset="-122"/>
+                <a:cs typeface="맑은 고딕" pitchFamily="34" charset="-120"/>
+              </a:rPr>
+              <a:t>멘토가 지적한 부분. 지금 판매자 관점 실데이터가 0건이다</a:t>
+            </a:r>
+            <a:endParaRPr lang="en-US" sz="1250" dirty="0"/>
+          </a:p>
+        </p:txBody>
+      </p:sp>
+      <p:sp>
+        <p:nvSpPr>
+          <p:cNvPr id="11" name="Shape 9"/>
+          <p:cNvSpPr/>
+          <p:nvPr/>
+        </p:nvSpPr>
+        <p:spPr>
+          <a:xfrm>
+            <a:off x="685800" y="4160520"/>
+            <a:ext cx="384048" cy="384048"/>
+          </a:xfrm>
+          <a:prstGeom prst="ellipse">
+            <a:avLst/>
+          </a:prstGeom>
+          <a:solidFill>
+            <a:srgbClr val="A8720C"/>
+          </a:solidFill>
+          <a:ln w="12700">
+            <a:solidFill>
+              <a:srgbClr val="A8720C"/>
+            </a:solidFill>
+            <a:prstDash val="solid"/>
+          </a:ln>
+        </p:spPr>
+      </p:sp>
+      <p:sp>
+        <p:nvSpPr>
+          <p:cNvPr id="12" name="Text 10"/>
+          <p:cNvSpPr txBox="1"/>
+          <p:nvPr/>
+        </p:nvSpPr>
+        <p:spPr>
+          <a:xfrm>
+            <a:off x="685800" y="4160520"/>
+            <a:ext cx="384048" cy="384048"/>
+          </a:xfrm>
+          <a:prstGeom prst="rect">
+            <a:avLst/>
+          </a:prstGeom>
+          <a:noFill/>
+          <a:ln/>
+        </p:spPr>
+        <p:txBody>
+          <a:bodyPr wrap="square" lIns="0" tIns="0" rIns="0" bIns="0" rtlCol="0" anchor="ctr"/>
+          <a:lstStyle/>
+          <a:p>
+            <a:pPr algn="ctr" indent="0" marL="0">
+              <a:buNone/>
+            </a:pPr>
+            <a:r>
+              <a:rPr lang="en-US" sz="1300" b="1" dirty="0">
+                <a:solidFill>
+                  <a:srgbClr val="FFFFFF"/>
+                </a:solidFill>
+                <a:latin typeface="맑은 고딕" pitchFamily="34" charset="0"/>
+                <a:ea typeface="맑은 고딕" pitchFamily="34" charset="-122"/>
+                <a:cs typeface="맑은 고딕" pitchFamily="34" charset="-120"/>
+              </a:rPr>
+              <a:t>3</a:t>
+            </a:r>
+            <a:endParaRPr lang="en-US" sz="1300" dirty="0"/>
+          </a:p>
+        </p:txBody>
+      </p:sp>
+      <p:sp>
+        <p:nvSpPr>
+          <p:cNvPr id="13" name="Text 11"/>
+          <p:cNvSpPr txBox="1"/>
+          <p:nvPr/>
+        </p:nvSpPr>
+        <p:spPr>
+          <a:xfrm>
+            <a:off x="1280160" y="4050792"/>
+            <a:ext cx="6858000" cy="365760"/>
+          </a:xfrm>
+          <a:prstGeom prst="rect">
+            <a:avLst/>
+          </a:prstGeom>
+          <a:noFill/>
+          <a:ln/>
+        </p:spPr>
+        <p:txBody>
+          <a:bodyPr wrap="square" lIns="0" tIns="0" rIns="0" bIns="0" rtlCol="0" anchor="ctr"/>
+          <a:lstStyle/>
+          <a:p>
+            <a:pPr indent="0" marL="0">
+              <a:buNone/>
+            </a:pPr>
+            <a:r>
+              <a:rPr lang="en-US" sz="1700" b="1" dirty="0">
+                <a:solidFill>
+                  <a:srgbClr val="161C28"/>
+                </a:solidFill>
+                <a:latin typeface="맑은 고딕" pitchFamily="34" charset="0"/>
+                <a:ea typeface="맑은 고딕" pitchFamily="34" charset="-122"/>
+                <a:cs typeface="맑은 고딕" pitchFamily="34" charset="-120"/>
+              </a:rPr>
+              <a:t>과잉 기권 35% 를 낮춘다</a:t>
+            </a:r>
+            <a:endParaRPr lang="en-US" sz="1700" dirty="0"/>
+          </a:p>
+        </p:txBody>
+      </p:sp>
+      <p:sp>
+        <p:nvSpPr>
+          <p:cNvPr id="14" name="Text 12"/>
+          <p:cNvSpPr txBox="1"/>
+          <p:nvPr/>
+        </p:nvSpPr>
+        <p:spPr>
+          <a:xfrm>
+            <a:off x="1280160" y="4434840"/>
+            <a:ext cx="9144000" cy="365760"/>
+          </a:xfrm>
+          <a:prstGeom prst="rect">
+            <a:avLst/>
+          </a:prstGeom>
+          <a:noFill/>
+          <a:ln/>
+        </p:spPr>
+        <p:txBody>
+          <a:bodyPr wrap="square" lIns="0" tIns="0" rIns="0" bIns="0" rtlCol="0" anchor="ctr"/>
+          <a:lstStyle/>
+          <a:p>
+            <a:pPr indent="0" marL="0">
+              <a:buNone/>
+            </a:pPr>
+            <a:r>
+              <a:rPr lang="en-US" sz="1250" dirty="0">
+                <a:solidFill>
+                  <a:srgbClr val="6B7488"/>
+                </a:solidFill>
+                <a:latin typeface="맑은 고딕" pitchFamily="34" charset="0"/>
+                <a:ea typeface="맑은 고딕" pitchFamily="34" charset="-122"/>
+                <a:cs typeface="맑은 고딕" pitchFamily="34" charset="-120"/>
+              </a:rPr>
+              <a:t>근거가 충분한데 사람에게 넘기는 비율</a:t>
+            </a:r>
+            <a:endParaRPr lang="en-US" sz="1250" dirty="0"/>
+          </a:p>
+        </p:txBody>
+      </p:sp>
+      <p:sp>
+        <p:nvSpPr>
+          <p:cNvPr id="15" name="Shape 13"/>
+          <p:cNvSpPr/>
+          <p:nvPr/>
+        </p:nvSpPr>
+        <p:spPr>
+          <a:xfrm>
+            <a:off x="685800" y="5257800"/>
+            <a:ext cx="384048" cy="384048"/>
+          </a:xfrm>
+          <a:prstGeom prst="ellipse">
+            <a:avLst/>
+          </a:prstGeom>
+          <a:solidFill>
+            <a:srgbClr val="2F5BD8"/>
+          </a:solidFill>
+          <a:ln w="12700">
+            <a:solidFill>
+              <a:srgbClr val="2F5BD8"/>
+            </a:solidFill>
+            <a:prstDash val="solid"/>
+          </a:ln>
+        </p:spPr>
+      </p:sp>
+      <p:sp>
+        <p:nvSpPr>
+          <p:cNvPr id="16" name="Text 14"/>
+          <p:cNvSpPr txBox="1"/>
+          <p:nvPr/>
+        </p:nvSpPr>
+        <p:spPr>
+          <a:xfrm>
+            <a:off x="685800" y="5257800"/>
+            <a:ext cx="384048" cy="384048"/>
+          </a:xfrm>
+          <a:prstGeom prst="rect">
+            <a:avLst/>
+          </a:prstGeom>
+          <a:noFill/>
+          <a:ln/>
+        </p:spPr>
+        <p:txBody>
+          <a:bodyPr wrap="square" lIns="0" tIns="0" rIns="0" bIns="0" rtlCol="0" anchor="ctr"/>
+          <a:lstStyle/>
+          <a:p>
+            <a:pPr algn="ctr" indent="0" marL="0">
+              <a:buNone/>
+            </a:pPr>
+            <a:r>
+              <a:rPr lang="en-US" sz="1300" b="1" dirty="0">
+                <a:solidFill>
+                  <a:srgbClr val="FFFFFF"/>
+                </a:solidFill>
+                <a:latin typeface="맑은 고딕" pitchFamily="34" charset="0"/>
+                <a:ea typeface="맑은 고딕" pitchFamily="34" charset="-122"/>
+                <a:cs typeface="맑은 고딕" pitchFamily="34" charset="-120"/>
+              </a:rPr>
+              <a:t>4</a:t>
+            </a:r>
+            <a:endParaRPr lang="en-US" sz="1300" dirty="0"/>
+          </a:p>
+        </p:txBody>
+      </p:sp>
+      <p:sp>
+        <p:nvSpPr>
+          <p:cNvPr id="17" name="Text 15"/>
+          <p:cNvSpPr txBox="1"/>
+          <p:nvPr/>
+        </p:nvSpPr>
+        <p:spPr>
+          <a:xfrm>
+            <a:off x="1280160" y="5148072"/>
+            <a:ext cx="6858000" cy="365760"/>
+          </a:xfrm>
+          <a:prstGeom prst="rect">
+            <a:avLst/>
+          </a:prstGeom>
+          <a:noFill/>
+          <a:ln/>
+        </p:spPr>
+        <p:txBody>
+          <a:bodyPr wrap="square" lIns="0" tIns="0" rIns="0" bIns="0" rtlCol="0" anchor="ctr"/>
+          <a:lstStyle/>
+          <a:p>
+            <a:pPr indent="0" marL="0">
+              <a:buNone/>
+            </a:pPr>
+            <a:r>
+              <a:rPr lang="en-US" sz="1700" b="1" dirty="0">
+                <a:solidFill>
+                  <a:srgbClr val="161C28"/>
+                </a:solidFill>
+                <a:latin typeface="맑은 고딕" pitchFamily="34" charset="0"/>
+                <a:ea typeface="맑은 고딕" pitchFamily="34" charset="-122"/>
+                <a:cs typeface="맑은 고딕" pitchFamily="34" charset="-120"/>
+              </a:rPr>
+              <a:t>Case lifecycle 이 도는 걸 보여준다</a:t>
+            </a:r>
+            <a:endParaRPr lang="en-US" sz="1700" dirty="0"/>
+          </a:p>
+        </p:txBody>
+      </p:sp>
+      <p:sp>
+        <p:nvSpPr>
+          <p:cNvPr id="18" name="Text 16"/>
+          <p:cNvSpPr txBox="1"/>
+          <p:nvPr/>
+        </p:nvSpPr>
+        <p:spPr>
+          <a:xfrm>
+            <a:off x="1280160" y="5532120"/>
+            <a:ext cx="9144000" cy="365760"/>
+          </a:xfrm>
+          <a:prstGeom prst="rect">
+            <a:avLst/>
+          </a:prstGeom>
+          <a:noFill/>
+          <a:ln/>
+        </p:spPr>
+        <p:txBody>
+          <a:bodyPr wrap="square" lIns="0" tIns="0" rIns="0" bIns="0" rtlCol="0" anchor="ctr"/>
+          <a:lstStyle/>
+          <a:p>
+            <a:pPr indent="0" marL="0">
+              <a:buNone/>
+            </a:pPr>
+            <a:r>
+              <a:rPr lang="en-US" sz="1250" dirty="0">
+                <a:solidFill>
+                  <a:srgbClr val="6B7488"/>
+                </a:solidFill>
+                <a:latin typeface="맑은 고딕" pitchFamily="34" charset="0"/>
+                <a:ea typeface="맑은 고딕" pitchFamily="34" charset="-122"/>
+                <a:cs typeface="맑은 고딕" pitchFamily="34" charset="-120"/>
+              </a:rPr>
+              <a:t>강사가 말한 핵심. 기술 나열이 아니라 한 건이 끝까지 가는 것</a:t>
+            </a:r>
+            <a:endParaRPr lang="en-US" sz="1250" dirty="0"/>
+          </a:p>
+        </p:txBody>
+      </p:sp>
+    </p:spTree>
+  </p:cSld>
+  <p:clrMapOvr>
+    <a:masterClrMapping/>
+  </p:clrMapOvr>
+</p:sld>
+</file>
+
+<file path=ppt/slides/slide11.xml><?xml version="1.0" encoding="utf-8"?>
+<p:sld xmlns:a="http://schemas.openxmlformats.org/drawingml/2006/main" xmlns:r="http://schemas.openxmlformats.org/officeDocument/2006/relationships" xmlns:p="http://schemas.openxmlformats.org/presentationml/2006/main">
+  <p:cSld name="Slide 11">
     <p:bg>
       <p:bgPr>
         <a:solidFill>
@@ -1897,7 +2618,7 @@
                 <a:ea typeface="맑은 고딕" pitchFamily="34" charset="-122"/>
                 <a:cs typeface="맑은 고딕" pitchFamily="34" charset="-120"/>
               </a:rPr>
-              <a:t>만든 것보다 잰 것이 많다</a:t>
+              <a:t>한 달 동안 여기까지 왔다</a:t>
             </a:r>
             <a:endParaRPr lang="en-US" sz="4000" dirty="0"/>
           </a:p>
@@ -1939,7 +2660,7 @@
                 <a:ea typeface="맑은 고딕" pitchFamily="34" charset="-122"/>
                 <a:cs typeface="맑은 고딕" pitchFamily="34" charset="-120"/>
               </a:rPr>
-              <a:t>한 달 동안 도메인을 찾고, 구조를 세우고, 재보고, 다시 좁히는 중이다.</a:t>
+              <a:t>도메인을 찾고, 구조를 세우고, 데이터를 모았다.</a:t>
             </a:r>
             <a:endParaRPr lang="en-US" sz="1600" dirty="0"/>
           </a:p>
@@ -1959,7 +2680,7 @@
                 <a:ea typeface="맑은 고딕" pitchFamily="34" charset="-122"/>
                 <a:cs typeface="맑은 고딕" pitchFamily="34" charset="-120"/>
               </a:rPr>
-              <a:t>재보고 나서야 값을 증명하지 못한다는 걸 알았다. 그래서 지금 범위를 줄이고 있다.</a:t>
+              <a:t>지적을 받고 나서, 어느 시장부터 들어갈지를 다시 보고 있다. 그게 지금 하는 일이다.</a:t>
             </a:r>
             <a:endParaRPr lang="en-US" sz="1600" dirty="0"/>
           </a:p>
@@ -2473,7 +3194,7 @@
         </p:nvSpPr>
         <p:spPr>
           <a:xfrm>
-            <a:off x="685800" y="1828800"/>
+            <a:off x="685800" y="2048256"/>
             <a:ext cx="10789920" cy="411480"/>
           </a:xfrm>
           <a:prstGeom prst="rect">
@@ -2512,7 +3233,7 @@
         </p:nvSpPr>
         <p:spPr>
           <a:xfrm>
-            <a:off x="731520" y="2331720"/>
+            <a:off x="731520" y="2542032"/>
             <a:ext cx="1188720" cy="365760"/>
           </a:xfrm>
           <a:prstGeom prst="rect">
@@ -2551,7 +3272,7 @@
         </p:nvSpPr>
         <p:spPr>
           <a:xfrm>
-            <a:off x="2011680" y="2331720"/>
+            <a:off x="2011680" y="2542032"/>
             <a:ext cx="9418320" cy="365760"/>
           </a:xfrm>
           <a:prstGeom prst="rect">
@@ -2590,7 +3311,7 @@
         </p:nvSpPr>
         <p:spPr>
           <a:xfrm>
-            <a:off x="731520" y="2953512"/>
+            <a:off x="731520" y="3145536"/>
             <a:ext cx="1188720" cy="365760"/>
           </a:xfrm>
           <a:prstGeom prst="rect">
@@ -2629,7 +3350,7 @@
         </p:nvSpPr>
         <p:spPr>
           <a:xfrm>
-            <a:off x="2011680" y="2953512"/>
+            <a:off x="2011680" y="3145536"/>
             <a:ext cx="9418320" cy="365760"/>
           </a:xfrm>
           <a:prstGeom prst="rect">
@@ -2668,7 +3389,7 @@
         </p:nvSpPr>
         <p:spPr>
           <a:xfrm>
-            <a:off x="731520" y="3575304"/>
+            <a:off x="731520" y="3749040"/>
             <a:ext cx="1188720" cy="365760"/>
           </a:xfrm>
           <a:prstGeom prst="rect">
@@ -2707,7 +3428,7 @@
         </p:nvSpPr>
         <p:spPr>
           <a:xfrm>
-            <a:off x="2011680" y="3575304"/>
+            <a:off x="2011680" y="3749040"/>
             <a:ext cx="9418320" cy="365760"/>
           </a:xfrm>
           <a:prstGeom prst="rect">
@@ -2746,7 +3467,7 @@
         </p:nvSpPr>
         <p:spPr>
           <a:xfrm>
-            <a:off x="731520" y="4197096"/>
+            <a:off x="731520" y="4352544"/>
             <a:ext cx="1188720" cy="365760"/>
           </a:xfrm>
           <a:prstGeom prst="rect">
@@ -2785,7 +3506,7 @@
         </p:nvSpPr>
         <p:spPr>
           <a:xfrm>
-            <a:off x="2011680" y="4197096"/>
+            <a:off x="2011680" y="4352544"/>
             <a:ext cx="9418320" cy="365760"/>
           </a:xfrm>
           <a:prstGeom prst="rect">
@@ -2824,7 +3545,7 @@
         </p:nvSpPr>
         <p:spPr>
           <a:xfrm>
-            <a:off x="731520" y="4818888"/>
+            <a:off x="731520" y="4956048"/>
             <a:ext cx="1188720" cy="365760"/>
           </a:xfrm>
           <a:prstGeom prst="rect">
@@ -2863,7 +3584,7 @@
         </p:nvSpPr>
         <p:spPr>
           <a:xfrm>
-            <a:off x="2011680" y="4818888"/>
+            <a:off x="2011680" y="4956048"/>
             <a:ext cx="9418320" cy="365760"/>
           </a:xfrm>
           <a:prstGeom prst="rect">
@@ -2902,7 +3623,7 @@
         </p:nvSpPr>
         <p:spPr>
           <a:xfrm>
-            <a:off x="731520" y="5440680"/>
+            <a:off x="731520" y="5559552"/>
             <a:ext cx="1188720" cy="365760"/>
           </a:xfrm>
           <a:prstGeom prst="rect">
@@ -2941,7 +3662,7 @@
         </p:nvSpPr>
         <p:spPr>
           <a:xfrm>
-            <a:off x="2011680" y="5440680"/>
+            <a:off x="2011680" y="5559552"/>
             <a:ext cx="9418320" cy="365760"/>
           </a:xfrm>
           <a:prstGeom prst="rect">
@@ -3383,7 +4104,7 @@
                 <a:ea typeface="맑은 고딕" pitchFamily="34" charset="-122"/>
                 <a:cs typeface="맑은 고딕" pitchFamily="34" charset="-120"/>
               </a:rPr>
-              <a:t>만들고 재봤다</a:t>
+              <a:t>지금 만들어 둔 것</a:t>
             </a:r>
             <a:endParaRPr lang="en-US" sz="3000" dirty="0"/>
           </a:p>
@@ -3422,7 +4143,7 @@
                 <a:ea typeface="맑은 고딕" pitchFamily="34" charset="-122"/>
                 <a:cs typeface="맑은 고딕" pitchFamily="34" charset="-120"/>
               </a:rPr>
-              <a:t>골든셋 72건을 실제로 돌려서 나온 값이다.</a:t>
+              <a:t>뼈대는 돌아간다. 성능을 말할 단계는 아니고, 무엇이 서 있는지를 적는다.</a:t>
             </a:r>
             <a:endParaRPr lang="en-US" sz="1400" dirty="0"/>
           </a:p>
@@ -3436,20 +4157,18 @@
         </p:nvSpPr>
         <p:spPr>
           <a:xfrm>
-            <a:off x="685800" y="2148840"/>
-            <a:ext cx="3383280" cy="1508760"/>
-          </a:xfrm>
-          <a:prstGeom prst="roundRect">
-            <a:avLst>
-              <a:gd name="adj" fmla="val 6061"/>
-            </a:avLst>
+            <a:off x="685800" y="2276856"/>
+            <a:ext cx="256032" cy="256032"/>
+          </a:xfrm>
+          <a:prstGeom prst="ellipse">
+            <a:avLst/>
           </a:prstGeom>
           <a:solidFill>
-            <a:srgbClr val="F4F6FA"/>
+            <a:srgbClr val="2F5BD8"/>
           </a:solidFill>
           <a:ln w="12700">
             <a:solidFill>
-              <a:srgbClr val="DBE0EA"/>
+              <a:srgbClr val="2F5BD8"/>
             </a:solidFill>
             <a:prstDash val="solid"/>
           </a:ln>
@@ -3463,34 +4182,34 @@
         </p:nvSpPr>
         <p:spPr>
           <a:xfrm>
-            <a:off x="1005840" y="2377440"/>
-            <a:ext cx="2743200" cy="777240"/>
-          </a:xfrm>
-          <a:prstGeom prst="rect">
-            <a:avLst/>
-          </a:prstGeom>
-          <a:noFill/>
-          <a:ln/>
-        </p:spPr>
-        <p:txBody>
-          <a:bodyPr wrap="square" lIns="0" tIns="0" rIns="0" bIns="0" rtlCol="0" anchor="ctr"/>
-          <a:lstStyle/>
-          <a:p>
-            <a:pPr indent="0" marL="0">
-              <a:buNone/>
-            </a:pPr>
-            <a:r>
-              <a:rPr lang="en-US" sz="3600" b="1" dirty="0">
-                <a:solidFill>
-                  <a:srgbClr val="0D7A4D"/>
-                </a:solidFill>
-                <a:latin typeface="맑은 고딕" pitchFamily="34" charset="0"/>
-                <a:ea typeface="맑은 고딕" pitchFamily="34" charset="-122"/>
-                <a:cs typeface="맑은 고딕" pitchFamily="34" charset="-120"/>
-              </a:rPr>
-              <a:t>97.0%</a:t>
-            </a:r>
-            <a:endParaRPr lang="en-US" sz="3600" dirty="0"/>
+            <a:off x="1069848" y="2148840"/>
+            <a:ext cx="2103120" cy="320040"/>
+          </a:xfrm>
+          <a:prstGeom prst="rect">
+            <a:avLst/>
+          </a:prstGeom>
+          <a:noFill/>
+          <a:ln/>
+        </p:spPr>
+        <p:txBody>
+          <a:bodyPr wrap="square" lIns="0" tIns="0" rIns="0" bIns="0" rtlCol="0" anchor="ctr"/>
+          <a:lstStyle/>
+          <a:p>
+            <a:pPr indent="0" marL="0">
+              <a:buNone/>
+            </a:pPr>
+            <a:r>
+              <a:rPr lang="en-US" sz="1350" b="1" dirty="0">
+                <a:solidFill>
+                  <a:srgbClr val="161C28"/>
+                </a:solidFill>
+                <a:latin typeface="맑은 고딕" pitchFamily="34" charset="0"/>
+                <a:ea typeface="맑은 고딕" pitchFamily="34" charset="-122"/>
+                <a:cs typeface="맑은 고딕" pitchFamily="34" charset="-120"/>
+              </a:rPr>
+              <a:t>Case 런타임</a:t>
+            </a:r>
+            <a:endParaRPr lang="en-US" sz="1350" dirty="0"/>
           </a:p>
         </p:txBody>
       </p:sp>
@@ -3502,8 +4221,8 @@
         </p:nvSpPr>
         <p:spPr>
           <a:xfrm>
-            <a:off x="1005840" y="3136392"/>
-            <a:ext cx="2743200" cy="411480"/>
+            <a:off x="1069848" y="2478024"/>
+            <a:ext cx="4663440" cy="502920"/>
           </a:xfrm>
           <a:prstGeom prst="rect">
             <a:avLst/>
@@ -3527,7 +4246,7 @@
                 <a:ea typeface="맑은 고딕" pitchFamily="34" charset="-122"/>
                 <a:cs typeface="맑은 고딕" pitchFamily="34" charset="-120"/>
               </a:rPr>
-              <a:t>근거 정합률</a:t>
+              <a:t>상태전이 21이벤트 / 24전이. 상태를 바꾸는 문은 하나뿐</a:t>
             </a:r>
             <a:endParaRPr lang="en-US" sz="1150" dirty="0"/>
           </a:p>
@@ -3541,20 +4260,18 @@
         </p:nvSpPr>
         <p:spPr>
           <a:xfrm>
-            <a:off x="4389120" y="2148840"/>
-            <a:ext cx="3383280" cy="1508760"/>
-          </a:xfrm>
-          <a:prstGeom prst="roundRect">
-            <a:avLst>
-              <a:gd name="adj" fmla="val 6061"/>
-            </a:avLst>
+            <a:off x="6172200" y="2276856"/>
+            <a:ext cx="256032" cy="256032"/>
+          </a:xfrm>
+          <a:prstGeom prst="ellipse">
+            <a:avLst/>
           </a:prstGeom>
           <a:solidFill>
-            <a:srgbClr val="F4F6FA"/>
+            <a:srgbClr val="2F5BD8"/>
           </a:solidFill>
           <a:ln w="12700">
             <a:solidFill>
-              <a:srgbClr val="DBE0EA"/>
+              <a:srgbClr val="2F5BD8"/>
             </a:solidFill>
             <a:prstDash val="solid"/>
           </a:ln>
@@ -3568,34 +4285,34 @@
         </p:nvSpPr>
         <p:spPr>
           <a:xfrm>
-            <a:off x="4709160" y="2377440"/>
-            <a:ext cx="2743200" cy="777240"/>
-          </a:xfrm>
-          <a:prstGeom prst="rect">
-            <a:avLst/>
-          </a:prstGeom>
-          <a:noFill/>
-          <a:ln/>
-        </p:spPr>
-        <p:txBody>
-          <a:bodyPr wrap="square" lIns="0" tIns="0" rIns="0" bIns="0" rtlCol="0" anchor="ctr"/>
-          <a:lstStyle/>
-          <a:p>
-            <a:pPr indent="0" marL="0">
-              <a:buNone/>
-            </a:pPr>
-            <a:r>
-              <a:rPr lang="en-US" sz="3600" b="1" dirty="0">
-                <a:solidFill>
-                  <a:srgbClr val="0D7A4D"/>
-                </a:solidFill>
-                <a:latin typeface="맑은 고딕" pitchFamily="34" charset="0"/>
-                <a:ea typeface="맑은 고딕" pitchFamily="34" charset="-122"/>
-                <a:cs typeface="맑은 고딕" pitchFamily="34" charset="-120"/>
-              </a:rPr>
-              <a:t>3.0%</a:t>
-            </a:r>
-            <a:endParaRPr lang="en-US" sz="3600" dirty="0"/>
+            <a:off x="6556248" y="2148840"/>
+            <a:ext cx="2103120" cy="320040"/>
+          </a:xfrm>
+          <a:prstGeom prst="rect">
+            <a:avLst/>
+          </a:prstGeom>
+          <a:noFill/>
+          <a:ln/>
+        </p:spPr>
+        <p:txBody>
+          <a:bodyPr wrap="square" lIns="0" tIns="0" rIns="0" bIns="0" rtlCol="0" anchor="ctr"/>
+          <a:lstStyle/>
+          <a:p>
+            <a:pPr indent="0" marL="0">
+              <a:buNone/>
+            </a:pPr>
+            <a:r>
+              <a:rPr lang="en-US" sz="1350" b="1" dirty="0">
+                <a:solidFill>
+                  <a:srgbClr val="161C28"/>
+                </a:solidFill>
+                <a:latin typeface="맑은 고딕" pitchFamily="34" charset="0"/>
+                <a:ea typeface="맑은 고딕" pitchFamily="34" charset="-122"/>
+                <a:cs typeface="맑은 고딕" pitchFamily="34" charset="-120"/>
+              </a:rPr>
+              <a:t>DB 스키마</a:t>
+            </a:r>
+            <a:endParaRPr lang="en-US" sz="1350" dirty="0"/>
           </a:p>
         </p:txBody>
       </p:sp>
@@ -3607,8 +4324,8 @@
         </p:nvSpPr>
         <p:spPr>
           <a:xfrm>
-            <a:off x="4709160" y="3136392"/>
-            <a:ext cx="2743200" cy="411480"/>
+            <a:off x="6556248" y="2478024"/>
+            <a:ext cx="4663440" cy="502920"/>
           </a:xfrm>
           <a:prstGeom prst="rect">
             <a:avLst/>
@@ -3632,7 +4349,7 @@
                 <a:ea typeface="맑은 고딕" pitchFamily="34" charset="-122"/>
                 <a:cs typeface="맑은 고딕" pitchFamily="34" charset="-120"/>
               </a:rPr>
-              <a:t>근거 초과율</a:t>
+              <a:t>18 테이블. 마이그레이션 재실행 안전</a:t>
             </a:r>
             <a:endParaRPr lang="en-US" sz="1150" dirty="0"/>
           </a:p>
@@ -3646,20 +4363,18 @@
         </p:nvSpPr>
         <p:spPr>
           <a:xfrm>
-            <a:off x="8092440" y="2148840"/>
-            <a:ext cx="3383280" cy="1508760"/>
-          </a:xfrm>
-          <a:prstGeom prst="roundRect">
-            <a:avLst>
-              <a:gd name="adj" fmla="val 6061"/>
-            </a:avLst>
+            <a:off x="685800" y="3209544"/>
+            <a:ext cx="256032" cy="256032"/>
+          </a:xfrm>
+          <a:prstGeom prst="ellipse">
+            <a:avLst/>
           </a:prstGeom>
           <a:solidFill>
-            <a:srgbClr val="F4F6FA"/>
+            <a:srgbClr val="2F5BD8"/>
           </a:solidFill>
           <a:ln w="12700">
             <a:solidFill>
-              <a:srgbClr val="DBE0EA"/>
+              <a:srgbClr val="2F5BD8"/>
             </a:solidFill>
             <a:prstDash val="solid"/>
           </a:ln>
@@ -3673,34 +4388,34 @@
         </p:nvSpPr>
         <p:spPr>
           <a:xfrm>
-            <a:off x="8412480" y="2377440"/>
-            <a:ext cx="2743200" cy="777240"/>
-          </a:xfrm>
-          <a:prstGeom prst="rect">
-            <a:avLst/>
-          </a:prstGeom>
-          <a:noFill/>
-          <a:ln/>
-        </p:spPr>
-        <p:txBody>
-          <a:bodyPr wrap="square" lIns="0" tIns="0" rIns="0" bIns="0" rtlCol="0" anchor="ctr"/>
-          <a:lstStyle/>
-          <a:p>
-            <a:pPr indent="0" marL="0">
-              <a:buNone/>
-            </a:pPr>
-            <a:r>
-              <a:rPr lang="en-US" sz="3600" b="1" dirty="0">
-                <a:solidFill>
-                  <a:srgbClr val="0D7A4D"/>
-                </a:solidFill>
-                <a:latin typeface="맑은 고딕" pitchFamily="34" charset="0"/>
-                <a:ea typeface="맑은 고딕" pitchFamily="34" charset="-122"/>
-                <a:cs typeface="맑은 고딕" pitchFamily="34" charset="-120"/>
-              </a:rPr>
-              <a:t>100%</a:t>
-            </a:r>
-            <a:endParaRPr lang="en-US" sz="3600" dirty="0"/>
+            <a:off x="1069848" y="3081528"/>
+            <a:ext cx="2103120" cy="320040"/>
+          </a:xfrm>
+          <a:prstGeom prst="rect">
+            <a:avLst/>
+          </a:prstGeom>
+          <a:noFill/>
+          <a:ln/>
+        </p:spPr>
+        <p:txBody>
+          <a:bodyPr wrap="square" lIns="0" tIns="0" rIns="0" bIns="0" rtlCol="0" anchor="ctr"/>
+          <a:lstStyle/>
+          <a:p>
+            <a:pPr indent="0" marL="0">
+              <a:buNone/>
+            </a:pPr>
+            <a:r>
+              <a:rPr lang="en-US" sz="1350" b="1" dirty="0">
+                <a:solidFill>
+                  <a:srgbClr val="161C28"/>
+                </a:solidFill>
+                <a:latin typeface="맑은 고딕" pitchFamily="34" charset="0"/>
+                <a:ea typeface="맑은 고딕" pitchFamily="34" charset="-122"/>
+                <a:cs typeface="맑은 고딕" pitchFamily="34" charset="-120"/>
+              </a:rPr>
+              <a:t>REST · MCP</a:t>
+            </a:r>
+            <a:endParaRPr lang="en-US" sz="1350" dirty="0"/>
           </a:p>
         </p:txBody>
       </p:sp>
@@ -3712,8 +4427,8 @@
         </p:nvSpPr>
         <p:spPr>
           <a:xfrm>
-            <a:off x="8412480" y="3136392"/>
-            <a:ext cx="2743200" cy="411480"/>
+            <a:off x="1069848" y="3410712"/>
+            <a:ext cx="4663440" cy="502920"/>
           </a:xfrm>
           <a:prstGeom prst="rect">
             <a:avLst/>
@@ -3737,7 +4452,7 @@
                 <a:ea typeface="맑은 고딕" pitchFamily="34" charset="-122"/>
                 <a:cs typeface="맑은 고딕" pitchFamily="34" charset="-120"/>
               </a:rPr>
-              <a:t>스키마 준수율</a:t>
+              <a:t>엔드포인트 5개 + MCP 도구 3개. 전부 읽기 전용</a:t>
             </a:r>
             <a:endParaRPr lang="en-US" sz="1150" dirty="0"/>
           </a:p>
@@ -3751,20 +4466,18 @@
         </p:nvSpPr>
         <p:spPr>
           <a:xfrm>
-            <a:off x="685800" y="3977640"/>
-            <a:ext cx="3383280" cy="1508760"/>
-          </a:xfrm>
-          <a:prstGeom prst="roundRect">
-            <a:avLst>
-              <a:gd name="adj" fmla="val 6061"/>
-            </a:avLst>
+            <a:off x="6172200" y="3209544"/>
+            <a:ext cx="256032" cy="256032"/>
+          </a:xfrm>
+          <a:prstGeom prst="ellipse">
+            <a:avLst/>
           </a:prstGeom>
           <a:solidFill>
-            <a:srgbClr val="F4F6FA"/>
+            <a:srgbClr val="2F5BD8"/>
           </a:solidFill>
           <a:ln w="12700">
             <a:solidFill>
-              <a:srgbClr val="DBE0EA"/>
+              <a:srgbClr val="2F5BD8"/>
             </a:solidFill>
             <a:prstDash val="solid"/>
           </a:ln>
@@ -3778,34 +4491,34 @@
         </p:nvSpPr>
         <p:spPr>
           <a:xfrm>
-            <a:off x="1005840" y="4206240"/>
-            <a:ext cx="2743200" cy="777240"/>
-          </a:xfrm>
-          <a:prstGeom prst="rect">
-            <a:avLst/>
-          </a:prstGeom>
-          <a:noFill/>
-          <a:ln/>
-        </p:spPr>
-        <p:txBody>
-          <a:bodyPr wrap="square" lIns="0" tIns="0" rIns="0" bIns="0" rtlCol="0" anchor="ctr"/>
-          <a:lstStyle/>
-          <a:p>
-            <a:pPr indent="0" marL="0">
-              <a:buNone/>
-            </a:pPr>
-            <a:r>
-              <a:rPr lang="en-US" sz="3600" b="1" dirty="0">
-                <a:solidFill>
-                  <a:srgbClr val="A8720C"/>
-                </a:solidFill>
-                <a:latin typeface="맑은 고딕" pitchFamily="34" charset="0"/>
-                <a:ea typeface="맑은 고딕" pitchFamily="34" charset="-122"/>
-                <a:cs typeface="맑은 고딕" pitchFamily="34" charset="-120"/>
-              </a:rPr>
-              <a:t>35%</a:t>
-            </a:r>
-            <a:endParaRPr lang="en-US" sz="3600" dirty="0"/>
+            <a:off x="6556248" y="3081528"/>
+            <a:ext cx="2103120" cy="320040"/>
+          </a:xfrm>
+          <a:prstGeom prst="rect">
+            <a:avLst/>
+          </a:prstGeom>
+          <a:noFill/>
+          <a:ln/>
+        </p:spPr>
+        <p:txBody>
+          <a:bodyPr wrap="square" lIns="0" tIns="0" rIns="0" bIns="0" rtlCol="0" anchor="ctr"/>
+          <a:lstStyle/>
+          <a:p>
+            <a:pPr indent="0" marL="0">
+              <a:buNone/>
+            </a:pPr>
+            <a:r>
+              <a:rPr lang="en-US" sz="1350" b="1" dirty="0">
+                <a:solidFill>
+                  <a:srgbClr val="161C28"/>
+                </a:solidFill>
+                <a:latin typeface="맑은 고딕" pitchFamily="34" charset="0"/>
+                <a:ea typeface="맑은 고딕" pitchFamily="34" charset="-122"/>
+                <a:cs typeface="맑은 고딕" pitchFamily="34" charset="-120"/>
+              </a:rPr>
+              <a:t>Context Broker</a:t>
+            </a:r>
+            <a:endParaRPr lang="en-US" sz="1350" dirty="0"/>
           </a:p>
         </p:txBody>
       </p:sp>
@@ -3817,8 +4530,8 @@
         </p:nvSpPr>
         <p:spPr>
           <a:xfrm>
-            <a:off x="1005840" y="4965192"/>
-            <a:ext cx="2743200" cy="411480"/>
+            <a:off x="6556248" y="3410712"/>
+            <a:ext cx="4663440" cy="502920"/>
           </a:xfrm>
           <a:prstGeom prst="rect">
             <a:avLst/>
@@ -3842,7 +4555,7 @@
                 <a:ea typeface="맑은 고딕" pitchFamily="34" charset="-122"/>
                 <a:cs typeface="맑은 고딕" pitchFamily="34" charset="-120"/>
               </a:rPr>
-              <a:t>과잉 기권율</a:t>
+              <a:t>12,000 토큰 예산으로 근거를 자르고, 자른 걸 기록한다</a:t>
             </a:r>
             <a:endParaRPr lang="en-US" sz="1150" dirty="0"/>
           </a:p>
@@ -3856,20 +4569,18 @@
         </p:nvSpPr>
         <p:spPr>
           <a:xfrm>
-            <a:off x="4389120" y="3977640"/>
-            <a:ext cx="3383280" cy="1508760"/>
-          </a:xfrm>
-          <a:prstGeom prst="roundRect">
-            <a:avLst>
-              <a:gd name="adj" fmla="val 6061"/>
-            </a:avLst>
+            <a:off x="685800" y="4142232"/>
+            <a:ext cx="256032" cy="256032"/>
+          </a:xfrm>
+          <a:prstGeom prst="ellipse">
+            <a:avLst/>
           </a:prstGeom>
           <a:solidFill>
-            <a:srgbClr val="F4F6FA"/>
+            <a:srgbClr val="2F5BD8"/>
           </a:solidFill>
           <a:ln w="12700">
             <a:solidFill>
-              <a:srgbClr val="DBE0EA"/>
+              <a:srgbClr val="2F5BD8"/>
             </a:solidFill>
             <a:prstDash val="solid"/>
           </a:ln>
@@ -3883,34 +4594,34 @@
         </p:nvSpPr>
         <p:spPr>
           <a:xfrm>
-            <a:off x="4709160" y="4206240"/>
-            <a:ext cx="2743200" cy="777240"/>
-          </a:xfrm>
-          <a:prstGeom prst="rect">
-            <a:avLst/>
-          </a:prstGeom>
-          <a:noFill/>
-          <a:ln/>
-        </p:spPr>
-        <p:txBody>
-          <a:bodyPr wrap="square" lIns="0" tIns="0" rIns="0" bIns="0" rtlCol="0" anchor="ctr"/>
-          <a:lstStyle/>
-          <a:p>
-            <a:pPr indent="0" marL="0">
-              <a:buNone/>
-            </a:pPr>
-            <a:r>
-              <a:rPr lang="en-US" sz="3600" b="1" dirty="0">
-                <a:solidFill>
-                  <a:srgbClr val="A8720C"/>
-                </a:solidFill>
-                <a:latin typeface="맑은 고딕" pitchFamily="34" charset="0"/>
-                <a:ea typeface="맑은 고딕" pitchFamily="34" charset="-122"/>
-                <a:cs typeface="맑은 고딕" pitchFamily="34" charset="-120"/>
-              </a:rPr>
-              <a:t>20–34초</a:t>
-            </a:r>
-            <a:endParaRPr lang="en-US" sz="3600" dirty="0"/>
+            <a:off x="1069848" y="4014216"/>
+            <a:ext cx="2103120" cy="320040"/>
+          </a:xfrm>
+          <a:prstGeom prst="rect">
+            <a:avLst/>
+          </a:prstGeom>
+          <a:noFill/>
+          <a:ln/>
+        </p:spPr>
+        <p:txBody>
+          <a:bodyPr wrap="square" lIns="0" tIns="0" rIns="0" bIns="0" rtlCol="0" anchor="ctr"/>
+          <a:lstStyle/>
+          <a:p>
+            <a:pPr indent="0" marL="0">
+              <a:buNone/>
+            </a:pPr>
+            <a:r>
+              <a:rPr lang="en-US" sz="1350" b="1" dirty="0">
+                <a:solidFill>
+                  <a:srgbClr val="161C28"/>
+                </a:solidFill>
+                <a:latin typeface="맑은 고딕" pitchFamily="34" charset="0"/>
+                <a:ea typeface="맑은 고딕" pitchFamily="34" charset="-122"/>
+                <a:cs typeface="맑은 고딕" pitchFamily="34" charset="-120"/>
+              </a:rPr>
+              <a:t>RAG</a:t>
+            </a:r>
+            <a:endParaRPr lang="en-US" sz="1350" dirty="0"/>
           </a:p>
         </p:txBody>
       </p:sp>
@@ -3922,8 +4633,8 @@
         </p:nvSpPr>
         <p:spPr>
           <a:xfrm>
-            <a:off x="4709160" y="4965192"/>
-            <a:ext cx="2743200" cy="411480"/>
+            <a:off x="1069848" y="4343400"/>
+            <a:ext cx="4663440" cy="502920"/>
           </a:xfrm>
           <a:prstGeom prst="rect">
             <a:avLst/>
@@ -3947,7 +4658,7 @@
                 <a:ea typeface="맑은 고딕" pitchFamily="34" charset="-122"/>
                 <a:cs typeface="맑은 고딕" pitchFamily="34" charset="-120"/>
               </a:rPr>
-              <a:t>응답 지연 p50</a:t>
+              <a:t>지식 문서 25개 · 청크 306개 적재</a:t>
             </a:r>
             <a:endParaRPr lang="en-US" sz="1150" dirty="0"/>
           </a:p>
@@ -3961,20 +4672,18 @@
         </p:nvSpPr>
         <p:spPr>
           <a:xfrm>
-            <a:off x="8092440" y="3977640"/>
-            <a:ext cx="3383280" cy="1508760"/>
-          </a:xfrm>
-          <a:prstGeom prst="roundRect">
-            <a:avLst>
-              <a:gd name="adj" fmla="val 6061"/>
-            </a:avLst>
+            <a:off x="6172200" y="4142232"/>
+            <a:ext cx="256032" cy="256032"/>
+          </a:xfrm>
+          <a:prstGeom prst="ellipse">
+            <a:avLst/>
           </a:prstGeom>
           <a:solidFill>
-            <a:srgbClr val="F4F6FA"/>
+            <a:srgbClr val="2F5BD8"/>
           </a:solidFill>
           <a:ln w="12700">
             <a:solidFill>
-              <a:srgbClr val="DBE0EA"/>
+              <a:srgbClr val="2F5BD8"/>
             </a:solidFill>
             <a:prstDash val="solid"/>
           </a:ln>
@@ -3988,34 +4697,34 @@
         </p:nvSpPr>
         <p:spPr>
           <a:xfrm>
-            <a:off x="8412480" y="4206240"/>
-            <a:ext cx="2743200" cy="777240"/>
-          </a:xfrm>
-          <a:prstGeom prst="rect">
-            <a:avLst/>
-          </a:prstGeom>
-          <a:noFill/>
-          <a:ln/>
-        </p:spPr>
-        <p:txBody>
-          <a:bodyPr wrap="square" lIns="0" tIns="0" rIns="0" bIns="0" rtlCol="0" anchor="ctr"/>
-          <a:lstStyle/>
-          <a:p>
-            <a:pPr indent="0" marL="0">
-              <a:buNone/>
-            </a:pPr>
-            <a:r>
-              <a:rPr lang="en-US" sz="3600" b="1" dirty="0">
-                <a:solidFill>
-                  <a:srgbClr val="2F5BD8"/>
-                </a:solidFill>
-                <a:latin typeface="맑은 고딕" pitchFamily="34" charset="0"/>
-                <a:ea typeface="맑은 고딕" pitchFamily="34" charset="-122"/>
-                <a:cs typeface="맑은 고딕" pitchFamily="34" charset="-120"/>
-              </a:rPr>
-              <a:t>3–4원</a:t>
-            </a:r>
-            <a:endParaRPr lang="en-US" sz="3600" dirty="0"/>
+            <a:off x="6556248" y="4014216"/>
+            <a:ext cx="2103120" cy="320040"/>
+          </a:xfrm>
+          <a:prstGeom prst="rect">
+            <a:avLst/>
+          </a:prstGeom>
+          <a:noFill/>
+          <a:ln/>
+        </p:spPr>
+        <p:txBody>
+          <a:bodyPr wrap="square" lIns="0" tIns="0" rIns="0" bIns="0" rtlCol="0" anchor="ctr"/>
+          <a:lstStyle/>
+          <a:p>
+            <a:pPr indent="0" marL="0">
+              <a:buNone/>
+            </a:pPr>
+            <a:r>
+              <a:rPr lang="en-US" sz="1350" b="1" dirty="0">
+                <a:solidFill>
+                  <a:srgbClr val="161C28"/>
+                </a:solidFill>
+                <a:latin typeface="맑은 고딕" pitchFamily="34" charset="0"/>
+                <a:ea typeface="맑은 고딕" pitchFamily="34" charset="-122"/>
+                <a:cs typeface="맑은 고딕" pitchFamily="34" charset="-120"/>
+              </a:rPr>
+              <a:t>근거 대조</a:t>
+            </a:r>
+            <a:endParaRPr lang="en-US" sz="1350" dirty="0"/>
           </a:p>
         </p:txBody>
       </p:sp>
@@ -4027,8 +4736,8 @@
         </p:nvSpPr>
         <p:spPr>
           <a:xfrm>
-            <a:off x="8412480" y="4965192"/>
-            <a:ext cx="2743200" cy="411480"/>
+            <a:off x="6556248" y="4343400"/>
+            <a:ext cx="4663440" cy="502920"/>
           </a:xfrm>
           <a:prstGeom prst="rect">
             <a:avLst/>
@@ -4052,7 +4761,213 @@
                 <a:ea typeface="맑은 고딕" pitchFamily="34" charset="-122"/>
                 <a:cs typeface="맑은 고딕" pitchFamily="34" charset="-120"/>
               </a:rPr>
-              <a:t>건당 LLM 비용</a:t>
+              <a:t>제안한 금액·주문번호를 DB 와 맞춰 보고 안 맞으면 막는다</a:t>
+            </a:r>
+            <a:endParaRPr lang="en-US" sz="1150" dirty="0"/>
+          </a:p>
+        </p:txBody>
+      </p:sp>
+      <p:sp>
+        <p:nvSpPr>
+          <p:cNvPr id="22" name="Shape 20"/>
+          <p:cNvSpPr/>
+          <p:nvPr/>
+        </p:nvSpPr>
+        <p:spPr>
+          <a:xfrm>
+            <a:off x="685800" y="5074920"/>
+            <a:ext cx="256032" cy="256032"/>
+          </a:xfrm>
+          <a:prstGeom prst="ellipse">
+            <a:avLst/>
+          </a:prstGeom>
+          <a:solidFill>
+            <a:srgbClr val="2F5BD8"/>
+          </a:solidFill>
+          <a:ln w="12700">
+            <a:solidFill>
+              <a:srgbClr val="2F5BD8"/>
+            </a:solidFill>
+            <a:prstDash val="solid"/>
+          </a:ln>
+        </p:spPr>
+      </p:sp>
+      <p:sp>
+        <p:nvSpPr>
+          <p:cNvPr id="23" name="Text 21"/>
+          <p:cNvSpPr txBox="1"/>
+          <p:nvPr/>
+        </p:nvSpPr>
+        <p:spPr>
+          <a:xfrm>
+            <a:off x="1069848" y="4946904"/>
+            <a:ext cx="2103120" cy="320040"/>
+          </a:xfrm>
+          <a:prstGeom prst="rect">
+            <a:avLst/>
+          </a:prstGeom>
+          <a:noFill/>
+          <a:ln/>
+        </p:spPr>
+        <p:txBody>
+          <a:bodyPr wrap="square" lIns="0" tIns="0" rIns="0" bIns="0" rtlCol="0" anchor="ctr"/>
+          <a:lstStyle/>
+          <a:p>
+            <a:pPr indent="0" marL="0">
+              <a:buNone/>
+            </a:pPr>
+            <a:r>
+              <a:rPr lang="en-US" sz="1350" b="1" dirty="0">
+                <a:solidFill>
+                  <a:srgbClr val="161C28"/>
+                </a:solidFill>
+                <a:latin typeface="맑은 고딕" pitchFamily="34" charset="0"/>
+                <a:ea typeface="맑은 고딕" pitchFamily="34" charset="-122"/>
+                <a:cs typeface="맑은 고딕" pitchFamily="34" charset="-120"/>
+              </a:rPr>
+              <a:t>평가 harness</a:t>
+            </a:r>
+            <a:endParaRPr lang="en-US" sz="1350" dirty="0"/>
+          </a:p>
+        </p:txBody>
+      </p:sp>
+      <p:sp>
+        <p:nvSpPr>
+          <p:cNvPr id="24" name="Text 22"/>
+          <p:cNvSpPr txBox="1"/>
+          <p:nvPr/>
+        </p:nvSpPr>
+        <p:spPr>
+          <a:xfrm>
+            <a:off x="1069848" y="5276088"/>
+            <a:ext cx="4663440" cy="502920"/>
+          </a:xfrm>
+          <a:prstGeom prst="rect">
+            <a:avLst/>
+          </a:prstGeom>
+          <a:noFill/>
+          <a:ln/>
+        </p:spPr>
+        <p:txBody>
+          <a:bodyPr wrap="square" lIns="0" tIns="0" rIns="0" bIns="0" rtlCol="0" anchor="ctr"/>
+          <a:lstStyle/>
+          <a:p>
+            <a:pPr indent="0" marL="0">
+              <a:buNone/>
+            </a:pPr>
+            <a:r>
+              <a:rPr lang="en-US" sz="1150" dirty="0">
+                <a:solidFill>
+                  <a:srgbClr val="6B7488"/>
+                </a:solidFill>
+                <a:latin typeface="맑은 고딕" pitchFamily="34" charset="0"/>
+                <a:ea typeface="맑은 고딕" pitchFamily="34" charset="-122"/>
+                <a:cs typeface="맑은 고딕" pitchFamily="34" charset="-120"/>
+              </a:rPr>
+              <a:t>골든셋 72건을 반복 실행하고 결과를 파일로 남긴다</a:t>
+            </a:r>
+            <a:endParaRPr lang="en-US" sz="1150" dirty="0"/>
+          </a:p>
+        </p:txBody>
+      </p:sp>
+      <p:sp>
+        <p:nvSpPr>
+          <p:cNvPr id="25" name="Shape 23"/>
+          <p:cNvSpPr/>
+          <p:nvPr/>
+        </p:nvSpPr>
+        <p:spPr>
+          <a:xfrm>
+            <a:off x="6172200" y="5074920"/>
+            <a:ext cx="256032" cy="256032"/>
+          </a:xfrm>
+          <a:prstGeom prst="ellipse">
+            <a:avLst/>
+          </a:prstGeom>
+          <a:solidFill>
+            <a:srgbClr val="2F5BD8"/>
+          </a:solidFill>
+          <a:ln w="12700">
+            <a:solidFill>
+              <a:srgbClr val="2F5BD8"/>
+            </a:solidFill>
+            <a:prstDash val="solid"/>
+          </a:ln>
+        </p:spPr>
+      </p:sp>
+      <p:sp>
+        <p:nvSpPr>
+          <p:cNvPr id="26" name="Text 24"/>
+          <p:cNvSpPr txBox="1"/>
+          <p:nvPr/>
+        </p:nvSpPr>
+        <p:spPr>
+          <a:xfrm>
+            <a:off x="6556248" y="4946904"/>
+            <a:ext cx="2103120" cy="320040"/>
+          </a:xfrm>
+          <a:prstGeom prst="rect">
+            <a:avLst/>
+          </a:prstGeom>
+          <a:noFill/>
+          <a:ln/>
+        </p:spPr>
+        <p:txBody>
+          <a:bodyPr wrap="square" lIns="0" tIns="0" rIns="0" bIns="0" rtlCol="0" anchor="ctr"/>
+          <a:lstStyle/>
+          <a:p>
+            <a:pPr indent="0" marL="0">
+              <a:buNone/>
+            </a:pPr>
+            <a:r>
+              <a:rPr lang="en-US" sz="1350" b="1" dirty="0">
+                <a:solidFill>
+                  <a:srgbClr val="161C28"/>
+                </a:solidFill>
+                <a:latin typeface="맑은 고딕" pitchFamily="34" charset="0"/>
+                <a:ea typeface="맑은 고딕" pitchFamily="34" charset="-122"/>
+                <a:cs typeface="맑은 고딕" pitchFamily="34" charset="-120"/>
+              </a:rPr>
+              <a:t>학습 자료</a:t>
+            </a:r>
+            <a:endParaRPr lang="en-US" sz="1350" dirty="0"/>
+          </a:p>
+        </p:txBody>
+      </p:sp>
+      <p:sp>
+        <p:nvSpPr>
+          <p:cNvPr id="27" name="Text 25"/>
+          <p:cNvSpPr txBox="1"/>
+          <p:nvPr/>
+        </p:nvSpPr>
+        <p:spPr>
+          <a:xfrm>
+            <a:off x="6556248" y="5276088"/>
+            <a:ext cx="4663440" cy="502920"/>
+          </a:xfrm>
+          <a:prstGeom prst="rect">
+            <a:avLst/>
+          </a:prstGeom>
+          <a:noFill/>
+          <a:ln/>
+        </p:spPr>
+        <p:txBody>
+          <a:bodyPr wrap="square" lIns="0" tIns="0" rIns="0" bIns="0" rtlCol="0" anchor="ctr"/>
+          <a:lstStyle/>
+          <a:p>
+            <a:pPr indent="0" marL="0">
+              <a:buNone/>
+            </a:pPr>
+            <a:r>
+              <a:rPr lang="en-US" sz="1150" dirty="0">
+                <a:solidFill>
+                  <a:srgbClr val="6B7488"/>
+                </a:solidFill>
+                <a:latin typeface="맑은 고딕" pitchFamily="34" charset="0"/>
+                <a:ea typeface="맑은 고딕" pitchFamily="34" charset="-122"/>
+                <a:cs typeface="맑은 고딕" pitchFamily="34" charset="-120"/>
+              </a:rPr>
+              <a:t>취소·환불 한 건이 전 구조를 지나는 길을 그림 17장으로</a:t>
             </a:r>
             <a:endParaRPr lang="en-US" sz="1150" dirty="0"/>
           </a:p>
@@ -4069,13 +4984,6 @@
 <file path=ppt/slides/slide6.xml><?xml version="1.0" encoding="utf-8"?>
 <p:sld xmlns:a="http://schemas.openxmlformats.org/drawingml/2006/main" xmlns:r="http://schemas.openxmlformats.org/officeDocument/2006/relationships" xmlns:p="http://schemas.openxmlformats.org/presentationml/2006/main">
   <p:cSld name="Slide 6">
-    <p:bg>
-      <p:bgPr>
-        <a:solidFill>
-          <a:srgbClr val="161C28"/>
-        </a:solidFill>
-      </p:bgPr>
-    </p:bg>
     <p:spTree>
       <p:nvGrpSpPr>
         <p:cNvPr id="1" name=""/>
@@ -4098,59 +5006,98 @@
         </p:nvSpPr>
         <p:spPr>
           <a:xfrm>
-            <a:off x="685800" y="960120"/>
-            <a:ext cx="10515600" cy="822960"/>
-          </a:xfrm>
-          <a:prstGeom prst="rect">
-            <a:avLst/>
-          </a:prstGeom>
-          <a:noFill/>
-          <a:ln/>
-        </p:spPr>
-        <p:txBody>
-          <a:bodyPr wrap="square" lIns="0" tIns="0" rIns="0" bIns="0" rtlCol="0" anchor="ctr"/>
-          <a:lstStyle/>
-          <a:p>
-            <a:pPr indent="0" marL="0">
-              <a:buNone/>
-            </a:pPr>
-            <a:r>
-              <a:rPr lang="en-US" sz="3600" b="1" dirty="0">
-                <a:solidFill>
-                  <a:srgbClr val="FFFFFF"/>
-                </a:solidFill>
-                <a:latin typeface="맑은 고딕" pitchFamily="34" charset="0"/>
-                <a:ea typeface="맑은 고딕" pitchFamily="34" charset="-122"/>
-                <a:cs typeface="맑은 고딕" pitchFamily="34" charset="-120"/>
-              </a:rPr>
-              <a:t>그런데 같은 지적을 두 번 받았다</a:t>
-            </a:r>
-            <a:endParaRPr lang="en-US" sz="3600" dirty="0"/>
-          </a:p>
-        </p:txBody>
-      </p:sp>
-      <p:sp>
-        <p:nvSpPr>
-          <p:cNvPr id="3" name="Shape 1"/>
+            <a:off x="685800" y="566928"/>
+            <a:ext cx="10789920" cy="914400"/>
+          </a:xfrm>
+          <a:prstGeom prst="rect">
+            <a:avLst/>
+          </a:prstGeom>
+          <a:noFill/>
+          <a:ln/>
+        </p:spPr>
+        <p:txBody>
+          <a:bodyPr wrap="square" lIns="0" tIns="0" rIns="0" bIns="0" rtlCol="0" anchor="ctr"/>
+          <a:lstStyle/>
+          <a:p>
+            <a:pPr indent="0" marL="0">
+              <a:buNone/>
+            </a:pPr>
+            <a:r>
+              <a:rPr lang="en-US" sz="3000" b="1" dirty="0">
+                <a:solidFill>
+                  <a:srgbClr val="161C28"/>
+                </a:solidFill>
+                <a:latin typeface="맑은 고딕" pitchFamily="34" charset="0"/>
+                <a:ea typeface="맑은 고딕" pitchFamily="34" charset="-122"/>
+                <a:cs typeface="맑은 고딕" pitchFamily="34" charset="-120"/>
+              </a:rPr>
+              <a:t>모으고 있는 데이터</a:t>
+            </a:r>
+            <a:endParaRPr lang="en-US" sz="3000" dirty="0"/>
+          </a:p>
+        </p:txBody>
+      </p:sp>
+      <p:sp>
+        <p:nvSpPr>
+          <p:cNvPr id="3" name="Text 1"/>
+          <p:cNvSpPr txBox="1"/>
+          <p:nvPr/>
+        </p:nvSpPr>
+        <p:spPr>
+          <a:xfrm>
+            <a:off x="685800" y="1481328"/>
+            <a:ext cx="10789920" cy="411480"/>
+          </a:xfrm>
+          <a:prstGeom prst="rect">
+            <a:avLst/>
+          </a:prstGeom>
+          <a:noFill/>
+          <a:ln/>
+        </p:spPr>
+        <p:txBody>
+          <a:bodyPr wrap="square" lIns="0" tIns="0" rIns="0" bIns="0" rtlCol="0" anchor="ctr"/>
+          <a:lstStyle/>
+          <a:p>
+            <a:pPr indent="0" marL="0">
+              <a:buNone/>
+            </a:pPr>
+            <a:r>
+              <a:rPr lang="en-US" sz="1400" dirty="0">
+                <a:solidFill>
+                  <a:srgbClr val="6B7488"/>
+                </a:solidFill>
+                <a:latin typeface="맑은 고딕" pitchFamily="34" charset="0"/>
+                <a:ea typeface="맑은 고딕" pitchFamily="34" charset="-122"/>
+                <a:cs typeface="맑은 고딕" pitchFamily="34" charset="-120"/>
+              </a:rPr>
+              <a:t>공개 자료와 팀원 실계정 기록을 함께 쓴다. 개인정보는 가리고 넣는다.</a:t>
+            </a:r>
+            <a:endParaRPr lang="en-US" sz="1400" dirty="0"/>
+          </a:p>
+        </p:txBody>
+      </p:sp>
+      <p:sp>
+        <p:nvSpPr>
+          <p:cNvPr id="4" name="Shape 2"/>
           <p:cNvSpPr/>
           <p:nvPr/>
         </p:nvSpPr>
         <p:spPr>
           <a:xfrm>
             <a:off x="685800" y="2148840"/>
-            <a:ext cx="10789920" cy="1463040"/>
+            <a:ext cx="10789920" cy="822960"/>
           </a:xfrm>
           <a:prstGeom prst="roundRect">
             <a:avLst>
-              <a:gd name="adj" fmla="val 6250"/>
+              <a:gd name="adj" fmla="val 11111"/>
             </a:avLst>
           </a:prstGeom>
           <a:solidFill>
-            <a:srgbClr val="222834"/>
+            <a:srgbClr val="F4F6FA"/>
           </a:solidFill>
           <a:ln w="12700">
             <a:solidFill>
-              <a:srgbClr val="39404E"/>
+              <a:srgbClr val="DBE0EA"/>
             </a:solidFill>
             <a:prstDash val="solid"/>
           </a:ln>
@@ -4158,127 +5105,143 @@
       </p:sp>
       <p:sp>
         <p:nvSpPr>
-          <p:cNvPr id="4" name="Text 2"/>
-          <p:cNvSpPr txBox="1"/>
-          <p:nvPr/>
-        </p:nvSpPr>
-        <p:spPr>
-          <a:xfrm>
-            <a:off x="1051560" y="2350008"/>
-            <a:ext cx="2743200" cy="320040"/>
-          </a:xfrm>
-          <a:prstGeom prst="rect">
-            <a:avLst/>
-          </a:prstGeom>
-          <a:noFill/>
-          <a:ln/>
-        </p:spPr>
-        <p:txBody>
-          <a:bodyPr wrap="square" lIns="0" tIns="0" rIns="0" bIns="0" rtlCol="0" anchor="ctr"/>
-          <a:lstStyle/>
-          <a:p>
-            <a:pPr indent="0" marL="0">
-              <a:buNone/>
-            </a:pPr>
-            <a:r>
-              <a:rPr lang="en-US" sz="1200" b="1" dirty="0">
-                <a:solidFill>
-                  <a:srgbClr val="A8720C"/>
-                </a:solidFill>
-                <a:latin typeface="맑은 고딕" pitchFamily="34" charset="0"/>
-                <a:ea typeface="맑은 고딕" pitchFamily="34" charset="-122"/>
-                <a:cs typeface="맑은 고딕" pitchFamily="34" charset="-120"/>
-              </a:rPr>
-              <a:t>강사 · 08.28</a:t>
-            </a:r>
-            <a:endParaRPr lang="en-US" sz="1200" dirty="0"/>
-          </a:p>
-        </p:txBody>
-      </p:sp>
-      <p:sp>
-        <p:nvSpPr>
           <p:cNvPr id="5" name="Text 3"/>
           <p:cNvSpPr txBox="1"/>
           <p:nvPr/>
         </p:nvSpPr>
         <p:spPr>
           <a:xfrm>
-            <a:off x="1051560" y="2697480"/>
-            <a:ext cx="10058400" cy="777240"/>
-          </a:xfrm>
-          <a:prstGeom prst="rect">
-            <a:avLst/>
-          </a:prstGeom>
-          <a:noFill/>
-          <a:ln/>
-        </p:spPr>
-        <p:txBody>
-          <a:bodyPr wrap="square" lIns="0" tIns="0" rIns="0" bIns="0" rtlCol="0" anchor="ctr"/>
-          <a:lstStyle/>
-          <a:p>
-            <a:pPr indent="0" marL="0">
-              <a:lnSpc>
-                <a:spcPts val="2400"/>
-              </a:lnSpc>
-              <a:buNone/>
-            </a:pPr>
-            <a:r>
-              <a:rPr lang="en-US" sz="1500" dirty="0">
-                <a:solidFill>
-                  <a:srgbClr val="DCE2ED"/>
-                </a:solidFill>
-                <a:latin typeface="맑은 고딕" pitchFamily="34" charset="0"/>
-                <a:ea typeface="맑은 고딕" pitchFamily="34" charset="-122"/>
-                <a:cs typeface="맑은 고딕" pitchFamily="34" charset="-120"/>
-              </a:rPr>
-              <a:t>"표준과 기술을 많이 사용하는 것이 프로젝트 목표가 되어서는 안 된다.</a:t>
-            </a:r>
-            <a:endParaRPr lang="en-US" sz="1500" dirty="0"/>
-          </a:p>
-          <a:p>
-            <a:pPr indent="0" marL="0">
-              <a:lnSpc>
-                <a:spcPts val="2400"/>
-              </a:lnSpc>
-              <a:buNone/>
-            </a:pPr>
-            <a:r>
-              <a:rPr lang="en-US" sz="1500" dirty="0">
-                <a:solidFill>
-                  <a:srgbClr val="DCE2ED"/>
-                </a:solidFill>
-                <a:latin typeface="맑은 고딕" pitchFamily="34" charset="0"/>
-                <a:ea typeface="맑은 고딕" pitchFamily="34" charset="-122"/>
-                <a:cs typeface="맑은 고딕" pitchFamily="34" charset="-120"/>
-              </a:rPr>
-              <a:t>핵심은 Case lifecycle 이 실제로 동작하는 것이다."</a:t>
-            </a:r>
-            <a:endParaRPr lang="en-US" sz="1500" dirty="0"/>
-          </a:p>
-        </p:txBody>
-      </p:sp>
-      <p:sp>
-        <p:nvSpPr>
-          <p:cNvPr id="6" name="Shape 4"/>
+            <a:off x="960120" y="2295144"/>
+            <a:ext cx="1737360" cy="502920"/>
+          </a:xfrm>
+          <a:prstGeom prst="rect">
+            <a:avLst/>
+          </a:prstGeom>
+          <a:noFill/>
+          <a:ln/>
+        </p:spPr>
+        <p:txBody>
+          <a:bodyPr wrap="square" lIns="0" tIns="0" rIns="0" bIns="0" rtlCol="0" anchor="ctr"/>
+          <a:lstStyle/>
+          <a:p>
+            <a:pPr indent="0" marL="0">
+              <a:buNone/>
+            </a:pPr>
+            <a:r>
+              <a:rPr lang="en-US" sz="2100" b="1" dirty="0">
+                <a:solidFill>
+                  <a:srgbClr val="0D7A4D"/>
+                </a:solidFill>
+                <a:latin typeface="맑은 고딕" pitchFamily="34" charset="0"/>
+                <a:ea typeface="맑은 고딕" pitchFamily="34" charset="-122"/>
+                <a:cs typeface="맑은 고딕" pitchFamily="34" charset="-120"/>
+              </a:rPr>
+              <a:t>322건</a:t>
+            </a:r>
+            <a:endParaRPr lang="en-US" sz="2100" dirty="0"/>
+          </a:p>
+        </p:txBody>
+      </p:sp>
+      <p:sp>
+        <p:nvSpPr>
+          <p:cNvPr id="6" name="Text 4"/>
+          <p:cNvSpPr txBox="1"/>
+          <p:nvPr/>
+        </p:nvSpPr>
+        <p:spPr>
+          <a:xfrm>
+            <a:off x="2880360" y="2258568"/>
+            <a:ext cx="3108960" cy="365760"/>
+          </a:xfrm>
+          <a:prstGeom prst="rect">
+            <a:avLst/>
+          </a:prstGeom>
+          <a:noFill/>
+          <a:ln/>
+        </p:spPr>
+        <p:txBody>
+          <a:bodyPr wrap="square" lIns="0" tIns="0" rIns="0" bIns="0" rtlCol="0" anchor="ctr"/>
+          <a:lstStyle/>
+          <a:p>
+            <a:pPr indent="0" marL="0">
+              <a:buNone/>
+            </a:pPr>
+            <a:r>
+              <a:rPr lang="en-US" sz="1450" b="1" dirty="0">
+                <a:solidFill>
+                  <a:srgbClr val="161C28"/>
+                </a:solidFill>
+                <a:latin typeface="맑은 고딕" pitchFamily="34" charset="0"/>
+                <a:ea typeface="맑은 고딕" pitchFamily="34" charset="-122"/>
+                <a:cs typeface="맑은 고딕" pitchFamily="34" charset="-120"/>
+              </a:rPr>
+              <a:t>반품·환불 분쟁 사례</a:t>
+            </a:r>
+            <a:endParaRPr lang="en-US" sz="1450" dirty="0"/>
+          </a:p>
+        </p:txBody>
+      </p:sp>
+      <p:sp>
+        <p:nvSpPr>
+          <p:cNvPr id="7" name="Text 5"/>
+          <p:cNvSpPr txBox="1"/>
+          <p:nvPr/>
+        </p:nvSpPr>
+        <p:spPr>
+          <a:xfrm>
+            <a:off x="6172200" y="2295144"/>
+            <a:ext cx="5029200" cy="457200"/>
+          </a:xfrm>
+          <a:prstGeom prst="rect">
+            <a:avLst/>
+          </a:prstGeom>
+          <a:noFill/>
+          <a:ln/>
+        </p:spPr>
+        <p:txBody>
+          <a:bodyPr wrap="square" lIns="0" tIns="0" rIns="0" bIns="0" rtlCol="0" anchor="ctr"/>
+          <a:lstStyle/>
+          <a:p>
+            <a:pPr indent="0" marL="0">
+              <a:buNone/>
+            </a:pPr>
+            <a:r>
+              <a:rPr lang="en-US" sz="1250" dirty="0">
+                <a:solidFill>
+                  <a:srgbClr val="6B7488"/>
+                </a:solidFill>
+                <a:latin typeface="맑은 고딕" pitchFamily="34" charset="0"/>
+                <a:ea typeface="맑은 고딕" pitchFamily="34" charset="-122"/>
+                <a:cs typeface="맑은 고딕" pitchFamily="34" charset="-120"/>
+              </a:rPr>
+              <a:t>소비자24 에서 1,704건 받아 걸러 동결</a:t>
+            </a:r>
+            <a:endParaRPr lang="en-US" sz="1250" dirty="0"/>
+          </a:p>
+        </p:txBody>
+      </p:sp>
+      <p:sp>
+        <p:nvSpPr>
+          <p:cNvPr id="8" name="Shape 6"/>
           <p:cNvSpPr/>
           <p:nvPr/>
         </p:nvSpPr>
         <p:spPr>
           <a:xfrm>
-            <a:off x="685800" y="3840480"/>
-            <a:ext cx="10789920" cy="1463040"/>
+            <a:off x="685800" y="3108960"/>
+            <a:ext cx="10789920" cy="822960"/>
           </a:xfrm>
           <a:prstGeom prst="roundRect">
             <a:avLst>
-              <a:gd name="adj" fmla="val 6250"/>
+              <a:gd name="adj" fmla="val 11111"/>
             </a:avLst>
           </a:prstGeom>
           <a:solidFill>
-            <a:srgbClr val="222834"/>
+            <a:srgbClr val="F4F6FA"/>
           </a:solidFill>
           <a:ln w="12700">
             <a:solidFill>
-              <a:srgbClr val="39404E"/>
+              <a:srgbClr val="DBE0EA"/>
             </a:solidFill>
             <a:prstDash val="solid"/>
           </a:ln>
@@ -4286,30 +5249,318 @@
       </p:sp>
       <p:sp>
         <p:nvSpPr>
-          <p:cNvPr id="7" name="Text 5"/>
-          <p:cNvSpPr txBox="1"/>
-          <p:nvPr/>
-        </p:nvSpPr>
-        <p:spPr>
-          <a:xfrm>
-            <a:off x="1051560" y="4041648"/>
-            <a:ext cx="2743200" cy="320040"/>
-          </a:xfrm>
-          <a:prstGeom prst="rect">
-            <a:avLst/>
-          </a:prstGeom>
-          <a:noFill/>
-          <a:ln/>
-        </p:spPr>
-        <p:txBody>
-          <a:bodyPr wrap="square" lIns="0" tIns="0" rIns="0" bIns="0" rtlCol="0" anchor="ctr"/>
-          <a:lstStyle/>
-          <a:p>
-            <a:pPr indent="0" marL="0">
-              <a:buNone/>
-            </a:pPr>
-            <a:r>
-              <a:rPr lang="en-US" sz="1200" b="1" dirty="0">
+          <p:cNvPr id="9" name="Text 7"/>
+          <p:cNvSpPr txBox="1"/>
+          <p:nvPr/>
+        </p:nvSpPr>
+        <p:spPr>
+          <a:xfrm>
+            <a:off x="960120" y="3255264"/>
+            <a:ext cx="1737360" cy="502920"/>
+          </a:xfrm>
+          <a:prstGeom prst="rect">
+            <a:avLst/>
+          </a:prstGeom>
+          <a:noFill/>
+          <a:ln/>
+        </p:spPr>
+        <p:txBody>
+          <a:bodyPr wrap="square" lIns="0" tIns="0" rIns="0" bIns="0" rtlCol="0" anchor="ctr"/>
+          <a:lstStyle/>
+          <a:p>
+            <a:pPr indent="0" marL="0">
+              <a:buNone/>
+            </a:pPr>
+            <a:r>
+              <a:rPr lang="en-US" sz="2100" b="1" dirty="0">
+                <a:solidFill>
+                  <a:srgbClr val="0D7A4D"/>
+                </a:solidFill>
+                <a:latin typeface="맑은 고딕" pitchFamily="34" charset="0"/>
+                <a:ea typeface="맑은 고딕" pitchFamily="34" charset="-122"/>
+                <a:cs typeface="맑은 고딕" pitchFamily="34" charset="-120"/>
+              </a:rPr>
+              <a:t>173건</a:t>
+            </a:r>
+            <a:endParaRPr lang="en-US" sz="2100" dirty="0"/>
+          </a:p>
+        </p:txBody>
+      </p:sp>
+      <p:sp>
+        <p:nvSpPr>
+          <p:cNvPr id="10" name="Text 8"/>
+          <p:cNvSpPr txBox="1"/>
+          <p:nvPr/>
+        </p:nvSpPr>
+        <p:spPr>
+          <a:xfrm>
+            <a:off x="2880360" y="3218688"/>
+            <a:ext cx="3108960" cy="365760"/>
+          </a:xfrm>
+          <a:prstGeom prst="rect">
+            <a:avLst/>
+          </a:prstGeom>
+          <a:noFill/>
+          <a:ln/>
+        </p:spPr>
+        <p:txBody>
+          <a:bodyPr wrap="square" lIns="0" tIns="0" rIns="0" bIns="0" rtlCol="0" anchor="ctr"/>
+          <a:lstStyle/>
+          <a:p>
+            <a:pPr indent="0" marL="0">
+              <a:buNone/>
+            </a:pPr>
+            <a:r>
+              <a:rPr lang="en-US" sz="1450" b="1" dirty="0">
+                <a:solidFill>
+                  <a:srgbClr val="161C28"/>
+                </a:solidFill>
+                <a:latin typeface="맑은 고딕" pitchFamily="34" charset="0"/>
+                <a:ea typeface="맑은 고딕" pitchFamily="34" charset="-122"/>
+                <a:cs typeface="맑은 고딕" pitchFamily="34" charset="-120"/>
+              </a:rPr>
+              <a:t>판매자 소명</a:t>
+            </a:r>
+            <a:endParaRPr lang="en-US" sz="1450" dirty="0"/>
+          </a:p>
+        </p:txBody>
+      </p:sp>
+      <p:sp>
+        <p:nvSpPr>
+          <p:cNvPr id="11" name="Text 9"/>
+          <p:cNvSpPr txBox="1"/>
+          <p:nvPr/>
+        </p:nvSpPr>
+        <p:spPr>
+          <a:xfrm>
+            <a:off x="6172200" y="3255264"/>
+            <a:ext cx="5029200" cy="457200"/>
+          </a:xfrm>
+          <a:prstGeom prst="rect">
+            <a:avLst/>
+          </a:prstGeom>
+          <a:noFill/>
+          <a:ln/>
+        </p:spPr>
+        <p:txBody>
+          <a:bodyPr wrap="square" lIns="0" tIns="0" rIns="0" bIns="0" rtlCol="0" anchor="ctr"/>
+          <a:lstStyle/>
+          <a:p>
+            <a:pPr indent="0" marL="0">
+              <a:buNone/>
+            </a:pPr>
+            <a:r>
+              <a:rPr lang="en-US" sz="1250" dirty="0">
+                <a:solidFill>
+                  <a:srgbClr val="6B7488"/>
+                </a:solidFill>
+                <a:latin typeface="맑은 고딕" pitchFamily="34" charset="0"/>
+                <a:ea typeface="맑은 고딕" pitchFamily="34" charset="-122"/>
+                <a:cs typeface="맑은 고딕" pitchFamily="34" charset="-120"/>
+              </a:rPr>
+              <a:t>S1~S9 유형으로 나눠 판독 중</a:t>
+            </a:r>
+            <a:endParaRPr lang="en-US" sz="1250" dirty="0"/>
+          </a:p>
+        </p:txBody>
+      </p:sp>
+      <p:sp>
+        <p:nvSpPr>
+          <p:cNvPr id="12" name="Shape 10"/>
+          <p:cNvSpPr/>
+          <p:nvPr/>
+        </p:nvSpPr>
+        <p:spPr>
+          <a:xfrm>
+            <a:off x="685800" y="4069080"/>
+            <a:ext cx="10789920" cy="822960"/>
+          </a:xfrm>
+          <a:prstGeom prst="roundRect">
+            <a:avLst>
+              <a:gd name="adj" fmla="val 11111"/>
+            </a:avLst>
+          </a:prstGeom>
+          <a:solidFill>
+            <a:srgbClr val="F4F6FA"/>
+          </a:solidFill>
+          <a:ln w="12700">
+            <a:solidFill>
+              <a:srgbClr val="DBE0EA"/>
+            </a:solidFill>
+            <a:prstDash val="solid"/>
+          </a:ln>
+        </p:spPr>
+      </p:sp>
+      <p:sp>
+        <p:nvSpPr>
+          <p:cNvPr id="13" name="Text 11"/>
+          <p:cNvSpPr txBox="1"/>
+          <p:nvPr/>
+        </p:nvSpPr>
+        <p:spPr>
+          <a:xfrm>
+            <a:off x="960120" y="4215384"/>
+            <a:ext cx="1737360" cy="502920"/>
+          </a:xfrm>
+          <a:prstGeom prst="rect">
+            <a:avLst/>
+          </a:prstGeom>
+          <a:noFill/>
+          <a:ln/>
+        </p:spPr>
+        <p:txBody>
+          <a:bodyPr wrap="square" lIns="0" tIns="0" rIns="0" bIns="0" rtlCol="0" anchor="ctr"/>
+          <a:lstStyle/>
+          <a:p>
+            <a:pPr indent="0" marL="0">
+              <a:buNone/>
+            </a:pPr>
+            <a:r>
+              <a:rPr lang="en-US" sz="2100" b="1" dirty="0">
+                <a:solidFill>
+                  <a:srgbClr val="2F5BD8"/>
+                </a:solidFill>
+                <a:latin typeface="맑은 고딕" pitchFamily="34" charset="0"/>
+                <a:ea typeface="맑은 고딕" pitchFamily="34" charset="-122"/>
+                <a:cs typeface="맑은 고딕" pitchFamily="34" charset="-120"/>
+              </a:rPr>
+              <a:t>5,773행</a:t>
+            </a:r>
+            <a:endParaRPr lang="en-US" sz="2100" dirty="0"/>
+          </a:p>
+        </p:txBody>
+      </p:sp>
+      <p:sp>
+        <p:nvSpPr>
+          <p:cNvPr id="14" name="Text 12"/>
+          <p:cNvSpPr txBox="1"/>
+          <p:nvPr/>
+        </p:nvSpPr>
+        <p:spPr>
+          <a:xfrm>
+            <a:off x="2880360" y="4178808"/>
+            <a:ext cx="3108960" cy="365760"/>
+          </a:xfrm>
+          <a:prstGeom prst="rect">
+            <a:avLst/>
+          </a:prstGeom>
+          <a:noFill/>
+          <a:ln/>
+        </p:spPr>
+        <p:txBody>
+          <a:bodyPr wrap="square" lIns="0" tIns="0" rIns="0" bIns="0" rtlCol="0" anchor="ctr"/>
+          <a:lstStyle/>
+          <a:p>
+            <a:pPr indent="0" marL="0">
+              <a:buNone/>
+            </a:pPr>
+            <a:r>
+              <a:rPr lang="en-US" sz="1450" b="1" dirty="0">
+                <a:solidFill>
+                  <a:srgbClr val="161C28"/>
+                </a:solidFill>
+                <a:latin typeface="맑은 고딕" pitchFamily="34" charset="0"/>
+                <a:ea typeface="맑은 고딕" pitchFamily="34" charset="-122"/>
+                <a:cs typeface="맑은 고딕" pitchFamily="34" charset="-120"/>
+              </a:rPr>
+              <a:t>주문·배송 기록</a:t>
+            </a:r>
+            <a:endParaRPr lang="en-US" sz="1450" dirty="0"/>
+          </a:p>
+        </p:txBody>
+      </p:sp>
+      <p:sp>
+        <p:nvSpPr>
+          <p:cNvPr id="15" name="Text 13"/>
+          <p:cNvSpPr txBox="1"/>
+          <p:nvPr/>
+        </p:nvSpPr>
+        <p:spPr>
+          <a:xfrm>
+            <a:off x="6172200" y="4215384"/>
+            <a:ext cx="5029200" cy="457200"/>
+          </a:xfrm>
+          <a:prstGeom prst="rect">
+            <a:avLst/>
+          </a:prstGeom>
+          <a:noFill/>
+          <a:ln/>
+        </p:spPr>
+        <p:txBody>
+          <a:bodyPr wrap="square" lIns="0" tIns="0" rIns="0" bIns="0" rtlCol="0" anchor="ctr"/>
+          <a:lstStyle/>
+          <a:p>
+            <a:pPr indent="0" marL="0">
+              <a:buNone/>
+            </a:pPr>
+            <a:r>
+              <a:rPr lang="en-US" sz="1250" dirty="0">
+                <a:solidFill>
+                  <a:srgbClr val="6B7488"/>
+                </a:solidFill>
+                <a:latin typeface="맑은 고딕" pitchFamily="34" charset="0"/>
+                <a:ea typeface="맑은 고딕" pitchFamily="34" charset="-122"/>
+                <a:cs typeface="맑은 고딕" pitchFamily="34" charset="-120"/>
+              </a:rPr>
+              <a:t>팀원 여섯 명 실계정을 쇼핑몰별 4파일로</a:t>
+            </a:r>
+            <a:endParaRPr lang="en-US" sz="1250" dirty="0"/>
+          </a:p>
+        </p:txBody>
+      </p:sp>
+      <p:sp>
+        <p:nvSpPr>
+          <p:cNvPr id="16" name="Shape 14"/>
+          <p:cNvSpPr/>
+          <p:nvPr/>
+        </p:nvSpPr>
+        <p:spPr>
+          <a:xfrm>
+            <a:off x="685800" y="5029200"/>
+            <a:ext cx="10789920" cy="822960"/>
+          </a:xfrm>
+          <a:prstGeom prst="roundRect">
+            <a:avLst>
+              <a:gd name="adj" fmla="val 11111"/>
+            </a:avLst>
+          </a:prstGeom>
+          <a:solidFill>
+            <a:srgbClr val="F4F6FA"/>
+          </a:solidFill>
+          <a:ln w="12700">
+            <a:solidFill>
+              <a:srgbClr val="DBE0EA"/>
+            </a:solidFill>
+            <a:prstDash val="solid"/>
+          </a:ln>
+        </p:spPr>
+      </p:sp>
+      <p:sp>
+        <p:nvSpPr>
+          <p:cNvPr id="17" name="Text 15"/>
+          <p:cNvSpPr txBox="1"/>
+          <p:nvPr/>
+        </p:nvSpPr>
+        <p:spPr>
+          <a:xfrm>
+            <a:off x="960120" y="5175504"/>
+            <a:ext cx="1737360" cy="502920"/>
+          </a:xfrm>
+          <a:prstGeom prst="rect">
+            <a:avLst/>
+          </a:prstGeom>
+          <a:noFill/>
+          <a:ln/>
+        </p:spPr>
+        <p:txBody>
+          <a:bodyPr wrap="square" lIns="0" tIns="0" rIns="0" bIns="0" rtlCol="0" anchor="ctr"/>
+          <a:lstStyle/>
+          <a:p>
+            <a:pPr indent="0" marL="0">
+              <a:buNone/>
+            </a:pPr>
+            <a:r>
+              <a:rPr lang="en-US" sz="2100" b="1" dirty="0">
                 <a:solidFill>
                   <a:srgbClr val="A8720C"/>
                 </a:solidFill>
@@ -4317,110 +5568,126 @@
                 <a:ea typeface="맑은 고딕" pitchFamily="34" charset="-122"/>
                 <a:cs typeface="맑은 고딕" pitchFamily="34" charset="-120"/>
               </a:rPr>
-              <a:t>멘토 · 09.01</a:t>
+              <a:t>28개</a:t>
+            </a:r>
+            <a:endParaRPr lang="en-US" sz="2100" dirty="0"/>
+          </a:p>
+        </p:txBody>
+      </p:sp>
+      <p:sp>
+        <p:nvSpPr>
+          <p:cNvPr id="18" name="Text 16"/>
+          <p:cNvSpPr txBox="1"/>
+          <p:nvPr/>
+        </p:nvSpPr>
+        <p:spPr>
+          <a:xfrm>
+            <a:off x="2880360" y="5138928"/>
+            <a:ext cx="3108960" cy="365760"/>
+          </a:xfrm>
+          <a:prstGeom prst="rect">
+            <a:avLst/>
+          </a:prstGeom>
+          <a:noFill/>
+          <a:ln/>
+        </p:spPr>
+        <p:txBody>
+          <a:bodyPr wrap="square" lIns="0" tIns="0" rIns="0" bIns="0" rtlCol="0" anchor="ctr"/>
+          <a:lstStyle/>
+          <a:p>
+            <a:pPr indent="0" marL="0">
+              <a:buNone/>
+            </a:pPr>
+            <a:r>
+              <a:rPr lang="en-US" sz="1450" b="1" dirty="0">
+                <a:solidFill>
+                  <a:srgbClr val="161C28"/>
+                </a:solidFill>
+                <a:latin typeface="맑은 고딕" pitchFamily="34" charset="0"/>
+                <a:ea typeface="맑은 고딕" pitchFamily="34" charset="-122"/>
+                <a:cs typeface="맑은 고딕" pitchFamily="34" charset="-120"/>
+              </a:rPr>
+              <a:t>법령·고시 조항 앵커</a:t>
+            </a:r>
+            <a:endParaRPr lang="en-US" sz="1450" dirty="0"/>
+          </a:p>
+        </p:txBody>
+      </p:sp>
+      <p:sp>
+        <p:nvSpPr>
+          <p:cNvPr id="19" name="Text 17"/>
+          <p:cNvSpPr txBox="1"/>
+          <p:nvPr/>
+        </p:nvSpPr>
+        <p:spPr>
+          <a:xfrm>
+            <a:off x="6172200" y="5175504"/>
+            <a:ext cx="5029200" cy="457200"/>
+          </a:xfrm>
+          <a:prstGeom prst="rect">
+            <a:avLst/>
+          </a:prstGeom>
+          <a:noFill/>
+          <a:ln/>
+        </p:spPr>
+        <p:txBody>
+          <a:bodyPr wrap="square" lIns="0" tIns="0" rIns="0" bIns="0" rtlCol="0" anchor="ctr"/>
+          <a:lstStyle/>
+          <a:p>
+            <a:pPr indent="0" marL="0">
+              <a:buNone/>
+            </a:pPr>
+            <a:r>
+              <a:rPr lang="en-US" sz="1250" dirty="0">
+                <a:solidFill>
+                  <a:srgbClr val="6B7488"/>
+                </a:solidFill>
+                <a:latin typeface="맑은 고딕" pitchFamily="34" charset="0"/>
+                <a:ea typeface="맑은 고딕" pitchFamily="34" charset="-122"/>
+                <a:cs typeface="맑은 고딕" pitchFamily="34" charset="-120"/>
+              </a:rPr>
+              <a:t>전자상거래법·시행령·분쟁해결기준</a:t>
+            </a:r>
+            <a:endParaRPr lang="en-US" sz="1250" dirty="0"/>
+          </a:p>
+        </p:txBody>
+      </p:sp>
+      <p:sp>
+        <p:nvSpPr>
+          <p:cNvPr id="20" name="Text 18"/>
+          <p:cNvSpPr txBox="1"/>
+          <p:nvPr/>
+        </p:nvSpPr>
+        <p:spPr>
+          <a:xfrm>
+            <a:off x="685800" y="6080760"/>
+            <a:ext cx="10515600" cy="365760"/>
+          </a:xfrm>
+          <a:prstGeom prst="rect">
+            <a:avLst/>
+          </a:prstGeom>
+          <a:noFill/>
+          <a:ln/>
+        </p:spPr>
+        <p:txBody>
+          <a:bodyPr wrap="square" lIns="0" tIns="0" rIns="0" bIns="0" rtlCol="0" anchor="ctr"/>
+          <a:lstStyle/>
+          <a:p>
+            <a:pPr indent="0" marL="0">
+              <a:buNone/>
+            </a:pPr>
+            <a:r>
+              <a:rPr lang="en-US" sz="1200" dirty="0">
+                <a:solidFill>
+                  <a:srgbClr val="9AA3B4"/>
+                </a:solidFill>
+                <a:latin typeface="맑은 고딕" pitchFamily="34" charset="0"/>
+                <a:ea typeface="맑은 고딕" pitchFamily="34" charset="-122"/>
+                <a:cs typeface="맑은 고딕" pitchFamily="34" charset="-120"/>
+              </a:rPr>
+              <a:t>이 밖에 AI Hub K쇼핑 상담 데이터와 공정위 소비자 민원 데이터를 함께 쓰고 있다.</a:t>
             </a:r>
             <a:endParaRPr lang="en-US" sz="1200" dirty="0"/>
-          </a:p>
-        </p:txBody>
-      </p:sp>
-      <p:sp>
-        <p:nvSpPr>
-          <p:cNvPr id="8" name="Text 6"/>
-          <p:cNvSpPr txBox="1"/>
-          <p:nvPr/>
-        </p:nvSpPr>
-        <p:spPr>
-          <a:xfrm>
-            <a:off x="1051560" y="4389120"/>
-            <a:ext cx="10058400" cy="777240"/>
-          </a:xfrm>
-          <a:prstGeom prst="rect">
-            <a:avLst/>
-          </a:prstGeom>
-          <a:noFill/>
-          <a:ln/>
-        </p:spPr>
-        <p:txBody>
-          <a:bodyPr wrap="square" lIns="0" tIns="0" rIns="0" bIns="0" rtlCol="0" anchor="ctr"/>
-          <a:lstStyle/>
-          <a:p>
-            <a:pPr indent="0" marL="0">
-              <a:lnSpc>
-                <a:spcPts val="2400"/>
-              </a:lnSpc>
-              <a:buNone/>
-            </a:pPr>
-            <a:r>
-              <a:rPr lang="en-US" sz="1500" dirty="0">
-                <a:solidFill>
-                  <a:srgbClr val="DCE2ED"/>
-                </a:solidFill>
-                <a:latin typeface="맑은 고딕" pitchFamily="34" charset="0"/>
-                <a:ea typeface="맑은 고딕" pitchFamily="34" charset="-122"/>
-                <a:cs typeface="맑은 고딕" pitchFamily="34" charset="-120"/>
-              </a:rPr>
-              <a:t>"기술 구현보다 프로젝트 가치 증명이 핵심이다.</a:t>
-            </a:r>
-            <a:endParaRPr lang="en-US" sz="1500" dirty="0"/>
-          </a:p>
-          <a:p>
-            <a:pPr indent="0" marL="0">
-              <a:lnSpc>
-                <a:spcPts val="2400"/>
-              </a:lnSpc>
-              <a:buNone/>
-            </a:pPr>
-            <a:r>
-              <a:rPr lang="en-US" sz="1500" dirty="0">
-                <a:solidFill>
-                  <a:srgbClr val="DCE2ED"/>
-                </a:solidFill>
-                <a:latin typeface="맑은 고딕" pitchFamily="34" charset="0"/>
-                <a:ea typeface="맑은 고딕" pitchFamily="34" charset="-122"/>
-                <a:cs typeface="맑은 고딕" pitchFamily="34" charset="-120"/>
-              </a:rPr>
-              <a:t>실사용자인가 모의 사용자인가?"</a:t>
-            </a:r>
-            <a:endParaRPr lang="en-US" sz="1500" dirty="0"/>
-          </a:p>
-        </p:txBody>
-      </p:sp>
-      <p:sp>
-        <p:nvSpPr>
-          <p:cNvPr id="9" name="Text 7"/>
-          <p:cNvSpPr txBox="1"/>
-          <p:nvPr/>
-        </p:nvSpPr>
-        <p:spPr>
-          <a:xfrm>
-            <a:off x="685800" y="5715000"/>
-            <a:ext cx="10058400" cy="411480"/>
-          </a:xfrm>
-          <a:prstGeom prst="rect">
-            <a:avLst/>
-          </a:prstGeom>
-          <a:noFill/>
-          <a:ln/>
-        </p:spPr>
-        <p:txBody>
-          <a:bodyPr wrap="square" lIns="0" tIns="0" rIns="0" bIns="0" rtlCol="0" anchor="ctr"/>
-          <a:lstStyle/>
-          <a:p>
-            <a:pPr indent="0" marL="0">
-              <a:buNone/>
-            </a:pPr>
-            <a:r>
-              <a:rPr lang="en-US" sz="1400" dirty="0">
-                <a:solidFill>
-                  <a:srgbClr val="9AA3B4"/>
-                </a:solidFill>
-                <a:latin typeface="맑은 고딕" pitchFamily="34" charset="0"/>
-                <a:ea typeface="맑은 고딕" pitchFamily="34" charset="-122"/>
-                <a:cs typeface="맑은 고딕" pitchFamily="34" charset="-120"/>
-              </a:rPr>
-              <a:t>만드는 건 되는데, 누구에게 왜 값이 있는지를 못 대고 있었다.</a:t>
-            </a:r>
-            <a:endParaRPr lang="en-US" sz="1400" dirty="0"/>
           </a:p>
         </p:txBody>
       </p:sp>
@@ -4451,26 +5718,104 @@
       </p:grpSpPr>
       <p:sp>
         <p:nvSpPr>
-          <p:cNvPr id="2" name="Shape 0"/>
+          <p:cNvPr id="2" name="Text 0"/>
+          <p:cNvSpPr txBox="1"/>
+          <p:nvPr/>
+        </p:nvSpPr>
+        <p:spPr>
+          <a:xfrm>
+            <a:off x="685800" y="566928"/>
+            <a:ext cx="10789920" cy="914400"/>
+          </a:xfrm>
+          <a:prstGeom prst="rect">
+            <a:avLst/>
+          </a:prstGeom>
+          <a:noFill/>
+          <a:ln/>
+        </p:spPr>
+        <p:txBody>
+          <a:bodyPr wrap="square" lIns="0" tIns="0" rIns="0" bIns="0" rtlCol="0" anchor="ctr"/>
+          <a:lstStyle/>
+          <a:p>
+            <a:pPr indent="0" marL="0">
+              <a:buNone/>
+            </a:pPr>
+            <a:r>
+              <a:rPr lang="en-US" sz="3000" b="1" dirty="0">
+                <a:solidFill>
+                  <a:srgbClr val="161C28"/>
+                </a:solidFill>
+                <a:latin typeface="맑은 고딕" pitchFamily="34" charset="0"/>
+                <a:ea typeface="맑은 고딕" pitchFamily="34" charset="-122"/>
+                <a:cs typeface="맑은 고딕" pitchFamily="34" charset="-120"/>
+              </a:rPr>
+              <a:t>해봤지만 접은 것</a:t>
+            </a:r>
+            <a:endParaRPr lang="en-US" sz="3000" dirty="0"/>
+          </a:p>
+        </p:txBody>
+      </p:sp>
+      <p:sp>
+        <p:nvSpPr>
+          <p:cNvPr id="3" name="Text 1"/>
+          <p:cNvSpPr txBox="1"/>
+          <p:nvPr/>
+        </p:nvSpPr>
+        <p:spPr>
+          <a:xfrm>
+            <a:off x="685800" y="1481328"/>
+            <a:ext cx="10789920" cy="411480"/>
+          </a:xfrm>
+          <a:prstGeom prst="rect">
+            <a:avLst/>
+          </a:prstGeom>
+          <a:noFill/>
+          <a:ln/>
+        </p:spPr>
+        <p:txBody>
+          <a:bodyPr wrap="square" lIns="0" tIns="0" rIns="0" bIns="0" rtlCol="0" anchor="ctr"/>
+          <a:lstStyle/>
+          <a:p>
+            <a:pPr indent="0" marL="0">
+              <a:buNone/>
+            </a:pPr>
+            <a:r>
+              <a:rPr lang="en-US" sz="1400" dirty="0">
+                <a:solidFill>
+                  <a:srgbClr val="6B7488"/>
+                </a:solidFill>
+                <a:latin typeface="맑은 고딕" pitchFamily="34" charset="0"/>
+                <a:ea typeface="맑은 고딕" pitchFamily="34" charset="-122"/>
+                <a:cs typeface="맑은 고딕" pitchFamily="34" charset="-120"/>
+              </a:rPr>
+              <a:t>돌려 보고 안 되는 걸 확인했다. 되살리지 않고 이유를 기록으로 뒀다.</a:t>
+            </a:r>
+            <a:endParaRPr lang="en-US" sz="1400" dirty="0"/>
+          </a:p>
+        </p:txBody>
+      </p:sp>
+      <p:sp>
+        <p:nvSpPr>
+          <p:cNvPr id="4" name="Shape 2"/>
           <p:cNvSpPr/>
           <p:nvPr/>
         </p:nvSpPr>
         <p:spPr>
           <a:xfrm>
-            <a:off x="685800" y="566928"/>
-            <a:ext cx="1188720" cy="310896"/>
+            <a:off x="685800" y="2103120"/>
+            <a:ext cx="3383280" cy="2926080"/>
           </a:xfrm>
           <a:prstGeom prst="roundRect">
             <a:avLst>
-              <a:gd name="adj" fmla="val 17647"/>
+              <a:gd name="adj" fmla="val 3125"/>
             </a:avLst>
           </a:prstGeom>
           <a:solidFill>
-            <a:srgbClr val="A8720C"/>
+            <a:srgbClr val="FBF3E3"/>
           </a:solidFill>
           <a:ln w="12700">
             <a:solidFill>
-              <a:srgbClr val="A8720C"/>
+              <a:srgbClr val="E8D9B5"/>
             </a:solidFill>
             <a:prstDash val="solid"/>
           </a:ln>
@@ -4478,38 +5823,116 @@
       </p:sp>
       <p:sp>
         <p:nvSpPr>
-          <p:cNvPr id="3" name="Text 1"/>
-          <p:cNvSpPr txBox="1"/>
-          <p:nvPr/>
-        </p:nvSpPr>
-        <p:spPr>
-          <a:xfrm>
-            <a:off x="685800" y="566928"/>
-            <a:ext cx="1188720" cy="310896"/>
-          </a:xfrm>
-          <a:prstGeom prst="rect">
-            <a:avLst/>
-          </a:prstGeom>
-          <a:noFill/>
-          <a:ln/>
-        </p:spPr>
-        <p:txBody>
-          <a:bodyPr wrap="square" lIns="0" tIns="0" rIns="0" bIns="0" rtlCol="0" anchor="ctr"/>
-          <a:lstStyle/>
-          <a:p>
-            <a:pPr algn="ctr" indent="0" marL="0">
-              <a:buNone/>
-            </a:pPr>
-            <a:r>
-              <a:rPr lang="en-US" sz="1200" b="1" dirty="0">
-                <a:solidFill>
-                  <a:srgbClr val="FFFFFF"/>
-                </a:solidFill>
-                <a:latin typeface="맑은 고딕" pitchFamily="34" charset="0"/>
-                <a:ea typeface="맑은 고딕" pitchFamily="34" charset="-122"/>
-                <a:cs typeface="맑은 고딕" pitchFamily="34" charset="-120"/>
-              </a:rPr>
-              <a:t>09.02–</a:t>
+          <p:cNvPr id="5" name="Text 3"/>
+          <p:cNvSpPr txBox="1"/>
+          <p:nvPr/>
+        </p:nvSpPr>
+        <p:spPr>
+          <a:xfrm>
+            <a:off x="960120" y="2331720"/>
+            <a:ext cx="2834640" cy="365760"/>
+          </a:xfrm>
+          <a:prstGeom prst="rect">
+            <a:avLst/>
+          </a:prstGeom>
+          <a:noFill/>
+          <a:ln/>
+        </p:spPr>
+        <p:txBody>
+          <a:bodyPr wrap="square" lIns="0" tIns="0" rIns="0" bIns="0" rtlCol="0" anchor="ctr"/>
+          <a:lstStyle/>
+          <a:p>
+            <a:pPr indent="0" marL="0">
+              <a:buNone/>
+            </a:pPr>
+            <a:r>
+              <a:rPr lang="en-US" sz="1500" b="1" dirty="0">
+                <a:solidFill>
+                  <a:srgbClr val="A8720C"/>
+                </a:solidFill>
+                <a:latin typeface="맑은 고딕" pitchFamily="34" charset="0"/>
+                <a:ea typeface="맑은 고딕" pitchFamily="34" charset="-122"/>
+                <a:cs typeface="맑은 고딕" pitchFamily="34" charset="-120"/>
+              </a:rPr>
+              <a:t>파인튜닝</a:t>
+            </a:r>
+            <a:endParaRPr lang="en-US" sz="1500" dirty="0"/>
+          </a:p>
+        </p:txBody>
+      </p:sp>
+      <p:sp>
+        <p:nvSpPr>
+          <p:cNvPr id="6" name="Text 4"/>
+          <p:cNvSpPr txBox="1"/>
+          <p:nvPr/>
+        </p:nvSpPr>
+        <p:spPr>
+          <a:xfrm>
+            <a:off x="960120" y="2788920"/>
+            <a:ext cx="2834640" cy="685800"/>
+          </a:xfrm>
+          <a:prstGeom prst="rect">
+            <a:avLst/>
+          </a:prstGeom>
+          <a:noFill/>
+          <a:ln/>
+        </p:spPr>
+        <p:txBody>
+          <a:bodyPr wrap="square" lIns="0" tIns="0" rIns="0" bIns="0" rtlCol="0" anchor="ctr"/>
+          <a:lstStyle/>
+          <a:p>
+            <a:pPr indent="0" marL="0">
+              <a:buNone/>
+            </a:pPr>
+            <a:r>
+              <a:rPr lang="en-US" sz="1700" b="1" dirty="0">
+                <a:solidFill>
+                  <a:srgbClr val="161C28"/>
+                </a:solidFill>
+                <a:latin typeface="맑은 고딕" pitchFamily="34" charset="0"/>
+                <a:ea typeface="맑은 고딕" pitchFamily="34" charset="-122"/>
+                <a:cs typeface="맑은 고딕" pitchFamily="34" charset="-120"/>
+              </a:rPr>
+              <a:t>stage3 v1~v7 전부 채택 불가</a:t>
+            </a:r>
+            <a:endParaRPr lang="en-US" sz="1700" dirty="0"/>
+          </a:p>
+        </p:txBody>
+      </p:sp>
+      <p:sp>
+        <p:nvSpPr>
+          <p:cNvPr id="7" name="Text 5"/>
+          <p:cNvSpPr txBox="1"/>
+          <p:nvPr/>
+        </p:nvSpPr>
+        <p:spPr>
+          <a:xfrm>
+            <a:off x="960120" y="3566160"/>
+            <a:ext cx="2834640" cy="1234440"/>
+          </a:xfrm>
+          <a:prstGeom prst="rect">
+            <a:avLst/>
+          </a:prstGeom>
+          <a:noFill/>
+          <a:ln/>
+        </p:spPr>
+        <p:txBody>
+          <a:bodyPr wrap="square" lIns="0" tIns="0" rIns="0" bIns="0" rtlCol="0" anchor="ctr"/>
+          <a:lstStyle/>
+          <a:p>
+            <a:pPr indent="0" marL="0">
+              <a:buNone/>
+            </a:pPr>
+            <a:r>
+              <a:rPr lang="en-US" sz="1200" dirty="0">
+                <a:solidFill>
+                  <a:srgbClr val="6B7488"/>
+                </a:solidFill>
+                <a:latin typeface="맑은 고딕" pitchFamily="34" charset="0"/>
+                <a:ea typeface="맑은 고딕" pitchFamily="34" charset="-122"/>
+                <a:cs typeface="맑은 고딕" pitchFamily="34" charset="-120"/>
+              </a:rPr>
+              <a:t>모델이 근거를 그대로 베껴 쓰는 법을 배웠다</a:t>
             </a:r>
             <a:endParaRPr lang="en-US" sz="1200" dirty="0"/>
           </a:p>
@@ -4517,104 +5940,26 @@
       </p:sp>
       <p:sp>
         <p:nvSpPr>
-          <p:cNvPr id="4" name="Text 2"/>
-          <p:cNvSpPr txBox="1"/>
-          <p:nvPr/>
-        </p:nvSpPr>
-        <p:spPr>
-          <a:xfrm>
-            <a:off x="685800" y="1051560"/>
-            <a:ext cx="10789920" cy="914400"/>
-          </a:xfrm>
-          <a:prstGeom prst="rect">
-            <a:avLst/>
-          </a:prstGeom>
-          <a:noFill/>
-          <a:ln/>
-        </p:spPr>
-        <p:txBody>
-          <a:bodyPr wrap="square" lIns="0" tIns="0" rIns="0" bIns="0" rtlCol="0" anchor="ctr"/>
-          <a:lstStyle/>
-          <a:p>
-            <a:pPr indent="0" marL="0">
-              <a:buNone/>
-            </a:pPr>
-            <a:r>
-              <a:rPr lang="en-US" sz="3000" b="1" dirty="0">
-                <a:solidFill>
-                  <a:srgbClr val="161C28"/>
-                </a:solidFill>
-                <a:latin typeface="맑은 고딕" pitchFamily="34" charset="0"/>
-                <a:ea typeface="맑은 고딕" pitchFamily="34" charset="-122"/>
-                <a:cs typeface="맑은 고딕" pitchFamily="34" charset="-120"/>
-              </a:rPr>
-              <a:t>그래서 시장을 다시 좁히는 중이다</a:t>
-            </a:r>
-            <a:endParaRPr lang="en-US" sz="3000" dirty="0"/>
-          </a:p>
-        </p:txBody>
-      </p:sp>
-      <p:sp>
-        <p:nvSpPr>
-          <p:cNvPr id="5" name="Text 3"/>
-          <p:cNvSpPr txBox="1"/>
-          <p:nvPr/>
-        </p:nvSpPr>
-        <p:spPr>
-          <a:xfrm>
-            <a:off x="685800" y="1828800"/>
-            <a:ext cx="10789920" cy="411480"/>
-          </a:xfrm>
-          <a:prstGeom prst="rect">
-            <a:avLst/>
-          </a:prstGeom>
-          <a:noFill/>
-          <a:ln/>
-        </p:spPr>
-        <p:txBody>
-          <a:bodyPr wrap="square" lIns="0" tIns="0" rIns="0" bIns="0" rtlCol="0" anchor="ctr"/>
-          <a:lstStyle/>
-          <a:p>
-            <a:pPr indent="0" marL="0">
-              <a:buNone/>
-            </a:pPr>
-            <a:r>
-              <a:rPr lang="en-US" sz="1400" dirty="0">
-                <a:solidFill>
-                  <a:srgbClr val="6B7488"/>
-                </a:solidFill>
-                <a:latin typeface="맑은 고딕" pitchFamily="34" charset="0"/>
-                <a:ea typeface="맑은 고딕" pitchFamily="34" charset="-122"/>
-                <a:cs typeface="맑은 고딕" pitchFamily="34" charset="-120"/>
-              </a:rPr>
-              <a:t>CS 를 넓게 훑고 세그먼트에 점수를 매겨 후보를 줄이고 있다. 아직 정하지 않았다.</a:t>
-            </a:r>
-            <a:endParaRPr lang="en-US" sz="1400" dirty="0"/>
-          </a:p>
-        </p:txBody>
-      </p:sp>
-      <p:sp>
-        <p:nvSpPr>
-          <p:cNvPr id="6" name="Shape 4"/>
+          <p:cNvPr id="8" name="Shape 6"/>
           <p:cNvSpPr/>
           <p:nvPr/>
         </p:nvSpPr>
         <p:spPr>
           <a:xfrm>
-            <a:off x="685800" y="2377440"/>
-            <a:ext cx="10789920" cy="777240"/>
+            <a:off x="4389120" y="2103120"/>
+            <a:ext cx="3383280" cy="2926080"/>
           </a:xfrm>
           <a:prstGeom prst="roundRect">
             <a:avLst>
-              <a:gd name="adj" fmla="val 11765"/>
+              <a:gd name="adj" fmla="val 3125"/>
             </a:avLst>
           </a:prstGeom>
           <a:solidFill>
-            <a:srgbClr val="F4F6FA"/>
+            <a:srgbClr val="FBF3E3"/>
           </a:solidFill>
           <a:ln w="12700">
             <a:solidFill>
-              <a:srgbClr val="DBE0EA"/>
+              <a:srgbClr val="E8D9B5"/>
             </a:solidFill>
             <a:prstDash val="solid"/>
           </a:ln>
@@ -4622,14 +5967,14 @@
       </p:sp>
       <p:sp>
         <p:nvSpPr>
-          <p:cNvPr id="7" name="Text 5"/>
-          <p:cNvSpPr txBox="1"/>
-          <p:nvPr/>
-        </p:nvSpPr>
-        <p:spPr>
-          <a:xfrm>
-            <a:off x="1005840" y="2468880"/>
-            <a:ext cx="3291840" cy="365760"/>
+          <p:cNvPr id="9" name="Text 7"/>
+          <p:cNvSpPr txBox="1"/>
+          <p:nvPr/>
+        </p:nvSpPr>
+        <p:spPr>
+          <a:xfrm>
+            <a:off x="4663440" y="2331720"/>
+            <a:ext cx="2834640" cy="365760"/>
           </a:xfrm>
           <a:prstGeom prst="rect">
             <a:avLst/>
@@ -4647,44 +5992,83 @@
             <a:r>
               <a:rPr lang="en-US" sz="1500" b="1" dirty="0">
                 <a:solidFill>
+                  <a:srgbClr val="A8720C"/>
+                </a:solidFill>
+                <a:latin typeface="맑은 고딕" pitchFamily="34" charset="0"/>
+                <a:ea typeface="맑은 고딕" pitchFamily="34" charset="-122"/>
+                <a:cs typeface="맑은 고딕" pitchFamily="34" charset="-120"/>
+              </a:rPr>
+              <a:t>12GB 벽</a:t>
+            </a:r>
+            <a:endParaRPr lang="en-US" sz="1500" dirty="0"/>
+          </a:p>
+        </p:txBody>
+      </p:sp>
+      <p:sp>
+        <p:nvSpPr>
+          <p:cNvPr id="10" name="Text 8"/>
+          <p:cNvSpPr txBox="1"/>
+          <p:nvPr/>
+        </p:nvSpPr>
+        <p:spPr>
+          <a:xfrm>
+            <a:off x="4663440" y="2788920"/>
+            <a:ext cx="2834640" cy="685800"/>
+          </a:xfrm>
+          <a:prstGeom prst="rect">
+            <a:avLst/>
+          </a:prstGeom>
+          <a:noFill/>
+          <a:ln/>
+        </p:spPr>
+        <p:txBody>
+          <a:bodyPr wrap="square" lIns="0" tIns="0" rIns="0" bIns="0" rtlCol="0" anchor="ctr"/>
+          <a:lstStyle/>
+          <a:p>
+            <a:pPr indent="0" marL="0">
+              <a:buNone/>
+            </a:pPr>
+            <a:r>
+              <a:rPr lang="en-US" sz="1700" b="1" dirty="0">
+                <a:solidFill>
                   <a:srgbClr val="161C28"/>
                 </a:solidFill>
                 <a:latin typeface="맑은 고딕" pitchFamily="34" charset="0"/>
                 <a:ea typeface="맑은 고딕" pitchFamily="34" charset="-122"/>
                 <a:cs typeface="맑은 고딕" pitchFamily="34" charset="-120"/>
               </a:rPr>
-              <a:t>해외구매대행</a:t>
-            </a:r>
-            <a:endParaRPr lang="en-US" sz="1500" dirty="0"/>
-          </a:p>
-        </p:txBody>
-      </p:sp>
-      <p:sp>
-        <p:nvSpPr>
-          <p:cNvPr id="8" name="Text 6"/>
-          <p:cNvSpPr txBox="1"/>
-          <p:nvPr/>
-        </p:nvSpPr>
-        <p:spPr>
-          <a:xfrm>
-            <a:off x="4434840" y="2487168"/>
-            <a:ext cx="6766560" cy="548640"/>
-          </a:xfrm>
-          <a:prstGeom prst="rect">
-            <a:avLst/>
-          </a:prstGeom>
-          <a:noFill/>
-          <a:ln/>
-        </p:spPr>
-        <p:txBody>
-          <a:bodyPr wrap="square" lIns="0" tIns="0" rIns="0" bIns="0" rtlCol="0" anchor="ctr"/>
-          <a:lstStyle/>
-          <a:p>
-            <a:pPr indent="0" marL="0">
-              <a:buNone/>
-            </a:pPr>
-            <a:r>
-              <a:rPr lang="en-US" sz="1250" dirty="0">
+              <a:t>10,670 → 1,024 토큰</a:t>
+            </a:r>
+            <a:endParaRPr lang="en-US" sz="1700" dirty="0"/>
+          </a:p>
+        </p:txBody>
+      </p:sp>
+      <p:sp>
+        <p:nvSpPr>
+          <p:cNvPr id="11" name="Text 9"/>
+          <p:cNvSpPr txBox="1"/>
+          <p:nvPr/>
+        </p:nvSpPr>
+        <p:spPr>
+          <a:xfrm>
+            <a:off x="4663440" y="3566160"/>
+            <a:ext cx="2834640" cy="1234440"/>
+          </a:xfrm>
+          <a:prstGeom prst="rect">
+            <a:avLst/>
+          </a:prstGeom>
+          <a:noFill/>
+          <a:ln/>
+        </p:spPr>
+        <p:txBody>
+          <a:bodyPr wrap="square" lIns="0" tIns="0" rIns="0" bIns="0" rtlCol="0" anchor="ctr"/>
+          <a:lstStyle/>
+          <a:p>
+            <a:pPr indent="0" marL="0">
+              <a:buNone/>
+            </a:pPr>
+            <a:r>
+              <a:rPr lang="en-US" sz="1200" dirty="0">
                 <a:solidFill>
                   <a:srgbClr val="6B7488"/>
                 </a:solidFill>
@@ -4692,34 +6076,34 @@
                 <a:ea typeface="맑은 고딕" pitchFamily="34" charset="-122"/>
                 <a:cs typeface="맑은 고딕" pitchFamily="34" charset="-120"/>
               </a:rPr>
-              <a:t>직전 후보. 통관·지연·환불 규정이 복잡해 판정 여지가 크다</a:t>
-            </a:r>
-            <a:endParaRPr lang="en-US" sz="1250" dirty="0"/>
-          </a:p>
-        </p:txBody>
-      </p:sp>
-      <p:sp>
-        <p:nvSpPr>
-          <p:cNvPr id="9" name="Shape 7"/>
+              <a:t>팀 최고 사양이 4070 SUPER 12GB. 입력을 10분의 1로 깎아야 돌았다</a:t>
+            </a:r>
+            <a:endParaRPr lang="en-US" sz="1200" dirty="0"/>
+          </a:p>
+        </p:txBody>
+      </p:sp>
+      <p:sp>
+        <p:nvSpPr>
+          <p:cNvPr id="12" name="Shape 10"/>
           <p:cNvSpPr/>
           <p:nvPr/>
         </p:nvSpPr>
         <p:spPr>
           <a:xfrm>
-            <a:off x="685800" y="3291840"/>
-            <a:ext cx="10789920" cy="777240"/>
+            <a:off x="8092440" y="2103120"/>
+            <a:ext cx="3383280" cy="2926080"/>
           </a:xfrm>
           <a:prstGeom prst="roundRect">
             <a:avLst>
-              <a:gd name="adj" fmla="val 11765"/>
+              <a:gd name="adj" fmla="val 3125"/>
             </a:avLst>
           </a:prstGeom>
           <a:solidFill>
-            <a:srgbClr val="F4F6FA"/>
+            <a:srgbClr val="FBF3E3"/>
           </a:solidFill>
           <a:ln w="12700">
             <a:solidFill>
-              <a:srgbClr val="DBE0EA"/>
+              <a:srgbClr val="E8D9B5"/>
             </a:solidFill>
             <a:prstDash val="solid"/>
           </a:ln>
@@ -4727,14 +6111,14 @@
       </p:sp>
       <p:sp>
         <p:nvSpPr>
-          <p:cNvPr id="10" name="Text 8"/>
-          <p:cNvSpPr txBox="1"/>
-          <p:nvPr/>
-        </p:nvSpPr>
-        <p:spPr>
-          <a:xfrm>
-            <a:off x="1005840" y="3383280"/>
-            <a:ext cx="3291840" cy="365760"/>
+          <p:cNvPr id="13" name="Text 11"/>
+          <p:cNvSpPr txBox="1"/>
+          <p:nvPr/>
+        </p:nvSpPr>
+        <p:spPr>
+          <a:xfrm>
+            <a:off x="8366760" y="2331720"/>
+            <a:ext cx="2834640" cy="365760"/>
           </a:xfrm>
           <a:prstGeom prst="rect">
             <a:avLst/>
@@ -4752,44 +6136,83 @@
             <a:r>
               <a:rPr lang="en-US" sz="1500" b="1" dirty="0">
                 <a:solidFill>
+                  <a:srgbClr val="A8720C"/>
+                </a:solidFill>
+                <a:latin typeface="맑은 고딕" pitchFamily="34" charset="0"/>
+                <a:ea typeface="맑은 고딕" pitchFamily="34" charset="-122"/>
+                <a:cs typeface="맑은 고딕" pitchFamily="34" charset="-120"/>
+              </a:rPr>
+              <a:t>문서 드리프트</a:t>
+            </a:r>
+            <a:endParaRPr lang="en-US" sz="1500" dirty="0"/>
+          </a:p>
+        </p:txBody>
+      </p:sp>
+      <p:sp>
+        <p:nvSpPr>
+          <p:cNvPr id="14" name="Text 12"/>
+          <p:cNvSpPr txBox="1"/>
+          <p:nvPr/>
+        </p:nvSpPr>
+        <p:spPr>
+          <a:xfrm>
+            <a:off x="8366760" y="2788920"/>
+            <a:ext cx="2834640" cy="685800"/>
+          </a:xfrm>
+          <a:prstGeom prst="rect">
+            <a:avLst/>
+          </a:prstGeom>
+          <a:noFill/>
+          <a:ln/>
+        </p:spPr>
+        <p:txBody>
+          <a:bodyPr wrap="square" lIns="0" tIns="0" rIns="0" bIns="0" rtlCol="0" anchor="ctr"/>
+          <a:lstStyle/>
+          <a:p>
+            <a:pPr indent="0" marL="0">
+              <a:buNone/>
+            </a:pPr>
+            <a:r>
+              <a:rPr lang="en-US" sz="1700" b="1" dirty="0">
+                <a:solidFill>
                   <a:srgbClr val="161C28"/>
                 </a:solidFill>
                 <a:latin typeface="맑은 고딕" pitchFamily="34" charset="0"/>
                 <a:ea typeface="맑은 고딕" pitchFamily="34" charset="-122"/>
                 <a:cs typeface="맑은 고딕" pitchFamily="34" charset="-120"/>
               </a:rPr>
-              <a:t>여행·숙박 중소사업자</a:t>
-            </a:r>
-            <a:endParaRPr lang="en-US" sz="1500" dirty="0"/>
-          </a:p>
-        </p:txBody>
-      </p:sp>
-      <p:sp>
-        <p:nvSpPr>
-          <p:cNvPr id="11" name="Text 9"/>
-          <p:cNvSpPr txBox="1"/>
-          <p:nvPr/>
-        </p:nvSpPr>
-        <p:spPr>
-          <a:xfrm>
-            <a:off x="4434840" y="3401568"/>
-            <a:ext cx="6766560" cy="548640"/>
-          </a:xfrm>
-          <a:prstGeom prst="rect">
-            <a:avLst/>
-          </a:prstGeom>
-          <a:noFill/>
-          <a:ln/>
-        </p:spPr>
-        <p:txBody>
-          <a:bodyPr wrap="square" lIns="0" tIns="0" rIns="0" bIns="0" rtlCol="0" anchor="ctr"/>
-          <a:lstStyle/>
-          <a:p>
-            <a:pPr indent="0" marL="0">
-              <a:buNone/>
-            </a:pPr>
-            <a:r>
-              <a:rPr lang="en-US" sz="1250" dirty="0">
+              <a:t>제품이 이틀간 기동 불가</a:t>
+            </a:r>
+            <a:endParaRPr lang="en-US" sz="1700" dirty="0"/>
+          </a:p>
+        </p:txBody>
+      </p:sp>
+      <p:sp>
+        <p:nvSpPr>
+          <p:cNvPr id="15" name="Text 13"/>
+          <p:cNvSpPr txBox="1"/>
+          <p:nvPr/>
+        </p:nvSpPr>
+        <p:spPr>
+          <a:xfrm>
+            <a:off x="8366760" y="3566160"/>
+            <a:ext cx="2834640" cy="1234440"/>
+          </a:xfrm>
+          <a:prstGeom prst="rect">
+            <a:avLst/>
+          </a:prstGeom>
+          <a:noFill/>
+          <a:ln/>
+        </p:spPr>
+        <p:txBody>
+          <a:bodyPr wrap="square" lIns="0" tIns="0" rIns="0" bIns="0" rtlCol="0" anchor="ctr"/>
+          <a:lstStyle/>
+          <a:p>
+            <a:pPr indent="0" marL="0">
+              <a:buNone/>
+            </a:pPr>
+            <a:r>
+              <a:rPr lang="en-US" sz="1200" dirty="0">
                 <a:solidFill>
                   <a:srgbClr val="6B7488"/>
                 </a:solidFill>
@@ -4797,219 +6220,9 @@
                 <a:ea typeface="맑은 고딕" pitchFamily="34" charset="-122"/>
                 <a:cs typeface="맑은 고딕" pitchFamily="34" charset="-120"/>
               </a:rPr>
-              <a:t>현재 심층 조사 중. 취소·환불 규정이 법으로 정해져 있다</a:t>
-            </a:r>
-            <a:endParaRPr lang="en-US" sz="1250" dirty="0"/>
-          </a:p>
-        </p:txBody>
-      </p:sp>
-      <p:sp>
-        <p:nvSpPr>
-          <p:cNvPr id="12" name="Shape 10"/>
-          <p:cNvSpPr/>
-          <p:nvPr/>
-        </p:nvSpPr>
-        <p:spPr>
-          <a:xfrm>
-            <a:off x="685800" y="4206240"/>
-            <a:ext cx="10789920" cy="777240"/>
-          </a:xfrm>
-          <a:prstGeom prst="roundRect">
-            <a:avLst>
-              <a:gd name="adj" fmla="val 11765"/>
-            </a:avLst>
-          </a:prstGeom>
-          <a:solidFill>
-            <a:srgbClr val="F4F6FA"/>
-          </a:solidFill>
-          <a:ln w="12700">
-            <a:solidFill>
-              <a:srgbClr val="DBE0EA"/>
-            </a:solidFill>
-            <a:prstDash val="solid"/>
-          </a:ln>
-        </p:spPr>
-      </p:sp>
-      <p:sp>
-        <p:nvSpPr>
-          <p:cNvPr id="13" name="Text 11"/>
-          <p:cNvSpPr txBox="1"/>
-          <p:nvPr/>
-        </p:nvSpPr>
-        <p:spPr>
-          <a:xfrm>
-            <a:off x="1005840" y="4297680"/>
-            <a:ext cx="3291840" cy="365760"/>
-          </a:xfrm>
-          <a:prstGeom prst="rect">
-            <a:avLst/>
-          </a:prstGeom>
-          <a:noFill/>
-          <a:ln/>
-        </p:spPr>
-        <p:txBody>
-          <a:bodyPr wrap="square" lIns="0" tIns="0" rIns="0" bIns="0" rtlCol="0" anchor="ctr"/>
-          <a:lstStyle/>
-          <a:p>
-            <a:pPr indent="0" marL="0">
-              <a:buNone/>
-            </a:pPr>
-            <a:r>
-              <a:rPr lang="en-US" sz="1500" b="1" dirty="0">
-                <a:solidFill>
-                  <a:srgbClr val="161C28"/>
-                </a:solidFill>
-                <a:latin typeface="맑은 고딕" pitchFamily="34" charset="0"/>
-                <a:ea typeface="맑은 고딕" pitchFamily="34" charset="-122"/>
-                <a:cs typeface="맑은 고딕" pitchFamily="34" charset="-120"/>
-              </a:rPr>
-              <a:t>상담사 훈련 시뮬레이터</a:t>
-            </a:r>
-            <a:endParaRPr lang="en-US" sz="1500" dirty="0"/>
-          </a:p>
-        </p:txBody>
-      </p:sp>
-      <p:sp>
-        <p:nvSpPr>
-          <p:cNvPr id="14" name="Text 12"/>
-          <p:cNvSpPr txBox="1"/>
-          <p:nvPr/>
-        </p:nvSpPr>
-        <p:spPr>
-          <a:xfrm>
-            <a:off x="4434840" y="4315968"/>
-            <a:ext cx="6766560" cy="548640"/>
-          </a:xfrm>
-          <a:prstGeom prst="rect">
-            <a:avLst/>
-          </a:prstGeom>
-          <a:noFill/>
-          <a:ln/>
-        </p:spPr>
-        <p:txBody>
-          <a:bodyPr wrap="square" lIns="0" tIns="0" rIns="0" bIns="0" rtlCol="0" anchor="ctr"/>
-          <a:lstStyle/>
-          <a:p>
-            <a:pPr indent="0" marL="0">
-              <a:buNone/>
-            </a:pPr>
-            <a:r>
-              <a:rPr lang="en-US" sz="1250" dirty="0">
-                <a:solidFill>
-                  <a:srgbClr val="6B7488"/>
-                </a:solidFill>
-                <a:latin typeface="맑은 고딕" pitchFamily="34" charset="0"/>
-                <a:ea typeface="맑은 고딕" pitchFamily="34" charset="-122"/>
-                <a:cs typeface="맑은 고딕" pitchFamily="34" charset="-120"/>
-              </a:rPr>
-              <a:t>CS 를 응대가 아니라 훈련으로 뒤집어 본 안</a:t>
-            </a:r>
-            <a:endParaRPr lang="en-US" sz="1250" dirty="0"/>
-          </a:p>
-        </p:txBody>
-      </p:sp>
-      <p:sp>
-        <p:nvSpPr>
-          <p:cNvPr id="15" name="Shape 13"/>
-          <p:cNvSpPr/>
-          <p:nvPr/>
-        </p:nvSpPr>
-        <p:spPr>
-          <a:xfrm>
-            <a:off x="685800" y="5120640"/>
-            <a:ext cx="10789920" cy="777240"/>
-          </a:xfrm>
-          <a:prstGeom prst="roundRect">
-            <a:avLst>
-              <a:gd name="adj" fmla="val 11765"/>
-            </a:avLst>
-          </a:prstGeom>
-          <a:solidFill>
-            <a:srgbClr val="F4F6FA"/>
-          </a:solidFill>
-          <a:ln w="12700">
-            <a:solidFill>
-              <a:srgbClr val="DBE0EA"/>
-            </a:solidFill>
-            <a:prstDash val="solid"/>
-          </a:ln>
-        </p:spPr>
-      </p:sp>
-      <p:sp>
-        <p:nvSpPr>
-          <p:cNvPr id="16" name="Text 14"/>
-          <p:cNvSpPr txBox="1"/>
-          <p:nvPr/>
-        </p:nvSpPr>
-        <p:spPr>
-          <a:xfrm>
-            <a:off x="1005840" y="5212080"/>
-            <a:ext cx="3291840" cy="365760"/>
-          </a:xfrm>
-          <a:prstGeom prst="rect">
-            <a:avLst/>
-          </a:prstGeom>
-          <a:noFill/>
-          <a:ln/>
-        </p:spPr>
-        <p:txBody>
-          <a:bodyPr wrap="square" lIns="0" tIns="0" rIns="0" bIns="0" rtlCol="0" anchor="ctr"/>
-          <a:lstStyle/>
-          <a:p>
-            <a:pPr indent="0" marL="0">
-              <a:buNone/>
-            </a:pPr>
-            <a:r>
-              <a:rPr lang="en-US" sz="1500" b="1" dirty="0">
-                <a:solidFill>
-                  <a:srgbClr val="161C28"/>
-                </a:solidFill>
-                <a:latin typeface="맑은 고딕" pitchFamily="34" charset="0"/>
-                <a:ea typeface="맑은 고딕" pitchFamily="34" charset="-122"/>
-                <a:cs typeface="맑은 고딕" pitchFamily="34" charset="-120"/>
-              </a:rPr>
-              <a:t>소상공인 일반</a:t>
-            </a:r>
-            <a:endParaRPr lang="en-US" sz="1500" dirty="0"/>
-          </a:p>
-        </p:txBody>
-      </p:sp>
-      <p:sp>
-        <p:nvSpPr>
-          <p:cNvPr id="17" name="Text 15"/>
-          <p:cNvSpPr txBox="1"/>
-          <p:nvPr/>
-        </p:nvSpPr>
-        <p:spPr>
-          <a:xfrm>
-            <a:off x="4434840" y="5230368"/>
-            <a:ext cx="6766560" cy="548640"/>
-          </a:xfrm>
-          <a:prstGeom prst="rect">
-            <a:avLst/>
-          </a:prstGeom>
-          <a:noFill/>
-          <a:ln/>
-        </p:spPr>
-        <p:txBody>
-          <a:bodyPr wrap="square" lIns="0" tIns="0" rIns="0" bIns="0" rtlCol="0" anchor="ctr"/>
-          <a:lstStyle/>
-          <a:p>
-            <a:pPr indent="0" marL="0">
-              <a:buNone/>
-            </a:pPr>
-            <a:r>
-              <a:rPr lang="en-US" sz="1250" dirty="0">
-                <a:solidFill>
-                  <a:srgbClr val="6B7488"/>
-                </a:solidFill>
-                <a:latin typeface="맑은 고딕" pitchFamily="34" charset="0"/>
-                <a:ea typeface="맑은 고딕" pitchFamily="34" charset="-122"/>
-                <a:cs typeface="맑은 고딕" pitchFamily="34" charset="-120"/>
-              </a:rPr>
-              <a:t>정부 AI 바우처 지원이 있다. 김지혜 조사</a:t>
-            </a:r>
-            <a:endParaRPr lang="en-US" sz="1250" dirty="0"/>
+              <a:t>개정이 한 절에만 반영돼 코드가 낡은 쪽을 따랐다</a:t>
+            </a:r>
+            <a:endParaRPr lang="en-US" sz="1200" dirty="0"/>
           </a:p>
         </p:txBody>
       </p:sp>
@@ -5024,6 +6237,13 @@
 <file path=ppt/slides/slide8.xml><?xml version="1.0" encoding="utf-8"?>
 <p:sld xmlns:a="http://schemas.openxmlformats.org/drawingml/2006/main" xmlns:r="http://schemas.openxmlformats.org/officeDocument/2006/relationships" xmlns:p="http://schemas.openxmlformats.org/presentationml/2006/main">
   <p:cSld name="Slide 8">
+    <p:bg>
+      <p:bgPr>
+        <a:solidFill>
+          <a:srgbClr val="161C28"/>
+        </a:solidFill>
+      </p:bgPr>
+    </p:bg>
     <p:spTree>
       <p:nvGrpSpPr>
         <p:cNvPr id="1" name=""/>
@@ -5046,98 +6266,59 @@
         </p:nvSpPr>
         <p:spPr>
           <a:xfrm>
-            <a:off x="685800" y="566928"/>
-            <a:ext cx="10789920" cy="914400"/>
-          </a:xfrm>
-          <a:prstGeom prst="rect">
-            <a:avLst/>
-          </a:prstGeom>
-          <a:noFill/>
-          <a:ln/>
-        </p:spPr>
-        <p:txBody>
-          <a:bodyPr wrap="square" lIns="0" tIns="0" rIns="0" bIns="0" rtlCol="0" anchor="ctr"/>
-          <a:lstStyle/>
-          <a:p>
-            <a:pPr indent="0" marL="0">
-              <a:buNone/>
-            </a:pPr>
-            <a:r>
-              <a:rPr lang="en-US" sz="3000" b="1" dirty="0">
-                <a:solidFill>
-                  <a:srgbClr val="161C28"/>
-                </a:solidFill>
-                <a:latin typeface="맑은 고딕" pitchFamily="34" charset="0"/>
-                <a:ea typeface="맑은 고딕" pitchFamily="34" charset="-122"/>
-                <a:cs typeface="맑은 고딕" pitchFamily="34" charset="-120"/>
-              </a:rPr>
-              <a:t>실패한 건 그대로 남겼다</a:t>
-            </a:r>
-            <a:endParaRPr lang="en-US" sz="3000" dirty="0"/>
-          </a:p>
-        </p:txBody>
-      </p:sp>
-      <p:sp>
-        <p:nvSpPr>
-          <p:cNvPr id="3" name="Text 1"/>
-          <p:cNvSpPr txBox="1"/>
-          <p:nvPr/>
-        </p:nvSpPr>
-        <p:spPr>
-          <a:xfrm>
-            <a:off x="685800" y="1481328"/>
-            <a:ext cx="10789920" cy="411480"/>
-          </a:xfrm>
-          <a:prstGeom prst="rect">
-            <a:avLst/>
-          </a:prstGeom>
-          <a:noFill/>
-          <a:ln/>
-        </p:spPr>
-        <p:txBody>
-          <a:bodyPr wrap="square" lIns="0" tIns="0" rIns="0" bIns="0" rtlCol="0" anchor="ctr"/>
-          <a:lstStyle/>
-          <a:p>
-            <a:pPr indent="0" marL="0">
-              <a:buNone/>
-            </a:pPr>
-            <a:r>
-              <a:rPr lang="en-US" sz="1400" dirty="0">
-                <a:solidFill>
-                  <a:srgbClr val="6B7488"/>
-                </a:solidFill>
-                <a:latin typeface="맑은 고딕" pitchFamily="34" charset="0"/>
-                <a:ea typeface="맑은 고딕" pitchFamily="34" charset="-122"/>
-                <a:cs typeface="맑은 고딕" pitchFamily="34" charset="-120"/>
-              </a:rPr>
-              <a:t>되살리지 않고 왜 안 됐는지를 기록으로 뒀다.</a:t>
-            </a:r>
-            <a:endParaRPr lang="en-US" sz="1400" dirty="0"/>
-          </a:p>
-        </p:txBody>
-      </p:sp>
-      <p:sp>
-        <p:nvSpPr>
-          <p:cNvPr id="4" name="Shape 2"/>
+            <a:off x="685800" y="960120"/>
+            <a:ext cx="10515600" cy="822960"/>
+          </a:xfrm>
+          <a:prstGeom prst="rect">
+            <a:avLst/>
+          </a:prstGeom>
+          <a:noFill/>
+          <a:ln/>
+        </p:spPr>
+        <p:txBody>
+          <a:bodyPr wrap="square" lIns="0" tIns="0" rIns="0" bIns="0" rtlCol="0" anchor="ctr"/>
+          <a:lstStyle/>
+          <a:p>
+            <a:pPr indent="0" marL="0">
+              <a:buNone/>
+            </a:pPr>
+            <a:r>
+              <a:rPr lang="en-US" sz="3600" b="1" dirty="0">
+                <a:solidFill>
+                  <a:srgbClr val="FFFFFF"/>
+                </a:solidFill>
+                <a:latin typeface="맑은 고딕" pitchFamily="34" charset="0"/>
+                <a:ea typeface="맑은 고딕" pitchFamily="34" charset="-122"/>
+                <a:cs typeface="맑은 고딕" pitchFamily="34" charset="-120"/>
+              </a:rPr>
+              <a:t>그런데 같은 지적을 두 번 받았다</a:t>
+            </a:r>
+            <a:endParaRPr lang="en-US" sz="3600" dirty="0"/>
+          </a:p>
+        </p:txBody>
+      </p:sp>
+      <p:sp>
+        <p:nvSpPr>
+          <p:cNvPr id="3" name="Shape 1"/>
           <p:cNvSpPr/>
           <p:nvPr/>
         </p:nvSpPr>
         <p:spPr>
           <a:xfrm>
-            <a:off x="685800" y="2103120"/>
-            <a:ext cx="3383280" cy="2926080"/>
+            <a:off x="685800" y="2148840"/>
+            <a:ext cx="10789920" cy="1463040"/>
           </a:xfrm>
           <a:prstGeom prst="roundRect">
             <a:avLst>
-              <a:gd name="adj" fmla="val 3125"/>
+              <a:gd name="adj" fmla="val 6250"/>
             </a:avLst>
           </a:prstGeom>
           <a:solidFill>
-            <a:srgbClr val="FBF3E3"/>
+            <a:srgbClr val="222834"/>
           </a:solidFill>
           <a:ln w="12700">
             <a:solidFill>
-              <a:srgbClr val="E8D9B5"/>
+              <a:srgbClr val="39404E"/>
             </a:solidFill>
             <a:prstDash val="solid"/>
           </a:ln>
@@ -5145,143 +6326,127 @@
       </p:sp>
       <p:sp>
         <p:nvSpPr>
+          <p:cNvPr id="4" name="Text 2"/>
+          <p:cNvSpPr txBox="1"/>
+          <p:nvPr/>
+        </p:nvSpPr>
+        <p:spPr>
+          <a:xfrm>
+            <a:off x="1051560" y="2350008"/>
+            <a:ext cx="2743200" cy="320040"/>
+          </a:xfrm>
+          <a:prstGeom prst="rect">
+            <a:avLst/>
+          </a:prstGeom>
+          <a:noFill/>
+          <a:ln/>
+        </p:spPr>
+        <p:txBody>
+          <a:bodyPr wrap="square" lIns="0" tIns="0" rIns="0" bIns="0" rtlCol="0" anchor="ctr"/>
+          <a:lstStyle/>
+          <a:p>
+            <a:pPr indent="0" marL="0">
+              <a:buNone/>
+            </a:pPr>
+            <a:r>
+              <a:rPr lang="en-US" sz="1200" b="1" dirty="0">
+                <a:solidFill>
+                  <a:srgbClr val="A8720C"/>
+                </a:solidFill>
+                <a:latin typeface="맑은 고딕" pitchFamily="34" charset="0"/>
+                <a:ea typeface="맑은 고딕" pitchFamily="34" charset="-122"/>
+                <a:cs typeface="맑은 고딕" pitchFamily="34" charset="-120"/>
+              </a:rPr>
+              <a:t>강사 · 08.28</a:t>
+            </a:r>
+            <a:endParaRPr lang="en-US" sz="1200" dirty="0"/>
+          </a:p>
+        </p:txBody>
+      </p:sp>
+      <p:sp>
+        <p:nvSpPr>
           <p:cNvPr id="5" name="Text 3"/>
           <p:cNvSpPr txBox="1"/>
           <p:nvPr/>
         </p:nvSpPr>
         <p:spPr>
           <a:xfrm>
-            <a:off x="960120" y="2331720"/>
-            <a:ext cx="2834640" cy="365760"/>
-          </a:xfrm>
-          <a:prstGeom prst="rect">
-            <a:avLst/>
-          </a:prstGeom>
-          <a:noFill/>
-          <a:ln/>
-        </p:spPr>
-        <p:txBody>
-          <a:bodyPr wrap="square" lIns="0" tIns="0" rIns="0" bIns="0" rtlCol="0" anchor="ctr"/>
-          <a:lstStyle/>
-          <a:p>
-            <a:pPr indent="0" marL="0">
-              <a:buNone/>
-            </a:pPr>
-            <a:r>
-              <a:rPr lang="en-US" sz="1500" b="1" dirty="0">
-                <a:solidFill>
-                  <a:srgbClr val="A8720C"/>
-                </a:solidFill>
-                <a:latin typeface="맑은 고딕" pitchFamily="34" charset="0"/>
-                <a:ea typeface="맑은 고딕" pitchFamily="34" charset="-122"/>
-                <a:cs typeface="맑은 고딕" pitchFamily="34" charset="-120"/>
-              </a:rPr>
-              <a:t>파인튜닝</a:t>
+            <a:off x="1051560" y="2697480"/>
+            <a:ext cx="10058400" cy="777240"/>
+          </a:xfrm>
+          <a:prstGeom prst="rect">
+            <a:avLst/>
+          </a:prstGeom>
+          <a:noFill/>
+          <a:ln/>
+        </p:spPr>
+        <p:txBody>
+          <a:bodyPr wrap="square" lIns="0" tIns="0" rIns="0" bIns="0" rtlCol="0" anchor="ctr"/>
+          <a:lstStyle/>
+          <a:p>
+            <a:pPr indent="0" marL="0">
+              <a:lnSpc>
+                <a:spcPts val="2400"/>
+              </a:lnSpc>
+              <a:buNone/>
+            </a:pPr>
+            <a:r>
+              <a:rPr lang="en-US" sz="1500" dirty="0">
+                <a:solidFill>
+                  <a:srgbClr val="DCE2ED"/>
+                </a:solidFill>
+                <a:latin typeface="맑은 고딕" pitchFamily="34" charset="0"/>
+                <a:ea typeface="맑은 고딕" pitchFamily="34" charset="-122"/>
+                <a:cs typeface="맑은 고딕" pitchFamily="34" charset="-120"/>
+              </a:rPr>
+              <a:t>"표준과 기술을 많이 사용하는 것이 프로젝트 목표가 되어서는 안 된다.</a:t>
             </a:r>
             <a:endParaRPr lang="en-US" sz="1500" dirty="0"/>
           </a:p>
-        </p:txBody>
-      </p:sp>
-      <p:sp>
-        <p:nvSpPr>
-          <p:cNvPr id="6" name="Text 4"/>
-          <p:cNvSpPr txBox="1"/>
-          <p:nvPr/>
-        </p:nvSpPr>
-        <p:spPr>
-          <a:xfrm>
-            <a:off x="960120" y="2788920"/>
-            <a:ext cx="2834640" cy="685800"/>
-          </a:xfrm>
-          <a:prstGeom prst="rect">
-            <a:avLst/>
-          </a:prstGeom>
-          <a:noFill/>
-          <a:ln/>
-        </p:spPr>
-        <p:txBody>
-          <a:bodyPr wrap="square" lIns="0" tIns="0" rIns="0" bIns="0" rtlCol="0" anchor="ctr"/>
-          <a:lstStyle/>
-          <a:p>
-            <a:pPr indent="0" marL="0">
-              <a:buNone/>
-            </a:pPr>
-            <a:r>
-              <a:rPr lang="en-US" sz="1700" b="1" dirty="0">
-                <a:solidFill>
-                  <a:srgbClr val="161C28"/>
-                </a:solidFill>
-                <a:latin typeface="맑은 고딕" pitchFamily="34" charset="0"/>
-                <a:ea typeface="맑은 고딕" pitchFamily="34" charset="-122"/>
-                <a:cs typeface="맑은 고딕" pitchFamily="34" charset="-120"/>
-              </a:rPr>
-              <a:t>stage3 v1~v7 전부 채택 불가</a:t>
-            </a:r>
-            <a:endParaRPr lang="en-US" sz="1700" dirty="0"/>
-          </a:p>
-        </p:txBody>
-      </p:sp>
-      <p:sp>
-        <p:nvSpPr>
-          <p:cNvPr id="7" name="Text 5"/>
-          <p:cNvSpPr txBox="1"/>
-          <p:nvPr/>
-        </p:nvSpPr>
-        <p:spPr>
-          <a:xfrm>
-            <a:off x="960120" y="3566160"/>
-            <a:ext cx="2834640" cy="1234440"/>
-          </a:xfrm>
-          <a:prstGeom prst="rect">
-            <a:avLst/>
-          </a:prstGeom>
-          <a:noFill/>
-          <a:ln/>
-        </p:spPr>
-        <p:txBody>
-          <a:bodyPr wrap="square" lIns="0" tIns="0" rIns="0" bIns="0" rtlCol="0" anchor="ctr"/>
-          <a:lstStyle/>
-          <a:p>
-            <a:pPr indent="0" marL="0">
-              <a:buNone/>
-            </a:pPr>
-            <a:r>
-              <a:rPr lang="en-US" sz="1200" dirty="0">
-                <a:solidFill>
-                  <a:srgbClr val="6B7488"/>
-                </a:solidFill>
-                <a:latin typeface="맑은 고딕" pitchFamily="34" charset="0"/>
-                <a:ea typeface="맑은 고딕" pitchFamily="34" charset="-122"/>
-                <a:cs typeface="맑은 고딕" pitchFamily="34" charset="-120"/>
-              </a:rPr>
-              <a:t>모델이 근거를 그대로 베껴 쓰는 법을 배웠다</a:t>
-            </a:r>
-            <a:endParaRPr lang="en-US" sz="1200" dirty="0"/>
-          </a:p>
-        </p:txBody>
-      </p:sp>
-      <p:sp>
-        <p:nvSpPr>
-          <p:cNvPr id="8" name="Shape 6"/>
+          <a:p>
+            <a:pPr indent="0" marL="0">
+              <a:lnSpc>
+                <a:spcPts val="2400"/>
+              </a:lnSpc>
+              <a:buNone/>
+            </a:pPr>
+            <a:r>
+              <a:rPr lang="en-US" sz="1500" dirty="0">
+                <a:solidFill>
+                  <a:srgbClr val="DCE2ED"/>
+                </a:solidFill>
+                <a:latin typeface="맑은 고딕" pitchFamily="34" charset="0"/>
+                <a:ea typeface="맑은 고딕" pitchFamily="34" charset="-122"/>
+                <a:cs typeface="맑은 고딕" pitchFamily="34" charset="-120"/>
+              </a:rPr>
+              <a:t>핵심은 Case lifecycle 이 실제로 동작하는 것이다."</a:t>
+            </a:r>
+            <a:endParaRPr lang="en-US" sz="1500" dirty="0"/>
+          </a:p>
+        </p:txBody>
+      </p:sp>
+      <p:sp>
+        <p:nvSpPr>
+          <p:cNvPr id="6" name="Shape 4"/>
           <p:cNvSpPr/>
           <p:nvPr/>
         </p:nvSpPr>
         <p:spPr>
           <a:xfrm>
-            <a:off x="4389120" y="2103120"/>
-            <a:ext cx="3383280" cy="2926080"/>
+            <a:off x="685800" y="3840480"/>
+            <a:ext cx="10789920" cy="1463040"/>
           </a:xfrm>
           <a:prstGeom prst="roundRect">
             <a:avLst>
-              <a:gd name="adj" fmla="val 3125"/>
+              <a:gd name="adj" fmla="val 6250"/>
             </a:avLst>
           </a:prstGeom>
           <a:solidFill>
-            <a:srgbClr val="FBF3E3"/>
+            <a:srgbClr val="222834"/>
           </a:solidFill>
           <a:ln w="12700">
             <a:solidFill>
-              <a:srgbClr val="E8D9B5"/>
+              <a:srgbClr val="39404E"/>
             </a:solidFill>
             <a:prstDash val="solid"/>
           </a:ln>
@@ -5289,262 +6454,141 @@
       </p:sp>
       <p:sp>
         <p:nvSpPr>
+          <p:cNvPr id="7" name="Text 5"/>
+          <p:cNvSpPr txBox="1"/>
+          <p:nvPr/>
+        </p:nvSpPr>
+        <p:spPr>
+          <a:xfrm>
+            <a:off x="1051560" y="4041648"/>
+            <a:ext cx="2743200" cy="320040"/>
+          </a:xfrm>
+          <a:prstGeom prst="rect">
+            <a:avLst/>
+          </a:prstGeom>
+          <a:noFill/>
+          <a:ln/>
+        </p:spPr>
+        <p:txBody>
+          <a:bodyPr wrap="square" lIns="0" tIns="0" rIns="0" bIns="0" rtlCol="0" anchor="ctr"/>
+          <a:lstStyle/>
+          <a:p>
+            <a:pPr indent="0" marL="0">
+              <a:buNone/>
+            </a:pPr>
+            <a:r>
+              <a:rPr lang="en-US" sz="1200" b="1" dirty="0">
+                <a:solidFill>
+                  <a:srgbClr val="A8720C"/>
+                </a:solidFill>
+                <a:latin typeface="맑은 고딕" pitchFamily="34" charset="0"/>
+                <a:ea typeface="맑은 고딕" pitchFamily="34" charset="-122"/>
+                <a:cs typeface="맑은 고딕" pitchFamily="34" charset="-120"/>
+              </a:rPr>
+              <a:t>멘토 · 09.01</a:t>
+            </a:r>
+            <a:endParaRPr lang="en-US" sz="1200" dirty="0"/>
+          </a:p>
+        </p:txBody>
+      </p:sp>
+      <p:sp>
+        <p:nvSpPr>
+          <p:cNvPr id="8" name="Text 6"/>
+          <p:cNvSpPr txBox="1"/>
+          <p:nvPr/>
+        </p:nvSpPr>
+        <p:spPr>
+          <a:xfrm>
+            <a:off x="1051560" y="4389120"/>
+            <a:ext cx="10058400" cy="777240"/>
+          </a:xfrm>
+          <a:prstGeom prst="rect">
+            <a:avLst/>
+          </a:prstGeom>
+          <a:noFill/>
+          <a:ln/>
+        </p:spPr>
+        <p:txBody>
+          <a:bodyPr wrap="square" lIns="0" tIns="0" rIns="0" bIns="0" rtlCol="0" anchor="ctr"/>
+          <a:lstStyle/>
+          <a:p>
+            <a:pPr indent="0" marL="0">
+              <a:lnSpc>
+                <a:spcPts val="2400"/>
+              </a:lnSpc>
+              <a:buNone/>
+            </a:pPr>
+            <a:r>
+              <a:rPr lang="en-US" sz="1500" dirty="0">
+                <a:solidFill>
+                  <a:srgbClr val="DCE2ED"/>
+                </a:solidFill>
+                <a:latin typeface="맑은 고딕" pitchFamily="34" charset="0"/>
+                <a:ea typeface="맑은 고딕" pitchFamily="34" charset="-122"/>
+                <a:cs typeface="맑은 고딕" pitchFamily="34" charset="-120"/>
+              </a:rPr>
+              <a:t>"기술 구현보다 프로젝트 가치 증명이 핵심이다.</a:t>
+            </a:r>
+            <a:endParaRPr lang="en-US" sz="1500" dirty="0"/>
+          </a:p>
+          <a:p>
+            <a:pPr indent="0" marL="0">
+              <a:lnSpc>
+                <a:spcPts val="2400"/>
+              </a:lnSpc>
+              <a:buNone/>
+            </a:pPr>
+            <a:r>
+              <a:rPr lang="en-US" sz="1500" dirty="0">
+                <a:solidFill>
+                  <a:srgbClr val="DCE2ED"/>
+                </a:solidFill>
+                <a:latin typeface="맑은 고딕" pitchFamily="34" charset="0"/>
+                <a:ea typeface="맑은 고딕" pitchFamily="34" charset="-122"/>
+                <a:cs typeface="맑은 고딕" pitchFamily="34" charset="-120"/>
+              </a:rPr>
+              <a:t>실사용자인가 모의 사용자인가?"</a:t>
+            </a:r>
+            <a:endParaRPr lang="en-US" sz="1500" dirty="0"/>
+          </a:p>
+        </p:txBody>
+      </p:sp>
+      <p:sp>
+        <p:nvSpPr>
           <p:cNvPr id="9" name="Text 7"/>
           <p:cNvSpPr txBox="1"/>
           <p:nvPr/>
         </p:nvSpPr>
         <p:spPr>
           <a:xfrm>
-            <a:off x="4663440" y="2331720"/>
-            <a:ext cx="2834640" cy="365760"/>
-          </a:xfrm>
-          <a:prstGeom prst="rect">
-            <a:avLst/>
-          </a:prstGeom>
-          <a:noFill/>
-          <a:ln/>
-        </p:spPr>
-        <p:txBody>
-          <a:bodyPr wrap="square" lIns="0" tIns="0" rIns="0" bIns="0" rtlCol="0" anchor="ctr"/>
-          <a:lstStyle/>
-          <a:p>
-            <a:pPr indent="0" marL="0">
-              <a:buNone/>
-            </a:pPr>
-            <a:r>
-              <a:rPr lang="en-US" sz="1500" b="1" dirty="0">
-                <a:solidFill>
-                  <a:srgbClr val="A8720C"/>
-                </a:solidFill>
-                <a:latin typeface="맑은 고딕" pitchFamily="34" charset="0"/>
-                <a:ea typeface="맑은 고딕" pitchFamily="34" charset="-122"/>
-                <a:cs typeface="맑은 고딕" pitchFamily="34" charset="-120"/>
-              </a:rPr>
-              <a:t>12GB 벽</a:t>
-            </a:r>
-            <a:endParaRPr lang="en-US" sz="1500" dirty="0"/>
-          </a:p>
-        </p:txBody>
-      </p:sp>
-      <p:sp>
-        <p:nvSpPr>
-          <p:cNvPr id="10" name="Text 8"/>
-          <p:cNvSpPr txBox="1"/>
-          <p:nvPr/>
-        </p:nvSpPr>
-        <p:spPr>
-          <a:xfrm>
-            <a:off x="4663440" y="2788920"/>
-            <a:ext cx="2834640" cy="685800"/>
-          </a:xfrm>
-          <a:prstGeom prst="rect">
-            <a:avLst/>
-          </a:prstGeom>
-          <a:noFill/>
-          <a:ln/>
-        </p:spPr>
-        <p:txBody>
-          <a:bodyPr wrap="square" lIns="0" tIns="0" rIns="0" bIns="0" rtlCol="0" anchor="ctr"/>
-          <a:lstStyle/>
-          <a:p>
-            <a:pPr indent="0" marL="0">
-              <a:buNone/>
-            </a:pPr>
-            <a:r>
-              <a:rPr lang="en-US" sz="1700" b="1" dirty="0">
-                <a:solidFill>
-                  <a:srgbClr val="161C28"/>
-                </a:solidFill>
-                <a:latin typeface="맑은 고딕" pitchFamily="34" charset="0"/>
-                <a:ea typeface="맑은 고딕" pitchFamily="34" charset="-122"/>
-                <a:cs typeface="맑은 고딕" pitchFamily="34" charset="-120"/>
-              </a:rPr>
-              <a:t>10,670 → 1,024 토큰</a:t>
-            </a:r>
-            <a:endParaRPr lang="en-US" sz="1700" dirty="0"/>
-          </a:p>
-        </p:txBody>
-      </p:sp>
-      <p:sp>
-        <p:nvSpPr>
-          <p:cNvPr id="11" name="Text 9"/>
-          <p:cNvSpPr txBox="1"/>
-          <p:nvPr/>
-        </p:nvSpPr>
-        <p:spPr>
-          <a:xfrm>
-            <a:off x="4663440" y="3566160"/>
-            <a:ext cx="2834640" cy="1234440"/>
-          </a:xfrm>
-          <a:prstGeom prst="rect">
-            <a:avLst/>
-          </a:prstGeom>
-          <a:noFill/>
-          <a:ln/>
-        </p:spPr>
-        <p:txBody>
-          <a:bodyPr wrap="square" lIns="0" tIns="0" rIns="0" bIns="0" rtlCol="0" anchor="ctr"/>
-          <a:lstStyle/>
-          <a:p>
-            <a:pPr indent="0" marL="0">
-              <a:buNone/>
-            </a:pPr>
-            <a:r>
-              <a:rPr lang="en-US" sz="1200" dirty="0">
-                <a:solidFill>
-                  <a:srgbClr val="6B7488"/>
-                </a:solidFill>
-                <a:latin typeface="맑은 고딕" pitchFamily="34" charset="0"/>
-                <a:ea typeface="맑은 고딕" pitchFamily="34" charset="-122"/>
-                <a:cs typeface="맑은 고딕" pitchFamily="34" charset="-120"/>
-              </a:rPr>
-              <a:t>팀 최고 사양이 4070 SUPER 12GB. 입력을 10분의 1로 깎아야 돌았다</a:t>
-            </a:r>
-            <a:endParaRPr lang="en-US" sz="1200" dirty="0"/>
-          </a:p>
-        </p:txBody>
-      </p:sp>
-      <p:sp>
-        <p:nvSpPr>
-          <p:cNvPr id="12" name="Shape 10"/>
-          <p:cNvSpPr/>
-          <p:nvPr/>
-        </p:nvSpPr>
-        <p:spPr>
-          <a:xfrm>
-            <a:off x="8092440" y="2103120"/>
-            <a:ext cx="3383280" cy="2926080"/>
-          </a:xfrm>
-          <a:prstGeom prst="roundRect">
-            <a:avLst>
-              <a:gd name="adj" fmla="val 3125"/>
-            </a:avLst>
-          </a:prstGeom>
-          <a:solidFill>
-            <a:srgbClr val="FBF3E3"/>
-          </a:solidFill>
-          <a:ln w="12700">
-            <a:solidFill>
-              <a:srgbClr val="E8D9B5"/>
-            </a:solidFill>
-            <a:prstDash val="solid"/>
-          </a:ln>
-        </p:spPr>
-      </p:sp>
-      <p:sp>
-        <p:nvSpPr>
-          <p:cNvPr id="13" name="Text 11"/>
-          <p:cNvSpPr txBox="1"/>
-          <p:nvPr/>
-        </p:nvSpPr>
-        <p:spPr>
-          <a:xfrm>
-            <a:off x="8366760" y="2331720"/>
-            <a:ext cx="2834640" cy="365760"/>
-          </a:xfrm>
-          <a:prstGeom prst="rect">
-            <a:avLst/>
-          </a:prstGeom>
-          <a:noFill/>
-          <a:ln/>
-        </p:spPr>
-        <p:txBody>
-          <a:bodyPr wrap="square" lIns="0" tIns="0" rIns="0" bIns="0" rtlCol="0" anchor="ctr"/>
-          <a:lstStyle/>
-          <a:p>
-            <a:pPr indent="0" marL="0">
-              <a:buNone/>
-            </a:pPr>
-            <a:r>
-              <a:rPr lang="en-US" sz="1500" b="1" dirty="0">
-                <a:solidFill>
-                  <a:srgbClr val="A8720C"/>
-                </a:solidFill>
-                <a:latin typeface="맑은 고딕" pitchFamily="34" charset="0"/>
-                <a:ea typeface="맑은 고딕" pitchFamily="34" charset="-122"/>
-                <a:cs typeface="맑은 고딕" pitchFamily="34" charset="-120"/>
-              </a:rPr>
-              <a:t>문서 드리프트</a:t>
-            </a:r>
-            <a:endParaRPr lang="en-US" sz="1500" dirty="0"/>
-          </a:p>
-        </p:txBody>
-      </p:sp>
-      <p:sp>
-        <p:nvSpPr>
-          <p:cNvPr id="14" name="Text 12"/>
-          <p:cNvSpPr txBox="1"/>
-          <p:nvPr/>
-        </p:nvSpPr>
-        <p:spPr>
-          <a:xfrm>
-            <a:off x="8366760" y="2788920"/>
-            <a:ext cx="2834640" cy="685800"/>
-          </a:xfrm>
-          <a:prstGeom prst="rect">
-            <a:avLst/>
-          </a:prstGeom>
-          <a:noFill/>
-          <a:ln/>
-        </p:spPr>
-        <p:txBody>
-          <a:bodyPr wrap="square" lIns="0" tIns="0" rIns="0" bIns="0" rtlCol="0" anchor="ctr"/>
-          <a:lstStyle/>
-          <a:p>
-            <a:pPr indent="0" marL="0">
-              <a:buNone/>
-            </a:pPr>
-            <a:r>
-              <a:rPr lang="en-US" sz="1700" b="1" dirty="0">
-                <a:solidFill>
-                  <a:srgbClr val="161C28"/>
-                </a:solidFill>
-                <a:latin typeface="맑은 고딕" pitchFamily="34" charset="0"/>
-                <a:ea typeface="맑은 고딕" pitchFamily="34" charset="-122"/>
-                <a:cs typeface="맑은 고딕" pitchFamily="34" charset="-120"/>
-              </a:rPr>
-              <a:t>제품이 이틀간 기동 불가</a:t>
-            </a:r>
-            <a:endParaRPr lang="en-US" sz="1700" dirty="0"/>
-          </a:p>
-        </p:txBody>
-      </p:sp>
-      <p:sp>
-        <p:nvSpPr>
-          <p:cNvPr id="15" name="Text 13"/>
-          <p:cNvSpPr txBox="1"/>
-          <p:nvPr/>
-        </p:nvSpPr>
-        <p:spPr>
-          <a:xfrm>
-            <a:off x="8366760" y="3566160"/>
-            <a:ext cx="2834640" cy="1234440"/>
-          </a:xfrm>
-          <a:prstGeom prst="rect">
-            <a:avLst/>
-          </a:prstGeom>
-          <a:noFill/>
-          <a:ln/>
-        </p:spPr>
-        <p:txBody>
-          <a:bodyPr wrap="square" lIns="0" tIns="0" rIns="0" bIns="0" rtlCol="0" anchor="ctr"/>
-          <a:lstStyle/>
-          <a:p>
-            <a:pPr indent="0" marL="0">
-              <a:buNone/>
-            </a:pPr>
-            <a:r>
-              <a:rPr lang="en-US" sz="1200" dirty="0">
-                <a:solidFill>
-                  <a:srgbClr val="6B7488"/>
-                </a:solidFill>
-                <a:latin typeface="맑은 고딕" pitchFamily="34" charset="0"/>
-                <a:ea typeface="맑은 고딕" pitchFamily="34" charset="-122"/>
-                <a:cs typeface="맑은 고딕" pitchFamily="34" charset="-120"/>
-              </a:rPr>
-              <a:t>개정이 한 절에만 반영돼 코드가 낡은 쪽을 따랐다</a:t>
-            </a:r>
-            <a:endParaRPr lang="en-US" sz="1200" dirty="0"/>
+            <a:off x="685800" y="5715000"/>
+            <a:ext cx="10058400" cy="411480"/>
+          </a:xfrm>
+          <a:prstGeom prst="rect">
+            <a:avLst/>
+          </a:prstGeom>
+          <a:noFill/>
+          <a:ln/>
+        </p:spPr>
+        <p:txBody>
+          <a:bodyPr wrap="square" lIns="0" tIns="0" rIns="0" bIns="0" rtlCol="0" anchor="ctr"/>
+          <a:lstStyle/>
+          <a:p>
+            <a:pPr indent="0" marL="0">
+              <a:buNone/>
+            </a:pPr>
+            <a:r>
+              <a:rPr lang="en-US" sz="1400" dirty="0">
+                <a:solidFill>
+                  <a:srgbClr val="9AA3B4"/>
+                </a:solidFill>
+                <a:latin typeface="맑은 고딕" pitchFamily="34" charset="0"/>
+                <a:ea typeface="맑은 고딕" pitchFamily="34" charset="-122"/>
+                <a:cs typeface="맑은 고딕" pitchFamily="34" charset="-120"/>
+              </a:rPr>
+              <a:t>만드는 건 되는데, 누구에게 왜 값이 있는지를 못 대고 있었다.</a:t>
+            </a:r>
+            <a:endParaRPr lang="en-US" sz="1400" dirty="0"/>
           </a:p>
         </p:txBody>
       </p:sp>
@@ -5575,340 +6619,19 @@
       </p:grpSpPr>
       <p:sp>
         <p:nvSpPr>
-          <p:cNvPr id="2" name="Text 0"/>
-          <p:cNvSpPr txBox="1"/>
+          <p:cNvPr id="2" name="Shape 0"/>
+          <p:cNvSpPr/>
           <p:nvPr/>
         </p:nvSpPr>
         <p:spPr>
           <a:xfrm>
             <a:off x="685800" y="566928"/>
-            <a:ext cx="10789920" cy="914400"/>
-          </a:xfrm>
-          <a:prstGeom prst="rect">
-            <a:avLst/>
-          </a:prstGeom>
-          <a:noFill/>
-          <a:ln/>
-        </p:spPr>
-        <p:txBody>
-          <a:bodyPr wrap="square" lIns="0" tIns="0" rIns="0" bIns="0" rtlCol="0" anchor="ctr"/>
-          <a:lstStyle/>
-          <a:p>
-            <a:pPr indent="0" marL="0">
-              <a:buNone/>
-            </a:pPr>
-            <a:r>
-              <a:rPr lang="en-US" sz="3000" b="1" dirty="0">
-                <a:solidFill>
-                  <a:srgbClr val="161C28"/>
-                </a:solidFill>
-                <a:latin typeface="맑은 고딕" pitchFamily="34" charset="0"/>
-                <a:ea typeface="맑은 고딕" pitchFamily="34" charset="-122"/>
-                <a:cs typeface="맑은 고딕" pitchFamily="34" charset="-120"/>
-              </a:rPr>
-              <a:t>중간발표까지 11일</a:t>
-            </a:r>
-            <a:endParaRPr lang="en-US" sz="3000" dirty="0"/>
-          </a:p>
-        </p:txBody>
-      </p:sp>
-      <p:sp>
-        <p:nvSpPr>
-          <p:cNvPr id="3" name="Shape 1"/>
-          <p:cNvSpPr/>
-          <p:nvPr/>
-        </p:nvSpPr>
-        <p:spPr>
-          <a:xfrm>
-            <a:off x="685800" y="1965960"/>
-            <a:ext cx="384048" cy="384048"/>
-          </a:xfrm>
-          <a:prstGeom prst="ellipse">
-            <a:avLst/>
-          </a:prstGeom>
-          <a:solidFill>
-            <a:srgbClr val="B8442F"/>
-          </a:solidFill>
-          <a:ln w="12700">
-            <a:solidFill>
-              <a:srgbClr val="B8442F"/>
-            </a:solidFill>
-            <a:prstDash val="solid"/>
-          </a:ln>
-        </p:spPr>
-      </p:sp>
-      <p:sp>
-        <p:nvSpPr>
-          <p:cNvPr id="4" name="Text 2"/>
-          <p:cNvSpPr txBox="1"/>
-          <p:nvPr/>
-        </p:nvSpPr>
-        <p:spPr>
-          <a:xfrm>
-            <a:off x="685800" y="1965960"/>
-            <a:ext cx="384048" cy="384048"/>
-          </a:xfrm>
-          <a:prstGeom prst="rect">
-            <a:avLst/>
-          </a:prstGeom>
-          <a:noFill/>
-          <a:ln/>
-        </p:spPr>
-        <p:txBody>
-          <a:bodyPr wrap="square" lIns="0" tIns="0" rIns="0" bIns="0" rtlCol="0" anchor="ctr"/>
-          <a:lstStyle/>
-          <a:p>
-            <a:pPr algn="ctr" indent="0" marL="0">
-              <a:buNone/>
-            </a:pPr>
-            <a:r>
-              <a:rPr lang="en-US" sz="1300" b="1" dirty="0">
-                <a:solidFill>
-                  <a:srgbClr val="FFFFFF"/>
-                </a:solidFill>
-                <a:latin typeface="맑은 고딕" pitchFamily="34" charset="0"/>
-                <a:ea typeface="맑은 고딕" pitchFamily="34" charset="-122"/>
-                <a:cs typeface="맑은 고딕" pitchFamily="34" charset="-120"/>
-              </a:rPr>
-              <a:t>1</a:t>
-            </a:r>
-            <a:endParaRPr lang="en-US" sz="1300" dirty="0"/>
-          </a:p>
-        </p:txBody>
-      </p:sp>
-      <p:sp>
-        <p:nvSpPr>
-          <p:cNvPr id="5" name="Text 3"/>
-          <p:cNvSpPr txBox="1"/>
-          <p:nvPr/>
-        </p:nvSpPr>
-        <p:spPr>
-          <a:xfrm>
-            <a:off x="1280160" y="1856232"/>
-            <a:ext cx="6858000" cy="365760"/>
-          </a:xfrm>
-          <a:prstGeom prst="rect">
-            <a:avLst/>
-          </a:prstGeom>
-          <a:noFill/>
-          <a:ln/>
-        </p:spPr>
-        <p:txBody>
-          <a:bodyPr wrap="square" lIns="0" tIns="0" rIns="0" bIns="0" rtlCol="0" anchor="ctr"/>
-          <a:lstStyle/>
-          <a:p>
-            <a:pPr indent="0" marL="0">
-              <a:buNone/>
-            </a:pPr>
-            <a:r>
-              <a:rPr lang="en-US" sz="1700" b="1" dirty="0">
-                <a:solidFill>
-                  <a:srgbClr val="161C28"/>
-                </a:solidFill>
-                <a:latin typeface="맑은 고딕" pitchFamily="34" charset="0"/>
-                <a:ea typeface="맑은 고딕" pitchFamily="34" charset="-122"/>
-                <a:cs typeface="맑은 고딕" pitchFamily="34" charset="-120"/>
-              </a:rPr>
-              <a:t>세그먼트를 확정한다</a:t>
-            </a:r>
-            <a:endParaRPr lang="en-US" sz="1700" dirty="0"/>
-          </a:p>
-        </p:txBody>
-      </p:sp>
-      <p:sp>
-        <p:nvSpPr>
-          <p:cNvPr id="6" name="Text 4"/>
-          <p:cNvSpPr txBox="1"/>
-          <p:nvPr/>
-        </p:nvSpPr>
-        <p:spPr>
-          <a:xfrm>
-            <a:off x="1280160" y="2240280"/>
-            <a:ext cx="9144000" cy="365760"/>
-          </a:xfrm>
-          <a:prstGeom prst="rect">
-            <a:avLst/>
-          </a:prstGeom>
-          <a:noFill/>
-          <a:ln/>
-        </p:spPr>
-        <p:txBody>
-          <a:bodyPr wrap="square" lIns="0" tIns="0" rIns="0" bIns="0" rtlCol="0" anchor="ctr"/>
-          <a:lstStyle/>
-          <a:p>
-            <a:pPr indent="0" marL="0">
-              <a:buNone/>
-            </a:pPr>
-            <a:r>
-              <a:rPr lang="en-US" sz="1250" dirty="0">
-                <a:solidFill>
-                  <a:srgbClr val="6B7488"/>
-                </a:solidFill>
-                <a:latin typeface="맑은 고딕" pitchFamily="34" charset="0"/>
-                <a:ea typeface="맑은 고딕" pitchFamily="34" charset="-122"/>
-                <a:cs typeface="맑은 고딕" pitchFamily="34" charset="-120"/>
-              </a:rPr>
-              <a:t>여행·숙박이냐 해외구매대행이냐, 아니면 다른 방향이냐</a:t>
-            </a:r>
-            <a:endParaRPr lang="en-US" sz="1250" dirty="0"/>
-          </a:p>
-        </p:txBody>
-      </p:sp>
-      <p:sp>
-        <p:nvSpPr>
-          <p:cNvPr id="7" name="Shape 5"/>
-          <p:cNvSpPr/>
-          <p:nvPr/>
-        </p:nvSpPr>
-        <p:spPr>
-          <a:xfrm>
-            <a:off x="685800" y="3063240"/>
-            <a:ext cx="384048" cy="384048"/>
-          </a:xfrm>
-          <a:prstGeom prst="ellipse">
-            <a:avLst/>
-          </a:prstGeom>
-          <a:solidFill>
-            <a:srgbClr val="B8442F"/>
-          </a:solidFill>
-          <a:ln w="12700">
-            <a:solidFill>
-              <a:srgbClr val="B8442F"/>
-            </a:solidFill>
-            <a:prstDash val="solid"/>
-          </a:ln>
-        </p:spPr>
-      </p:sp>
-      <p:sp>
-        <p:nvSpPr>
-          <p:cNvPr id="8" name="Text 6"/>
-          <p:cNvSpPr txBox="1"/>
-          <p:nvPr/>
-        </p:nvSpPr>
-        <p:spPr>
-          <a:xfrm>
-            <a:off x="685800" y="3063240"/>
-            <a:ext cx="384048" cy="384048"/>
-          </a:xfrm>
-          <a:prstGeom prst="rect">
-            <a:avLst/>
-          </a:prstGeom>
-          <a:noFill/>
-          <a:ln/>
-        </p:spPr>
-        <p:txBody>
-          <a:bodyPr wrap="square" lIns="0" tIns="0" rIns="0" bIns="0" rtlCol="0" anchor="ctr"/>
-          <a:lstStyle/>
-          <a:p>
-            <a:pPr algn="ctr" indent="0" marL="0">
-              <a:buNone/>
-            </a:pPr>
-            <a:r>
-              <a:rPr lang="en-US" sz="1300" b="1" dirty="0">
-                <a:solidFill>
-                  <a:srgbClr val="FFFFFF"/>
-                </a:solidFill>
-                <a:latin typeface="맑은 고딕" pitchFamily="34" charset="0"/>
-                <a:ea typeface="맑은 고딕" pitchFamily="34" charset="-122"/>
-                <a:cs typeface="맑은 고딕" pitchFamily="34" charset="-120"/>
-              </a:rPr>
-              <a:t>2</a:t>
-            </a:r>
-            <a:endParaRPr lang="en-US" sz="1300" dirty="0"/>
-          </a:p>
-        </p:txBody>
-      </p:sp>
-      <p:sp>
-        <p:nvSpPr>
-          <p:cNvPr id="9" name="Text 7"/>
-          <p:cNvSpPr txBox="1"/>
-          <p:nvPr/>
-        </p:nvSpPr>
-        <p:spPr>
-          <a:xfrm>
-            <a:off x="1280160" y="2953512"/>
-            <a:ext cx="6858000" cy="365760"/>
-          </a:xfrm>
-          <a:prstGeom prst="rect">
-            <a:avLst/>
-          </a:prstGeom>
-          <a:noFill/>
-          <a:ln/>
-        </p:spPr>
-        <p:txBody>
-          <a:bodyPr wrap="square" lIns="0" tIns="0" rIns="0" bIns="0" rtlCol="0" anchor="ctr"/>
-          <a:lstStyle/>
-          <a:p>
-            <a:pPr indent="0" marL="0">
-              <a:buNone/>
-            </a:pPr>
-            <a:r>
-              <a:rPr lang="en-US" sz="1700" b="1" dirty="0">
-                <a:solidFill>
-                  <a:srgbClr val="161C28"/>
-                </a:solidFill>
-                <a:latin typeface="맑은 고딕" pitchFamily="34" charset="0"/>
-                <a:ea typeface="맑은 고딕" pitchFamily="34" charset="-122"/>
-                <a:cs typeface="맑은 고딕" pitchFamily="34" charset="-120"/>
-              </a:rPr>
-              <a:t>실사용자 데이터를 확보한다</a:t>
-            </a:r>
-            <a:endParaRPr lang="en-US" sz="1700" dirty="0"/>
-          </a:p>
-        </p:txBody>
-      </p:sp>
-      <p:sp>
-        <p:nvSpPr>
-          <p:cNvPr id="10" name="Text 8"/>
-          <p:cNvSpPr txBox="1"/>
-          <p:nvPr/>
-        </p:nvSpPr>
-        <p:spPr>
-          <a:xfrm>
-            <a:off x="1280160" y="3337560"/>
-            <a:ext cx="9144000" cy="365760"/>
-          </a:xfrm>
-          <a:prstGeom prst="rect">
-            <a:avLst/>
-          </a:prstGeom>
-          <a:noFill/>
-          <a:ln/>
-        </p:spPr>
-        <p:txBody>
-          <a:bodyPr wrap="square" lIns="0" tIns="0" rIns="0" bIns="0" rtlCol="0" anchor="ctr"/>
-          <a:lstStyle/>
-          <a:p>
-            <a:pPr indent="0" marL="0">
-              <a:buNone/>
-            </a:pPr>
-            <a:r>
-              <a:rPr lang="en-US" sz="1250" dirty="0">
-                <a:solidFill>
-                  <a:srgbClr val="6B7488"/>
-                </a:solidFill>
-                <a:latin typeface="맑은 고딕" pitchFamily="34" charset="0"/>
-                <a:ea typeface="맑은 고딕" pitchFamily="34" charset="-122"/>
-                <a:cs typeface="맑은 고딕" pitchFamily="34" charset="-120"/>
-              </a:rPr>
-              <a:t>멘토가 지적한 부분. 지금 판매자 관점 실데이터가 0건이다</a:t>
-            </a:r>
-            <a:endParaRPr lang="en-US" sz="1250" dirty="0"/>
-          </a:p>
-        </p:txBody>
-      </p:sp>
-      <p:sp>
-        <p:nvSpPr>
-          <p:cNvPr id="11" name="Shape 9"/>
-          <p:cNvSpPr/>
-          <p:nvPr/>
-        </p:nvSpPr>
-        <p:spPr>
-          <a:xfrm>
-            <a:off x="685800" y="4160520"/>
-            <a:ext cx="384048" cy="384048"/>
-          </a:xfrm>
-          <a:prstGeom prst="ellipse">
-            <a:avLst/>
+            <a:ext cx="1188720" cy="310896"/>
+          </a:xfrm>
+          <a:prstGeom prst="roundRect">
+            <a:avLst>
+              <a:gd name="adj" fmla="val 17647"/>
+            </a:avLst>
           </a:prstGeom>
           <a:solidFill>
             <a:srgbClr val="A8720C"/>
@@ -5923,14 +6646,14 @@
       </p:sp>
       <p:sp>
         <p:nvSpPr>
-          <p:cNvPr id="12" name="Text 10"/>
-          <p:cNvSpPr txBox="1"/>
-          <p:nvPr/>
-        </p:nvSpPr>
-        <p:spPr>
-          <a:xfrm>
-            <a:off x="685800" y="4160520"/>
-            <a:ext cx="384048" cy="384048"/>
+          <p:cNvPr id="3" name="Text 1"/>
+          <p:cNvSpPr txBox="1"/>
+          <p:nvPr/>
+        </p:nvSpPr>
+        <p:spPr>
+          <a:xfrm>
+            <a:off x="685800" y="566928"/>
+            <a:ext cx="1188720" cy="310896"/>
           </a:xfrm>
           <a:prstGeom prst="rect">
             <a:avLst/>
@@ -5946,7 +6669,7 @@
               <a:buNone/>
             </a:pPr>
             <a:r>
-              <a:rPr lang="en-US" sz="1300" b="1" dirty="0">
+              <a:rPr lang="en-US" sz="1200" b="1" dirty="0">
                 <a:solidFill>
                   <a:srgbClr val="FFFFFF"/>
                 </a:solidFill>
@@ -5954,38 +6677,38 @@
                 <a:ea typeface="맑은 고딕" pitchFamily="34" charset="-122"/>
                 <a:cs typeface="맑은 고딕" pitchFamily="34" charset="-120"/>
               </a:rPr>
-              <a:t>3</a:t>
-            </a:r>
-            <a:endParaRPr lang="en-US" sz="1300" dirty="0"/>
-          </a:p>
-        </p:txBody>
-      </p:sp>
-      <p:sp>
-        <p:nvSpPr>
-          <p:cNvPr id="13" name="Text 11"/>
-          <p:cNvSpPr txBox="1"/>
-          <p:nvPr/>
-        </p:nvSpPr>
-        <p:spPr>
-          <a:xfrm>
-            <a:off x="1280160" y="4050792"/>
-            <a:ext cx="6858000" cy="365760"/>
-          </a:xfrm>
-          <a:prstGeom prst="rect">
-            <a:avLst/>
-          </a:prstGeom>
-          <a:noFill/>
-          <a:ln/>
-        </p:spPr>
-        <p:txBody>
-          <a:bodyPr wrap="square" lIns="0" tIns="0" rIns="0" bIns="0" rtlCol="0" anchor="ctr"/>
-          <a:lstStyle/>
-          <a:p>
-            <a:pPr indent="0" marL="0">
-              <a:buNone/>
-            </a:pPr>
-            <a:r>
-              <a:rPr lang="en-US" sz="1700" b="1" dirty="0">
+              <a:t>09.02–</a:t>
+            </a:r>
+            <a:endParaRPr lang="en-US" sz="1200" dirty="0"/>
+          </a:p>
+        </p:txBody>
+      </p:sp>
+      <p:sp>
+        <p:nvSpPr>
+          <p:cNvPr id="4" name="Text 2"/>
+          <p:cNvSpPr txBox="1"/>
+          <p:nvPr/>
+        </p:nvSpPr>
+        <p:spPr>
+          <a:xfrm>
+            <a:off x="685800" y="1051560"/>
+            <a:ext cx="10789920" cy="914400"/>
+          </a:xfrm>
+          <a:prstGeom prst="rect">
+            <a:avLst/>
+          </a:prstGeom>
+          <a:noFill/>
+          <a:ln/>
+        </p:spPr>
+        <p:txBody>
+          <a:bodyPr wrap="square" lIns="0" tIns="0" rIns="0" bIns="0" rtlCol="0" anchor="ctr"/>
+          <a:lstStyle/>
+          <a:p>
+            <a:pPr indent="0" marL="0">
+              <a:buNone/>
+            </a:pPr>
+            <a:r>
+              <a:rPr lang="en-US" sz="3000" b="1" dirty="0">
                 <a:solidFill>
                   <a:srgbClr val="161C28"/>
                 </a:solidFill>
@@ -5993,38 +6716,38 @@
                 <a:ea typeface="맑은 고딕" pitchFamily="34" charset="-122"/>
                 <a:cs typeface="맑은 고딕" pitchFamily="34" charset="-120"/>
               </a:rPr>
-              <a:t>과잉 기권 35% 를 낮춘다</a:t>
-            </a:r>
-            <a:endParaRPr lang="en-US" sz="1700" dirty="0"/>
-          </a:p>
-        </p:txBody>
-      </p:sp>
-      <p:sp>
-        <p:nvSpPr>
-          <p:cNvPr id="14" name="Text 12"/>
-          <p:cNvSpPr txBox="1"/>
-          <p:nvPr/>
-        </p:nvSpPr>
-        <p:spPr>
-          <a:xfrm>
-            <a:off x="1280160" y="4434840"/>
-            <a:ext cx="9144000" cy="365760"/>
-          </a:xfrm>
-          <a:prstGeom prst="rect">
-            <a:avLst/>
-          </a:prstGeom>
-          <a:noFill/>
-          <a:ln/>
-        </p:spPr>
-        <p:txBody>
-          <a:bodyPr wrap="square" lIns="0" tIns="0" rIns="0" bIns="0" rtlCol="0" anchor="ctr"/>
-          <a:lstStyle/>
-          <a:p>
-            <a:pPr indent="0" marL="0">
-              <a:buNone/>
-            </a:pPr>
-            <a:r>
-              <a:rPr lang="en-US" sz="1250" dirty="0">
+              <a:t>그래서 시장을 다시 좁히는 중이다</a:t>
+            </a:r>
+            <a:endParaRPr lang="en-US" sz="3000" dirty="0"/>
+          </a:p>
+        </p:txBody>
+      </p:sp>
+      <p:sp>
+        <p:nvSpPr>
+          <p:cNvPr id="5" name="Text 3"/>
+          <p:cNvSpPr txBox="1"/>
+          <p:nvPr/>
+        </p:nvSpPr>
+        <p:spPr>
+          <a:xfrm>
+            <a:off x="685800" y="2048256"/>
+            <a:ext cx="10789920" cy="411480"/>
+          </a:xfrm>
+          <a:prstGeom prst="rect">
+            <a:avLst/>
+          </a:prstGeom>
+          <a:noFill/>
+          <a:ln/>
+        </p:spPr>
+        <p:txBody>
+          <a:bodyPr wrap="square" lIns="0" tIns="0" rIns="0" bIns="0" rtlCol="0" anchor="ctr"/>
+          <a:lstStyle/>
+          <a:p>
+            <a:pPr indent="0" marL="0">
+              <a:buNone/>
+            </a:pPr>
+            <a:r>
+              <a:rPr lang="en-US" sz="1400" dirty="0">
                 <a:solidFill>
                   <a:srgbClr val="6B7488"/>
                 </a:solidFill>
@@ -6032,32 +6755,34 @@
                 <a:ea typeface="맑은 고딕" pitchFamily="34" charset="-122"/>
                 <a:cs typeface="맑은 고딕" pitchFamily="34" charset="-120"/>
               </a:rPr>
-              <a:t>근거가 충분한데 사람에게 넘기는 비율</a:t>
-            </a:r>
-            <a:endParaRPr lang="en-US" sz="1250" dirty="0"/>
-          </a:p>
-        </p:txBody>
-      </p:sp>
-      <p:sp>
-        <p:nvSpPr>
-          <p:cNvPr id="15" name="Shape 13"/>
+              <a:t>CS 를 넓게 훑고 세그먼트에 점수를 매겨 후보를 줄이고 있다. 아직 정하지 않았다.</a:t>
+            </a:r>
+            <a:endParaRPr lang="en-US" sz="1400" dirty="0"/>
+          </a:p>
+        </p:txBody>
+      </p:sp>
+      <p:sp>
+        <p:nvSpPr>
+          <p:cNvPr id="6" name="Shape 4"/>
           <p:cNvSpPr/>
           <p:nvPr/>
         </p:nvSpPr>
         <p:spPr>
           <a:xfrm>
-            <a:off x="685800" y="5257800"/>
-            <a:ext cx="384048" cy="384048"/>
-          </a:xfrm>
-          <a:prstGeom prst="ellipse">
-            <a:avLst/>
+            <a:off x="685800" y="2377440"/>
+            <a:ext cx="10789920" cy="777240"/>
+          </a:xfrm>
+          <a:prstGeom prst="roundRect">
+            <a:avLst>
+              <a:gd name="adj" fmla="val 11765"/>
+            </a:avLst>
           </a:prstGeom>
           <a:solidFill>
-            <a:srgbClr val="2F5BD8"/>
+            <a:srgbClr val="F4F6FA"/>
           </a:solidFill>
           <a:ln w="12700">
             <a:solidFill>
-              <a:srgbClr val="2F5BD8"/>
+              <a:srgbClr val="DBE0EA"/>
             </a:solidFill>
             <a:prstDash val="solid"/>
           </a:ln>
@@ -6065,40 +6790,355 @@
       </p:sp>
       <p:sp>
         <p:nvSpPr>
+          <p:cNvPr id="7" name="Text 5"/>
+          <p:cNvSpPr txBox="1"/>
+          <p:nvPr/>
+        </p:nvSpPr>
+        <p:spPr>
+          <a:xfrm>
+            <a:off x="1005840" y="2468880"/>
+            <a:ext cx="3291840" cy="365760"/>
+          </a:xfrm>
+          <a:prstGeom prst="rect">
+            <a:avLst/>
+          </a:prstGeom>
+          <a:noFill/>
+          <a:ln/>
+        </p:spPr>
+        <p:txBody>
+          <a:bodyPr wrap="square" lIns="0" tIns="0" rIns="0" bIns="0" rtlCol="0" anchor="ctr"/>
+          <a:lstStyle/>
+          <a:p>
+            <a:pPr indent="0" marL="0">
+              <a:buNone/>
+            </a:pPr>
+            <a:r>
+              <a:rPr lang="en-US" sz="1500" b="1" dirty="0">
+                <a:solidFill>
+                  <a:srgbClr val="161C28"/>
+                </a:solidFill>
+                <a:latin typeface="맑은 고딕" pitchFamily="34" charset="0"/>
+                <a:ea typeface="맑은 고딕" pitchFamily="34" charset="-122"/>
+                <a:cs typeface="맑은 고딕" pitchFamily="34" charset="-120"/>
+              </a:rPr>
+              <a:t>해외구매대행</a:t>
+            </a:r>
+            <a:endParaRPr lang="en-US" sz="1500" dirty="0"/>
+          </a:p>
+        </p:txBody>
+      </p:sp>
+      <p:sp>
+        <p:nvSpPr>
+          <p:cNvPr id="8" name="Text 6"/>
+          <p:cNvSpPr txBox="1"/>
+          <p:nvPr/>
+        </p:nvSpPr>
+        <p:spPr>
+          <a:xfrm>
+            <a:off x="4434840" y="2487168"/>
+            <a:ext cx="6766560" cy="548640"/>
+          </a:xfrm>
+          <a:prstGeom prst="rect">
+            <a:avLst/>
+          </a:prstGeom>
+          <a:noFill/>
+          <a:ln/>
+        </p:spPr>
+        <p:txBody>
+          <a:bodyPr wrap="square" lIns="0" tIns="0" rIns="0" bIns="0" rtlCol="0" anchor="ctr"/>
+          <a:lstStyle/>
+          <a:p>
+            <a:pPr indent="0" marL="0">
+              <a:buNone/>
+            </a:pPr>
+            <a:r>
+              <a:rPr lang="en-US" sz="1250" dirty="0">
+                <a:solidFill>
+                  <a:srgbClr val="6B7488"/>
+                </a:solidFill>
+                <a:latin typeface="맑은 고딕" pitchFamily="34" charset="0"/>
+                <a:ea typeface="맑은 고딕" pitchFamily="34" charset="-122"/>
+                <a:cs typeface="맑은 고딕" pitchFamily="34" charset="-120"/>
+              </a:rPr>
+              <a:t>직전 후보. 통관·지연·환불 규정이 복잡해 판정 여지가 크다</a:t>
+            </a:r>
+            <a:endParaRPr lang="en-US" sz="1250" dirty="0"/>
+          </a:p>
+        </p:txBody>
+      </p:sp>
+      <p:sp>
+        <p:nvSpPr>
+          <p:cNvPr id="9" name="Shape 7"/>
+          <p:cNvSpPr/>
+          <p:nvPr/>
+        </p:nvSpPr>
+        <p:spPr>
+          <a:xfrm>
+            <a:off x="685800" y="3291840"/>
+            <a:ext cx="10789920" cy="777240"/>
+          </a:xfrm>
+          <a:prstGeom prst="roundRect">
+            <a:avLst>
+              <a:gd name="adj" fmla="val 11765"/>
+            </a:avLst>
+          </a:prstGeom>
+          <a:solidFill>
+            <a:srgbClr val="F4F6FA"/>
+          </a:solidFill>
+          <a:ln w="12700">
+            <a:solidFill>
+              <a:srgbClr val="DBE0EA"/>
+            </a:solidFill>
+            <a:prstDash val="solid"/>
+          </a:ln>
+        </p:spPr>
+      </p:sp>
+      <p:sp>
+        <p:nvSpPr>
+          <p:cNvPr id="10" name="Text 8"/>
+          <p:cNvSpPr txBox="1"/>
+          <p:nvPr/>
+        </p:nvSpPr>
+        <p:spPr>
+          <a:xfrm>
+            <a:off x="1005840" y="3383280"/>
+            <a:ext cx="3291840" cy="365760"/>
+          </a:xfrm>
+          <a:prstGeom prst="rect">
+            <a:avLst/>
+          </a:prstGeom>
+          <a:noFill/>
+          <a:ln/>
+        </p:spPr>
+        <p:txBody>
+          <a:bodyPr wrap="square" lIns="0" tIns="0" rIns="0" bIns="0" rtlCol="0" anchor="ctr"/>
+          <a:lstStyle/>
+          <a:p>
+            <a:pPr indent="0" marL="0">
+              <a:buNone/>
+            </a:pPr>
+            <a:r>
+              <a:rPr lang="en-US" sz="1500" b="1" dirty="0">
+                <a:solidFill>
+                  <a:srgbClr val="161C28"/>
+                </a:solidFill>
+                <a:latin typeface="맑은 고딕" pitchFamily="34" charset="0"/>
+                <a:ea typeface="맑은 고딕" pitchFamily="34" charset="-122"/>
+                <a:cs typeface="맑은 고딕" pitchFamily="34" charset="-120"/>
+              </a:rPr>
+              <a:t>여행·숙박 중소사업자</a:t>
+            </a:r>
+            <a:endParaRPr lang="en-US" sz="1500" dirty="0"/>
+          </a:p>
+        </p:txBody>
+      </p:sp>
+      <p:sp>
+        <p:nvSpPr>
+          <p:cNvPr id="11" name="Text 9"/>
+          <p:cNvSpPr txBox="1"/>
+          <p:nvPr/>
+        </p:nvSpPr>
+        <p:spPr>
+          <a:xfrm>
+            <a:off x="4434840" y="3401568"/>
+            <a:ext cx="6766560" cy="548640"/>
+          </a:xfrm>
+          <a:prstGeom prst="rect">
+            <a:avLst/>
+          </a:prstGeom>
+          <a:noFill/>
+          <a:ln/>
+        </p:spPr>
+        <p:txBody>
+          <a:bodyPr wrap="square" lIns="0" tIns="0" rIns="0" bIns="0" rtlCol="0" anchor="ctr"/>
+          <a:lstStyle/>
+          <a:p>
+            <a:pPr indent="0" marL="0">
+              <a:buNone/>
+            </a:pPr>
+            <a:r>
+              <a:rPr lang="en-US" sz="1250" dirty="0">
+                <a:solidFill>
+                  <a:srgbClr val="6B7488"/>
+                </a:solidFill>
+                <a:latin typeface="맑은 고딕" pitchFamily="34" charset="0"/>
+                <a:ea typeface="맑은 고딕" pitchFamily="34" charset="-122"/>
+                <a:cs typeface="맑은 고딕" pitchFamily="34" charset="-120"/>
+              </a:rPr>
+              <a:t>현재 심층 조사 중. 취소·환불 규정이 법으로 정해져 있다</a:t>
+            </a:r>
+            <a:endParaRPr lang="en-US" sz="1250" dirty="0"/>
+          </a:p>
+        </p:txBody>
+      </p:sp>
+      <p:sp>
+        <p:nvSpPr>
+          <p:cNvPr id="12" name="Shape 10"/>
+          <p:cNvSpPr/>
+          <p:nvPr/>
+        </p:nvSpPr>
+        <p:spPr>
+          <a:xfrm>
+            <a:off x="685800" y="4206240"/>
+            <a:ext cx="10789920" cy="777240"/>
+          </a:xfrm>
+          <a:prstGeom prst="roundRect">
+            <a:avLst>
+              <a:gd name="adj" fmla="val 11765"/>
+            </a:avLst>
+          </a:prstGeom>
+          <a:solidFill>
+            <a:srgbClr val="F4F6FA"/>
+          </a:solidFill>
+          <a:ln w="12700">
+            <a:solidFill>
+              <a:srgbClr val="DBE0EA"/>
+            </a:solidFill>
+            <a:prstDash val="solid"/>
+          </a:ln>
+        </p:spPr>
+      </p:sp>
+      <p:sp>
+        <p:nvSpPr>
+          <p:cNvPr id="13" name="Text 11"/>
+          <p:cNvSpPr txBox="1"/>
+          <p:nvPr/>
+        </p:nvSpPr>
+        <p:spPr>
+          <a:xfrm>
+            <a:off x="1005840" y="4297680"/>
+            <a:ext cx="3291840" cy="365760"/>
+          </a:xfrm>
+          <a:prstGeom prst="rect">
+            <a:avLst/>
+          </a:prstGeom>
+          <a:noFill/>
+          <a:ln/>
+        </p:spPr>
+        <p:txBody>
+          <a:bodyPr wrap="square" lIns="0" tIns="0" rIns="0" bIns="0" rtlCol="0" anchor="ctr"/>
+          <a:lstStyle/>
+          <a:p>
+            <a:pPr indent="0" marL="0">
+              <a:buNone/>
+            </a:pPr>
+            <a:r>
+              <a:rPr lang="en-US" sz="1500" b="1" dirty="0">
+                <a:solidFill>
+                  <a:srgbClr val="161C28"/>
+                </a:solidFill>
+                <a:latin typeface="맑은 고딕" pitchFamily="34" charset="0"/>
+                <a:ea typeface="맑은 고딕" pitchFamily="34" charset="-122"/>
+                <a:cs typeface="맑은 고딕" pitchFamily="34" charset="-120"/>
+              </a:rPr>
+              <a:t>상담사 훈련 시뮬레이터</a:t>
+            </a:r>
+            <a:endParaRPr lang="en-US" sz="1500" dirty="0"/>
+          </a:p>
+        </p:txBody>
+      </p:sp>
+      <p:sp>
+        <p:nvSpPr>
+          <p:cNvPr id="14" name="Text 12"/>
+          <p:cNvSpPr txBox="1"/>
+          <p:nvPr/>
+        </p:nvSpPr>
+        <p:spPr>
+          <a:xfrm>
+            <a:off x="4434840" y="4315968"/>
+            <a:ext cx="6766560" cy="548640"/>
+          </a:xfrm>
+          <a:prstGeom prst="rect">
+            <a:avLst/>
+          </a:prstGeom>
+          <a:noFill/>
+          <a:ln/>
+        </p:spPr>
+        <p:txBody>
+          <a:bodyPr wrap="square" lIns="0" tIns="0" rIns="0" bIns="0" rtlCol="0" anchor="ctr"/>
+          <a:lstStyle/>
+          <a:p>
+            <a:pPr indent="0" marL="0">
+              <a:buNone/>
+            </a:pPr>
+            <a:r>
+              <a:rPr lang="en-US" sz="1250" dirty="0">
+                <a:solidFill>
+                  <a:srgbClr val="6B7488"/>
+                </a:solidFill>
+                <a:latin typeface="맑은 고딕" pitchFamily="34" charset="0"/>
+                <a:ea typeface="맑은 고딕" pitchFamily="34" charset="-122"/>
+                <a:cs typeface="맑은 고딕" pitchFamily="34" charset="-120"/>
+              </a:rPr>
+              <a:t>CS 를 응대가 아니라 훈련으로 뒤집어 본 안</a:t>
+            </a:r>
+            <a:endParaRPr lang="en-US" sz="1250" dirty="0"/>
+          </a:p>
+        </p:txBody>
+      </p:sp>
+      <p:sp>
+        <p:nvSpPr>
+          <p:cNvPr id="15" name="Shape 13"/>
+          <p:cNvSpPr/>
+          <p:nvPr/>
+        </p:nvSpPr>
+        <p:spPr>
+          <a:xfrm>
+            <a:off x="685800" y="5120640"/>
+            <a:ext cx="10789920" cy="777240"/>
+          </a:xfrm>
+          <a:prstGeom prst="roundRect">
+            <a:avLst>
+              <a:gd name="adj" fmla="val 11765"/>
+            </a:avLst>
+          </a:prstGeom>
+          <a:solidFill>
+            <a:srgbClr val="F4F6FA"/>
+          </a:solidFill>
+          <a:ln w="12700">
+            <a:solidFill>
+              <a:srgbClr val="DBE0EA"/>
+            </a:solidFill>
+            <a:prstDash val="solid"/>
+          </a:ln>
+        </p:spPr>
+      </p:sp>
+      <p:sp>
+        <p:nvSpPr>
           <p:cNvPr id="16" name="Text 14"/>
           <p:cNvSpPr txBox="1"/>
           <p:nvPr/>
         </p:nvSpPr>
         <p:spPr>
           <a:xfrm>
-            <a:off x="685800" y="5257800"/>
-            <a:ext cx="384048" cy="384048"/>
-          </a:xfrm>
-          <a:prstGeom prst="rect">
-            <a:avLst/>
-          </a:prstGeom>
-          <a:noFill/>
-          <a:ln/>
-        </p:spPr>
-        <p:txBody>
-          <a:bodyPr wrap="square" lIns="0" tIns="0" rIns="0" bIns="0" rtlCol="0" anchor="ctr"/>
-          <a:lstStyle/>
-          <a:p>
-            <a:pPr algn="ctr" indent="0" marL="0">
-              <a:buNone/>
-            </a:pPr>
-            <a:r>
-              <a:rPr lang="en-US" sz="1300" b="1" dirty="0">
-                <a:solidFill>
-                  <a:srgbClr val="FFFFFF"/>
-                </a:solidFill>
-                <a:latin typeface="맑은 고딕" pitchFamily="34" charset="0"/>
-                <a:ea typeface="맑은 고딕" pitchFamily="34" charset="-122"/>
-                <a:cs typeface="맑은 고딕" pitchFamily="34" charset="-120"/>
-              </a:rPr>
-              <a:t>4</a:t>
-            </a:r>
-            <a:endParaRPr lang="en-US" sz="1300" dirty="0"/>
+            <a:off x="1005840" y="5212080"/>
+            <a:ext cx="3291840" cy="365760"/>
+          </a:xfrm>
+          <a:prstGeom prst="rect">
+            <a:avLst/>
+          </a:prstGeom>
+          <a:noFill/>
+          <a:ln/>
+        </p:spPr>
+        <p:txBody>
+          <a:bodyPr wrap="square" lIns="0" tIns="0" rIns="0" bIns="0" rtlCol="0" anchor="ctr"/>
+          <a:lstStyle/>
+          <a:p>
+            <a:pPr indent="0" marL="0">
+              <a:buNone/>
+            </a:pPr>
+            <a:r>
+              <a:rPr lang="en-US" sz="1500" b="1" dirty="0">
+                <a:solidFill>
+                  <a:srgbClr val="161C28"/>
+                </a:solidFill>
+                <a:latin typeface="맑은 고딕" pitchFamily="34" charset="0"/>
+                <a:ea typeface="맑은 고딕" pitchFamily="34" charset="-122"/>
+                <a:cs typeface="맑은 고딕" pitchFamily="34" charset="-120"/>
+              </a:rPr>
+              <a:t>소상공인 일반</a:t>
+            </a:r>
+            <a:endParaRPr lang="en-US" sz="1500" dirty="0"/>
           </a:p>
         </p:txBody>
       </p:sp>
@@ -6110,47 +7150,8 @@
         </p:nvSpPr>
         <p:spPr>
           <a:xfrm>
-            <a:off x="1280160" y="5148072"/>
-            <a:ext cx="6858000" cy="365760"/>
-          </a:xfrm>
-          <a:prstGeom prst="rect">
-            <a:avLst/>
-          </a:prstGeom>
-          <a:noFill/>
-          <a:ln/>
-        </p:spPr>
-        <p:txBody>
-          <a:bodyPr wrap="square" lIns="0" tIns="0" rIns="0" bIns="0" rtlCol="0" anchor="ctr"/>
-          <a:lstStyle/>
-          <a:p>
-            <a:pPr indent="0" marL="0">
-              <a:buNone/>
-            </a:pPr>
-            <a:r>
-              <a:rPr lang="en-US" sz="1700" b="1" dirty="0">
-                <a:solidFill>
-                  <a:srgbClr val="161C28"/>
-                </a:solidFill>
-                <a:latin typeface="맑은 고딕" pitchFamily="34" charset="0"/>
-                <a:ea typeface="맑은 고딕" pitchFamily="34" charset="-122"/>
-                <a:cs typeface="맑은 고딕" pitchFamily="34" charset="-120"/>
-              </a:rPr>
-              <a:t>Case lifecycle 이 도는 걸 보여준다</a:t>
-            </a:r>
-            <a:endParaRPr lang="en-US" sz="1700" dirty="0"/>
-          </a:p>
-        </p:txBody>
-      </p:sp>
-      <p:sp>
-        <p:nvSpPr>
-          <p:cNvPr id="18" name="Text 16"/>
-          <p:cNvSpPr txBox="1"/>
-          <p:nvPr/>
-        </p:nvSpPr>
-        <p:spPr>
-          <a:xfrm>
-            <a:off x="1280160" y="5532120"/>
-            <a:ext cx="9144000" cy="365760"/>
+            <a:off x="4434840" y="5230368"/>
+            <a:ext cx="6766560" cy="548640"/>
           </a:xfrm>
           <a:prstGeom prst="rect">
             <a:avLst/>
@@ -6174,7 +7175,7 @@
                 <a:ea typeface="맑은 고딕" pitchFamily="34" charset="-122"/>
                 <a:cs typeface="맑은 고딕" pitchFamily="34" charset="-120"/>
               </a:rPr>
-              <a:t>강사가 말한 핵심. 기술 나열이 아니라 한 건이 끝까지 가는 것</a:t>
+              <a:t>정부 AI 바우처 지원이 있다. 김지혜 조사</a:t>
             </a:r>
             <a:endParaRPr lang="en-US" sz="1250" dirty="0"/>
           </a:p>
